--- a/docs/Lectures/Week04/Lecture09_GEOG3319_Suvery123 and Collector.pptx
+++ b/docs/Lectures/Week04/Lecture09_GEOG3319_Suvery123 and Collector.pptx
@@ -8,24 +8,19 @@
     <p:sldMasterId id="2147483697" r:id="rId4"/>
   </p:sldMasterIdLst>
   <p:notesMasterIdLst>
-    <p:notesMasterId r:id="rId20"/>
+    <p:notesMasterId r:id="rId15"/>
   </p:notesMasterIdLst>
   <p:sldIdLst>
     <p:sldId id="914" r:id="rId5"/>
     <p:sldId id="1647" r:id="rId6"/>
     <p:sldId id="591" r:id="rId7"/>
-    <p:sldId id="592" r:id="rId8"/>
-    <p:sldId id="593" r:id="rId9"/>
-    <p:sldId id="594" r:id="rId10"/>
-    <p:sldId id="595" r:id="rId11"/>
-    <p:sldId id="596" r:id="rId12"/>
-    <p:sldId id="597" r:id="rId13"/>
-    <p:sldId id="598" r:id="rId14"/>
-    <p:sldId id="599" r:id="rId15"/>
-    <p:sldId id="600" r:id="rId16"/>
-    <p:sldId id="601" r:id="rId17"/>
-    <p:sldId id="602" r:id="rId18"/>
-    <p:sldId id="270" r:id="rId19"/>
+    <p:sldId id="1649" r:id="rId8"/>
+    <p:sldId id="1650" r:id="rId9"/>
+    <p:sldId id="1651" r:id="rId10"/>
+    <p:sldId id="1652" r:id="rId11"/>
+    <p:sldId id="1653" r:id="rId12"/>
+    <p:sldId id="1648" r:id="rId13"/>
+    <p:sldId id="270" r:id="rId14"/>
   </p:sldIdLst>
   <p:sldSz cx="8229600" cy="5143500"/>
   <p:notesSz cx="7010400" cy="9296400"/>
@@ -226,7 +221,7 @@
             <a:fld id="{66C520B4-85AA-9542-8CF7-3D2DDCE6041D}" type="datetimeFigureOut">
               <a:rPr lang="en-US" smtClean="0"/>
               <a:pPr/>
-              <a:t>9/8/2025</a:t>
+              <a:t>9/10/2025</a:t>
             </a:fld>
             <a:endParaRPr lang="en-US"/>
           </a:p>
@@ -596,12 +591,18 @@
 </p:notes>
 </file>
 
-<file path=ppt/notesSlides/notesSlide10.xml><?xml version="1.0" encoding="utf-8"?>
+<file path=ppt/notesSlides/notesSlide2.xml><?xml version="1.0" encoding="utf-8"?>
 <p:notes xmlns:a="http://schemas.openxmlformats.org/drawingml/2006/main" xmlns:r="http://schemas.openxmlformats.org/officeDocument/2006/relationships" xmlns:p="http://schemas.openxmlformats.org/presentationml/2006/main">
   <p:cSld>
     <p:spTree>
       <p:nvGrpSpPr>
-        <p:cNvPr id="1" name=""/>
+        <p:cNvPr id="1" name="">
+          <a:extLst>
+            <a:ext uri="{FF2B5EF4-FFF2-40B4-BE49-F238E27FC236}">
+              <a16:creationId xmlns:a16="http://schemas.microsoft.com/office/drawing/2014/main" id="{A6CDE519-8BCF-F7C4-FA36-62D25586D0BA}"/>
+            </a:ext>
+          </a:extLst>
+        </p:cNvPr>
         <p:cNvGrpSpPr/>
         <p:nvPr/>
       </p:nvGrpSpPr>
@@ -615,432 +616,85 @@
       </p:grpSpPr>
       <p:sp>
         <p:nvSpPr>
-          <p:cNvPr id="2" name="Slide Image Placeholder 1"/>
-          <p:cNvSpPr>
-            <a:spLocks noGrp="1" noRot="1" noChangeAspect="1"/>
+          <p:cNvPr id="7" name="Rectangle 5">
+            <a:extLst>
+              <a:ext uri="{FF2B5EF4-FFF2-40B4-BE49-F238E27FC236}">
+                <a16:creationId xmlns:a16="http://schemas.microsoft.com/office/drawing/2014/main" id="{177D0C31-F4AA-E42D-D53F-9F5FB09A49F3}"/>
+              </a:ext>
+            </a:extLst>
+          </p:cNvPr>
+          <p:cNvSpPr>
+            <a:spLocks noGrp="1" noChangeArrowheads="1"/>
+          </p:cNvSpPr>
+          <p:nvPr>
+            <p:ph type="sldNum" sz="quarter" idx="5"/>
+          </p:nvPr>
+        </p:nvSpPr>
+        <p:spPr>
+          <a:ln/>
+        </p:spPr>
+        <p:txBody>
+          <a:bodyPr/>
+          <a:lstStyle/>
+          <a:p>
+            <a:fld id="{0CE062E2-CA43-4035-9E13-AD9908C25B62}" type="slidenum">
+              <a:rPr lang="en-US" altLang="en-US"/>
+              <a:pPr/>
+              <a:t>9</a:t>
+            </a:fld>
+            <a:endParaRPr lang="en-US" altLang="en-US"/>
+          </a:p>
+        </p:txBody>
+      </p:sp>
+      <p:sp>
+        <p:nvSpPr>
+          <p:cNvPr id="124930" name="Rectangle 2">
+            <a:extLst>
+              <a:ext uri="{FF2B5EF4-FFF2-40B4-BE49-F238E27FC236}">
+                <a16:creationId xmlns:a16="http://schemas.microsoft.com/office/drawing/2014/main" id="{A2E4383D-A025-D16B-CDD3-A19146D9D66E}"/>
+              </a:ext>
+            </a:extLst>
+          </p:cNvPr>
+          <p:cNvSpPr>
+            <a:spLocks noGrp="1" noRot="1" noChangeAspect="1" noChangeArrowheads="1" noTextEdit="1"/>
           </p:cNvSpPr>
           <p:nvPr>
             <p:ph type="sldImg"/>
           </p:nvPr>
         </p:nvSpPr>
+        <p:spPr>
+          <a:ln/>
+        </p:spPr>
+      </p:sp>
+      <p:sp>
+        <p:nvSpPr>
+          <p:cNvPr id="124931" name="Rectangle 3">
+            <a:extLst>
+              <a:ext uri="{FF2B5EF4-FFF2-40B4-BE49-F238E27FC236}">
+                <a16:creationId xmlns:a16="http://schemas.microsoft.com/office/drawing/2014/main" id="{ACFED89D-B3CB-14E4-4CE6-26B62893701E}"/>
+              </a:ext>
+            </a:extLst>
+          </p:cNvPr>
+          <p:cNvSpPr>
+            <a:spLocks noGrp="1" noChangeArrowheads="1"/>
+          </p:cNvSpPr>
+          <p:nvPr>
+            <p:ph type="body" idx="1"/>
+          </p:nvPr>
+        </p:nvSpPr>
         <p:spPr/>
-      </p:sp>
-      <p:sp>
-        <p:nvSpPr>
-          <p:cNvPr id="3" name="Notes Placeholder 2"/>
-          <p:cNvSpPr>
-            <a:spLocks noGrp="1"/>
-          </p:cNvSpPr>
-          <p:nvPr>
-            <p:ph type="body" idx="1"/>
-          </p:nvPr>
-        </p:nvSpPr>
-        <p:spPr/>
         <p:txBody>
           <a:bodyPr/>
           <a:lstStyle/>
           <a:p>
-            <a:r>
-              <a:rPr lang="en-US" dirty="0"/>
-              <a:t>Update the field assets, or historical records</a:t>
-            </a:r>
-          </a:p>
-        </p:txBody>
-      </p:sp>
-      <p:sp>
-        <p:nvSpPr>
-          <p:cNvPr id="4" name="Slide Number Placeholder 3"/>
-          <p:cNvSpPr>
-            <a:spLocks noGrp="1"/>
-          </p:cNvSpPr>
-          <p:nvPr>
-            <p:ph type="sldNum" sz="quarter" idx="5"/>
-          </p:nvPr>
-        </p:nvSpPr>
-        <p:spPr/>
-        <p:txBody>
-          <a:bodyPr/>
-          <a:lstStyle/>
-          <a:p>
-            <a:fld id="{56507943-197E-CE46-82F0-5A323A24AE7A}" type="slidenum">
-              <a:rPr lang="en-US" smtClean="0"/>
-              <a:pPr/>
-              <a:t>12</a:t>
-            </a:fld>
-            <a:endParaRPr lang="en-US"/>
+            <a:endParaRPr lang="en-US" altLang="en-US" dirty="0"/>
           </a:p>
         </p:txBody>
       </p:sp>
     </p:spTree>
     <p:extLst>
       <p:ext uri="{BB962C8B-B14F-4D97-AF65-F5344CB8AC3E}">
-        <p14:creationId xmlns:p14="http://schemas.microsoft.com/office/powerpoint/2010/main" val="4262964186"/>
-      </p:ext>
-    </p:extLst>
-  </p:cSld>
-  <p:clrMapOvr>
-    <a:masterClrMapping/>
-  </p:clrMapOvr>
-</p:notes>
-</file>
-
-<file path=ppt/notesSlides/notesSlide11.xml><?xml version="1.0" encoding="utf-8"?>
-<p:notes xmlns:a="http://schemas.openxmlformats.org/drawingml/2006/main" xmlns:r="http://schemas.openxmlformats.org/officeDocument/2006/relationships" xmlns:p="http://schemas.openxmlformats.org/presentationml/2006/main">
-  <p:cSld>
-    <p:spTree>
-      <p:nvGrpSpPr>
-        <p:cNvPr id="1" name=""/>
-        <p:cNvGrpSpPr/>
-        <p:nvPr/>
-      </p:nvGrpSpPr>
-      <p:grpSpPr>
-        <a:xfrm>
-          <a:off x="0" y="0"/>
-          <a:ext cx="0" cy="0"/>
-          <a:chOff x="0" y="0"/>
-          <a:chExt cx="0" cy="0"/>
-        </a:xfrm>
-      </p:grpSpPr>
-      <p:sp>
-        <p:nvSpPr>
-          <p:cNvPr id="2" name="Slide Image Placeholder 1"/>
-          <p:cNvSpPr>
-            <a:spLocks noGrp="1" noRot="1" noChangeAspect="1"/>
-          </p:cNvSpPr>
-          <p:nvPr>
-            <p:ph type="sldImg"/>
-          </p:nvPr>
-        </p:nvSpPr>
-        <p:spPr/>
-      </p:sp>
-      <p:sp>
-        <p:nvSpPr>
-          <p:cNvPr id="3" name="Notes Placeholder 2"/>
-          <p:cNvSpPr>
-            <a:spLocks noGrp="1"/>
-          </p:cNvSpPr>
-          <p:nvPr>
-            <p:ph type="body" idx="1"/>
-          </p:nvPr>
-        </p:nvSpPr>
-        <p:spPr/>
-        <p:txBody>
-          <a:bodyPr/>
-          <a:lstStyle/>
-          <a:p>
-            <a:r>
-              <a:rPr lang="en-US" dirty="0"/>
-              <a:t>Update the field assets, or historical records</a:t>
-            </a:r>
-          </a:p>
-        </p:txBody>
-      </p:sp>
-      <p:sp>
-        <p:nvSpPr>
-          <p:cNvPr id="4" name="Slide Number Placeholder 3"/>
-          <p:cNvSpPr>
-            <a:spLocks noGrp="1"/>
-          </p:cNvSpPr>
-          <p:nvPr>
-            <p:ph type="sldNum" sz="quarter" idx="5"/>
-          </p:nvPr>
-        </p:nvSpPr>
-        <p:spPr/>
-        <p:txBody>
-          <a:bodyPr/>
-          <a:lstStyle/>
-          <a:p>
-            <a:fld id="{56507943-197E-CE46-82F0-5A323A24AE7A}" type="slidenum">
-              <a:rPr lang="en-US" smtClean="0"/>
-              <a:pPr/>
-              <a:t>13</a:t>
-            </a:fld>
-            <a:endParaRPr lang="en-US"/>
-          </a:p>
-        </p:txBody>
-      </p:sp>
-    </p:spTree>
-    <p:extLst>
-      <p:ext uri="{BB962C8B-B14F-4D97-AF65-F5344CB8AC3E}">
-        <p14:creationId xmlns:p14="http://schemas.microsoft.com/office/powerpoint/2010/main" val="1718319736"/>
-      </p:ext>
-    </p:extLst>
-  </p:cSld>
-  <p:clrMapOvr>
-    <a:masterClrMapping/>
-  </p:clrMapOvr>
-</p:notes>
-</file>
-
-<file path=ppt/notesSlides/notesSlide12.xml><?xml version="1.0" encoding="utf-8"?>
-<p:notes xmlns:a="http://schemas.openxmlformats.org/drawingml/2006/main" xmlns:r="http://schemas.openxmlformats.org/officeDocument/2006/relationships" xmlns:p="http://schemas.openxmlformats.org/presentationml/2006/main">
-  <p:cSld>
-    <p:spTree>
-      <p:nvGrpSpPr>
-        <p:cNvPr id="1" name=""/>
-        <p:cNvGrpSpPr/>
-        <p:nvPr/>
-      </p:nvGrpSpPr>
-      <p:grpSpPr>
-        <a:xfrm>
-          <a:off x="0" y="0"/>
-          <a:ext cx="0" cy="0"/>
-          <a:chOff x="0" y="0"/>
-          <a:chExt cx="0" cy="0"/>
-        </a:xfrm>
-      </p:grpSpPr>
-      <p:sp>
-        <p:nvSpPr>
-          <p:cNvPr id="2" name="Slide Image Placeholder 1"/>
-          <p:cNvSpPr>
-            <a:spLocks noGrp="1" noRot="1" noChangeAspect="1"/>
-          </p:cNvSpPr>
-          <p:nvPr>
-            <p:ph type="sldImg"/>
-          </p:nvPr>
-        </p:nvSpPr>
-        <p:spPr/>
-      </p:sp>
-      <p:sp>
-        <p:nvSpPr>
-          <p:cNvPr id="3" name="Notes Placeholder 2"/>
-          <p:cNvSpPr>
-            <a:spLocks noGrp="1"/>
-          </p:cNvSpPr>
-          <p:nvPr>
-            <p:ph type="body" idx="1"/>
-          </p:nvPr>
-        </p:nvSpPr>
-        <p:spPr/>
-        <p:txBody>
-          <a:bodyPr/>
-          <a:lstStyle/>
-          <a:p>
-            <a:pPr marL="0" marR="0" lvl="0" indent="0" algn="l" defTabSz="457200" rtl="0" eaLnBrk="1" fontAlgn="auto" latinLnBrk="0" hangingPunct="1">
-              <a:lnSpc>
-                <a:spcPct val="100000"/>
-              </a:lnSpc>
-              <a:spcBef>
-                <a:spcPts val="0"/>
-              </a:spcBef>
-              <a:spcAft>
-                <a:spcPts val="0"/>
-              </a:spcAft>
-              <a:buClrTx/>
-              <a:buSzTx/>
-              <a:buFontTx/>
-              <a:buNone/>
-              <a:tabLst/>
-              <a:defRPr/>
-            </a:pPr>
-            <a:r>
-              <a:rPr lang="en-US" altLang="en-US" dirty="0"/>
-              <a:t>Groups, Multiple pages, Notes, Media</a:t>
-            </a:r>
-          </a:p>
-          <a:p>
-            <a:endParaRPr lang="en-US" dirty="0"/>
-          </a:p>
-        </p:txBody>
-      </p:sp>
-      <p:sp>
-        <p:nvSpPr>
-          <p:cNvPr id="4" name="Slide Number Placeholder 3"/>
-          <p:cNvSpPr>
-            <a:spLocks noGrp="1"/>
-          </p:cNvSpPr>
-          <p:nvPr>
-            <p:ph type="sldNum" sz="quarter" idx="5"/>
-          </p:nvPr>
-        </p:nvSpPr>
-        <p:spPr/>
-        <p:txBody>
-          <a:bodyPr/>
-          <a:lstStyle/>
-          <a:p>
-            <a:fld id="{56507943-197E-CE46-82F0-5A323A24AE7A}" type="slidenum">
-              <a:rPr lang="en-US" smtClean="0"/>
-              <a:pPr/>
-              <a:t>14</a:t>
-            </a:fld>
-            <a:endParaRPr lang="en-US"/>
-          </a:p>
-        </p:txBody>
-      </p:sp>
-    </p:spTree>
-    <p:extLst>
-      <p:ext uri="{BB962C8B-B14F-4D97-AF65-F5344CB8AC3E}">
-        <p14:creationId xmlns:p14="http://schemas.microsoft.com/office/powerpoint/2010/main" val="4154403198"/>
-      </p:ext>
-    </p:extLst>
-  </p:cSld>
-  <p:clrMapOvr>
-    <a:masterClrMapping/>
-  </p:clrMapOvr>
-</p:notes>
-</file>
-
-<file path=ppt/notesSlides/notesSlide13.xml><?xml version="1.0" encoding="utf-8"?>
-<p:notes xmlns:a="http://schemas.openxmlformats.org/drawingml/2006/main" xmlns:r="http://schemas.openxmlformats.org/officeDocument/2006/relationships" xmlns:p="http://schemas.openxmlformats.org/presentationml/2006/main">
-  <p:cSld>
-    <p:spTree>
-      <p:nvGrpSpPr>
-        <p:cNvPr id="1" name=""/>
-        <p:cNvGrpSpPr/>
-        <p:nvPr/>
-      </p:nvGrpSpPr>
-      <p:grpSpPr>
-        <a:xfrm>
-          <a:off x="0" y="0"/>
-          <a:ext cx="0" cy="0"/>
-          <a:chOff x="0" y="0"/>
-          <a:chExt cx="0" cy="0"/>
-        </a:xfrm>
-      </p:grpSpPr>
-      <p:sp>
-        <p:nvSpPr>
-          <p:cNvPr id="2" name="Slide Image Placeholder 1"/>
-          <p:cNvSpPr>
-            <a:spLocks noGrp="1" noRot="1" noChangeAspect="1"/>
-          </p:cNvSpPr>
-          <p:nvPr>
-            <p:ph type="sldImg"/>
-          </p:nvPr>
-        </p:nvSpPr>
-        <p:spPr/>
-      </p:sp>
-      <p:sp>
-        <p:nvSpPr>
-          <p:cNvPr id="3" name="Notes Placeholder 2"/>
-          <p:cNvSpPr>
-            <a:spLocks noGrp="1"/>
-          </p:cNvSpPr>
-          <p:nvPr>
-            <p:ph type="body" idx="1"/>
-          </p:nvPr>
-        </p:nvSpPr>
-        <p:spPr/>
-        <p:txBody>
-          <a:bodyPr/>
-          <a:lstStyle/>
-          <a:p>
-            <a:endParaRPr lang="en-US" dirty="0"/>
-          </a:p>
-        </p:txBody>
-      </p:sp>
-      <p:sp>
-        <p:nvSpPr>
-          <p:cNvPr id="4" name="Slide Number Placeholder 3"/>
-          <p:cNvSpPr>
-            <a:spLocks noGrp="1"/>
-          </p:cNvSpPr>
-          <p:nvPr>
-            <p:ph type="sldNum" sz="quarter" idx="5"/>
-          </p:nvPr>
-        </p:nvSpPr>
-        <p:spPr/>
-        <p:txBody>
-          <a:bodyPr/>
-          <a:lstStyle/>
-          <a:p>
-            <a:fld id="{56507943-197E-CE46-82F0-5A323A24AE7A}" type="slidenum">
-              <a:rPr lang="en-US" smtClean="0"/>
-              <a:pPr/>
-              <a:t>15</a:t>
-            </a:fld>
-            <a:endParaRPr lang="en-US"/>
-          </a:p>
-        </p:txBody>
-      </p:sp>
-    </p:spTree>
-    <p:extLst>
-      <p:ext uri="{BB962C8B-B14F-4D97-AF65-F5344CB8AC3E}">
-        <p14:creationId xmlns:p14="http://schemas.microsoft.com/office/powerpoint/2010/main" val="2956007665"/>
-      </p:ext>
-    </p:extLst>
-  </p:cSld>
-  <p:clrMapOvr>
-    <a:masterClrMapping/>
-  </p:clrMapOvr>
-</p:notes>
-</file>
-
-<file path=ppt/notesSlides/notesSlide2.xml><?xml version="1.0" encoding="utf-8"?>
-<p:notes xmlns:a="http://schemas.openxmlformats.org/drawingml/2006/main" xmlns:r="http://schemas.openxmlformats.org/officeDocument/2006/relationships" xmlns:p="http://schemas.openxmlformats.org/presentationml/2006/main">
-  <p:cSld>
-    <p:spTree>
-      <p:nvGrpSpPr>
-        <p:cNvPr id="1" name=""/>
-        <p:cNvGrpSpPr/>
-        <p:nvPr/>
-      </p:nvGrpSpPr>
-      <p:grpSpPr>
-        <a:xfrm>
-          <a:off x="0" y="0"/>
-          <a:ext cx="0" cy="0"/>
-          <a:chOff x="0" y="0"/>
-          <a:chExt cx="0" cy="0"/>
-        </a:xfrm>
-      </p:grpSpPr>
-      <p:sp>
-        <p:nvSpPr>
-          <p:cNvPr id="2" name="Slide Image Placeholder 1"/>
-          <p:cNvSpPr>
-            <a:spLocks noGrp="1" noRot="1" noChangeAspect="1"/>
-          </p:cNvSpPr>
-          <p:nvPr>
-            <p:ph type="sldImg"/>
-          </p:nvPr>
-        </p:nvSpPr>
-        <p:spPr/>
-      </p:sp>
-      <p:sp>
-        <p:nvSpPr>
-          <p:cNvPr id="3" name="Notes Placeholder 2"/>
-          <p:cNvSpPr>
-            <a:spLocks noGrp="1"/>
-          </p:cNvSpPr>
-          <p:nvPr>
-            <p:ph type="body" idx="1"/>
-          </p:nvPr>
-        </p:nvSpPr>
-        <p:spPr/>
-        <p:txBody>
-          <a:bodyPr/>
-          <a:lstStyle/>
-          <a:p>
-            <a:endParaRPr lang="en-US" dirty="0"/>
-          </a:p>
-        </p:txBody>
-      </p:sp>
-      <p:sp>
-        <p:nvSpPr>
-          <p:cNvPr id="4" name="Slide Number Placeholder 3"/>
-          <p:cNvSpPr>
-            <a:spLocks noGrp="1"/>
-          </p:cNvSpPr>
-          <p:nvPr>
-            <p:ph type="sldNum" sz="quarter" idx="5"/>
-          </p:nvPr>
-        </p:nvSpPr>
-        <p:spPr/>
-        <p:txBody>
-          <a:bodyPr/>
-          <a:lstStyle/>
-          <a:p>
-            <a:fld id="{56507943-197E-CE46-82F0-5A323A24AE7A}" type="slidenum">
-              <a:rPr lang="en-US" smtClean="0"/>
-              <a:pPr/>
-              <a:t>4</a:t>
-            </a:fld>
-            <a:endParaRPr lang="en-US"/>
-          </a:p>
-        </p:txBody>
-      </p:sp>
-    </p:spTree>
-    <p:extLst>
-      <p:ext uri="{BB962C8B-B14F-4D97-AF65-F5344CB8AC3E}">
-        <p14:creationId xmlns:p14="http://schemas.microsoft.com/office/powerpoint/2010/main" val="3947875362"/>
+        <p14:creationId xmlns:p14="http://schemas.microsoft.com/office/powerpoint/2010/main" val="3008718019"/>
       </p:ext>
     </p:extLst>
   </p:cSld>
@@ -1094,450 +748,7 @@
           <a:bodyPr/>
           <a:lstStyle/>
           <a:p>
-            <a:r>
-              <a:rPr lang="en-US" dirty="0"/>
-              <a:t>Sign inventory: collect accurate sign </a:t>
-            </a:r>
-          </a:p>
-        </p:txBody>
-      </p:sp>
-      <p:sp>
-        <p:nvSpPr>
-          <p:cNvPr id="4" name="Slide Number Placeholder 3"/>
-          <p:cNvSpPr>
-            <a:spLocks noGrp="1"/>
-          </p:cNvSpPr>
-          <p:nvPr>
-            <p:ph type="sldNum" sz="quarter" idx="5"/>
-          </p:nvPr>
-        </p:nvSpPr>
-        <p:spPr/>
-        <p:txBody>
-          <a:bodyPr/>
-          <a:lstStyle/>
-          <a:p>
-            <a:fld id="{56507943-197E-CE46-82F0-5A323A24AE7A}" type="slidenum">
-              <a:rPr lang="en-US" smtClean="0"/>
-              <a:pPr/>
-              <a:t>5</a:t>
-            </a:fld>
-            <a:endParaRPr lang="en-US"/>
-          </a:p>
-        </p:txBody>
-      </p:sp>
-    </p:spTree>
-    <p:extLst>
-      <p:ext uri="{BB962C8B-B14F-4D97-AF65-F5344CB8AC3E}">
-        <p14:creationId xmlns:p14="http://schemas.microsoft.com/office/powerpoint/2010/main" val="3336434666"/>
-      </p:ext>
-    </p:extLst>
-  </p:cSld>
-  <p:clrMapOvr>
-    <a:masterClrMapping/>
-  </p:clrMapOvr>
-</p:notes>
-</file>
-
-<file path=ppt/notesSlides/notesSlide4.xml><?xml version="1.0" encoding="utf-8"?>
-<p:notes xmlns:a="http://schemas.openxmlformats.org/drawingml/2006/main" xmlns:r="http://schemas.openxmlformats.org/officeDocument/2006/relationships" xmlns:p="http://schemas.openxmlformats.org/presentationml/2006/main">
-  <p:cSld>
-    <p:spTree>
-      <p:nvGrpSpPr>
-        <p:cNvPr id="1" name=""/>
-        <p:cNvGrpSpPr/>
-        <p:nvPr/>
-      </p:nvGrpSpPr>
-      <p:grpSpPr>
-        <a:xfrm>
-          <a:off x="0" y="0"/>
-          <a:ext cx="0" cy="0"/>
-          <a:chOff x="0" y="0"/>
-          <a:chExt cx="0" cy="0"/>
-        </a:xfrm>
-      </p:grpSpPr>
-      <p:sp>
-        <p:nvSpPr>
-          <p:cNvPr id="2" name="Slide Image Placeholder 1"/>
-          <p:cNvSpPr>
-            <a:spLocks noGrp="1" noRot="1" noChangeAspect="1"/>
-          </p:cNvSpPr>
-          <p:nvPr>
-            <p:ph type="sldImg"/>
-          </p:nvPr>
-        </p:nvSpPr>
-        <p:spPr/>
-      </p:sp>
-      <p:sp>
-        <p:nvSpPr>
-          <p:cNvPr id="3" name="Notes Placeholder 2"/>
-          <p:cNvSpPr>
-            <a:spLocks noGrp="1"/>
-          </p:cNvSpPr>
-          <p:nvPr>
-            <p:ph type="body" idx="1"/>
-          </p:nvPr>
-        </p:nvSpPr>
-        <p:spPr/>
-        <p:txBody>
-          <a:bodyPr/>
-          <a:lstStyle/>
-          <a:p>
-            <a:r>
-              <a:rPr lang="en-US" dirty="0"/>
-              <a:t>Update the field assets, or historical records</a:t>
-            </a:r>
-          </a:p>
-        </p:txBody>
-      </p:sp>
-      <p:sp>
-        <p:nvSpPr>
-          <p:cNvPr id="4" name="Slide Number Placeholder 3"/>
-          <p:cNvSpPr>
-            <a:spLocks noGrp="1"/>
-          </p:cNvSpPr>
-          <p:nvPr>
-            <p:ph type="sldNum" sz="quarter" idx="5"/>
-          </p:nvPr>
-        </p:nvSpPr>
-        <p:spPr/>
-        <p:txBody>
-          <a:bodyPr/>
-          <a:lstStyle/>
-          <a:p>
-            <a:fld id="{56507943-197E-CE46-82F0-5A323A24AE7A}" type="slidenum">
-              <a:rPr lang="en-US" smtClean="0"/>
-              <a:pPr/>
-              <a:t>6</a:t>
-            </a:fld>
-            <a:endParaRPr lang="en-US"/>
-          </a:p>
-        </p:txBody>
-      </p:sp>
-    </p:spTree>
-    <p:extLst>
-      <p:ext uri="{BB962C8B-B14F-4D97-AF65-F5344CB8AC3E}">
-        <p14:creationId xmlns:p14="http://schemas.microsoft.com/office/powerpoint/2010/main" val="1108544803"/>
-      </p:ext>
-    </p:extLst>
-  </p:cSld>
-  <p:clrMapOvr>
-    <a:masterClrMapping/>
-  </p:clrMapOvr>
-</p:notes>
-</file>
-
-<file path=ppt/notesSlides/notesSlide5.xml><?xml version="1.0" encoding="utf-8"?>
-<p:notes xmlns:a="http://schemas.openxmlformats.org/drawingml/2006/main" xmlns:r="http://schemas.openxmlformats.org/officeDocument/2006/relationships" xmlns:p="http://schemas.openxmlformats.org/presentationml/2006/main">
-  <p:cSld>
-    <p:spTree>
-      <p:nvGrpSpPr>
-        <p:cNvPr id="1" name=""/>
-        <p:cNvGrpSpPr/>
-        <p:nvPr/>
-      </p:nvGrpSpPr>
-      <p:grpSpPr>
-        <a:xfrm>
-          <a:off x="0" y="0"/>
-          <a:ext cx="0" cy="0"/>
-          <a:chOff x="0" y="0"/>
-          <a:chExt cx="0" cy="0"/>
-        </a:xfrm>
-      </p:grpSpPr>
-      <p:sp>
-        <p:nvSpPr>
-          <p:cNvPr id="2" name="Slide Image Placeholder 1"/>
-          <p:cNvSpPr>
-            <a:spLocks noGrp="1" noRot="1" noChangeAspect="1"/>
-          </p:cNvSpPr>
-          <p:nvPr>
-            <p:ph type="sldImg"/>
-          </p:nvPr>
-        </p:nvSpPr>
-        <p:spPr/>
-      </p:sp>
-      <p:sp>
-        <p:nvSpPr>
-          <p:cNvPr id="3" name="Notes Placeholder 2"/>
-          <p:cNvSpPr>
-            <a:spLocks noGrp="1"/>
-          </p:cNvSpPr>
-          <p:nvPr>
-            <p:ph type="body" idx="1"/>
-          </p:nvPr>
-        </p:nvSpPr>
-        <p:spPr/>
-        <p:txBody>
-          <a:bodyPr/>
-          <a:lstStyle/>
-          <a:p>
-            <a:r>
-              <a:rPr lang="en-US" dirty="0"/>
-              <a:t>Update the field assets, or historical records</a:t>
-            </a:r>
-          </a:p>
-        </p:txBody>
-      </p:sp>
-      <p:sp>
-        <p:nvSpPr>
-          <p:cNvPr id="4" name="Slide Number Placeholder 3"/>
-          <p:cNvSpPr>
-            <a:spLocks noGrp="1"/>
-          </p:cNvSpPr>
-          <p:nvPr>
-            <p:ph type="sldNum" sz="quarter" idx="5"/>
-          </p:nvPr>
-        </p:nvSpPr>
-        <p:spPr/>
-        <p:txBody>
-          <a:bodyPr/>
-          <a:lstStyle/>
-          <a:p>
-            <a:fld id="{56507943-197E-CE46-82F0-5A323A24AE7A}" type="slidenum">
-              <a:rPr lang="en-US" smtClean="0"/>
-              <a:pPr/>
-              <a:t>7</a:t>
-            </a:fld>
-            <a:endParaRPr lang="en-US"/>
-          </a:p>
-        </p:txBody>
-      </p:sp>
-    </p:spTree>
-    <p:extLst>
-      <p:ext uri="{BB962C8B-B14F-4D97-AF65-F5344CB8AC3E}">
-        <p14:creationId xmlns:p14="http://schemas.microsoft.com/office/powerpoint/2010/main" val="210410516"/>
-      </p:ext>
-    </p:extLst>
-  </p:cSld>
-  <p:clrMapOvr>
-    <a:masterClrMapping/>
-  </p:clrMapOvr>
-</p:notes>
-</file>
-
-<file path=ppt/notesSlides/notesSlide6.xml><?xml version="1.0" encoding="utf-8"?>
-<p:notes xmlns:a="http://schemas.openxmlformats.org/drawingml/2006/main" xmlns:r="http://schemas.openxmlformats.org/officeDocument/2006/relationships" xmlns:p="http://schemas.openxmlformats.org/presentationml/2006/main">
-  <p:cSld>
-    <p:spTree>
-      <p:nvGrpSpPr>
-        <p:cNvPr id="1" name=""/>
-        <p:cNvGrpSpPr/>
-        <p:nvPr/>
-      </p:nvGrpSpPr>
-      <p:grpSpPr>
-        <a:xfrm>
-          <a:off x="0" y="0"/>
-          <a:ext cx="0" cy="0"/>
-          <a:chOff x="0" y="0"/>
-          <a:chExt cx="0" cy="0"/>
-        </a:xfrm>
-      </p:grpSpPr>
-      <p:sp>
-        <p:nvSpPr>
-          <p:cNvPr id="2" name="Slide Image Placeholder 1"/>
-          <p:cNvSpPr>
-            <a:spLocks noGrp="1" noRot="1" noChangeAspect="1"/>
-          </p:cNvSpPr>
-          <p:nvPr>
-            <p:ph type="sldImg"/>
-          </p:nvPr>
-        </p:nvSpPr>
-        <p:spPr/>
-      </p:sp>
-      <p:sp>
-        <p:nvSpPr>
-          <p:cNvPr id="3" name="Notes Placeholder 2"/>
-          <p:cNvSpPr>
-            <a:spLocks noGrp="1"/>
-          </p:cNvSpPr>
-          <p:nvPr>
-            <p:ph type="body" idx="1"/>
-          </p:nvPr>
-        </p:nvSpPr>
-        <p:spPr/>
-        <p:txBody>
-          <a:bodyPr/>
-          <a:lstStyle/>
-          <a:p>
-            <a:r>
-              <a:rPr lang="en-US" dirty="0"/>
-              <a:t>Update the field assets, or historical records</a:t>
-            </a:r>
-          </a:p>
-        </p:txBody>
-      </p:sp>
-      <p:sp>
-        <p:nvSpPr>
-          <p:cNvPr id="4" name="Slide Number Placeholder 3"/>
-          <p:cNvSpPr>
-            <a:spLocks noGrp="1"/>
-          </p:cNvSpPr>
-          <p:nvPr>
-            <p:ph type="sldNum" sz="quarter" idx="5"/>
-          </p:nvPr>
-        </p:nvSpPr>
-        <p:spPr/>
-        <p:txBody>
-          <a:bodyPr/>
-          <a:lstStyle/>
-          <a:p>
-            <a:fld id="{56507943-197E-CE46-82F0-5A323A24AE7A}" type="slidenum">
-              <a:rPr lang="en-US" smtClean="0"/>
-              <a:pPr/>
-              <a:t>8</a:t>
-            </a:fld>
-            <a:endParaRPr lang="en-US"/>
-          </a:p>
-        </p:txBody>
-      </p:sp>
-    </p:spTree>
-    <p:extLst>
-      <p:ext uri="{BB962C8B-B14F-4D97-AF65-F5344CB8AC3E}">
-        <p14:creationId xmlns:p14="http://schemas.microsoft.com/office/powerpoint/2010/main" val="1033181799"/>
-      </p:ext>
-    </p:extLst>
-  </p:cSld>
-  <p:clrMapOvr>
-    <a:masterClrMapping/>
-  </p:clrMapOvr>
-</p:notes>
-</file>
-
-<file path=ppt/notesSlides/notesSlide7.xml><?xml version="1.0" encoding="utf-8"?>
-<p:notes xmlns:a="http://schemas.openxmlformats.org/drawingml/2006/main" xmlns:r="http://schemas.openxmlformats.org/officeDocument/2006/relationships" xmlns:p="http://schemas.openxmlformats.org/presentationml/2006/main">
-  <p:cSld>
-    <p:spTree>
-      <p:nvGrpSpPr>
-        <p:cNvPr id="1" name=""/>
-        <p:cNvGrpSpPr/>
-        <p:nvPr/>
-      </p:nvGrpSpPr>
-      <p:grpSpPr>
-        <a:xfrm>
-          <a:off x="0" y="0"/>
-          <a:ext cx="0" cy="0"/>
-          <a:chOff x="0" y="0"/>
-          <a:chExt cx="0" cy="0"/>
-        </a:xfrm>
-      </p:grpSpPr>
-      <p:sp>
-        <p:nvSpPr>
-          <p:cNvPr id="2" name="Slide Image Placeholder 1"/>
-          <p:cNvSpPr>
-            <a:spLocks noGrp="1" noRot="1" noChangeAspect="1"/>
-          </p:cNvSpPr>
-          <p:nvPr>
-            <p:ph type="sldImg"/>
-          </p:nvPr>
-        </p:nvSpPr>
-        <p:spPr/>
-      </p:sp>
-      <p:sp>
-        <p:nvSpPr>
-          <p:cNvPr id="3" name="Notes Placeholder 2"/>
-          <p:cNvSpPr>
-            <a:spLocks noGrp="1"/>
-          </p:cNvSpPr>
-          <p:nvPr>
-            <p:ph type="body" idx="1"/>
-          </p:nvPr>
-        </p:nvSpPr>
-        <p:spPr/>
-        <p:txBody>
-          <a:bodyPr/>
-          <a:lstStyle/>
-          <a:p>
-            <a:r>
-              <a:rPr lang="en-US" dirty="0"/>
-              <a:t>Update the field assets, or historical records</a:t>
-            </a:r>
-          </a:p>
-        </p:txBody>
-      </p:sp>
-      <p:sp>
-        <p:nvSpPr>
-          <p:cNvPr id="4" name="Slide Number Placeholder 3"/>
-          <p:cNvSpPr>
-            <a:spLocks noGrp="1"/>
-          </p:cNvSpPr>
-          <p:nvPr>
-            <p:ph type="sldNum" sz="quarter" idx="5"/>
-          </p:nvPr>
-        </p:nvSpPr>
-        <p:spPr/>
-        <p:txBody>
-          <a:bodyPr/>
-          <a:lstStyle/>
-          <a:p>
-            <a:fld id="{56507943-197E-CE46-82F0-5A323A24AE7A}" type="slidenum">
-              <a:rPr lang="en-US" smtClean="0"/>
-              <a:pPr/>
-              <a:t>9</a:t>
-            </a:fld>
-            <a:endParaRPr lang="en-US"/>
-          </a:p>
-        </p:txBody>
-      </p:sp>
-    </p:spTree>
-    <p:extLst>
-      <p:ext uri="{BB962C8B-B14F-4D97-AF65-F5344CB8AC3E}">
-        <p14:creationId xmlns:p14="http://schemas.microsoft.com/office/powerpoint/2010/main" val="2495277314"/>
-      </p:ext>
-    </p:extLst>
-  </p:cSld>
-  <p:clrMapOvr>
-    <a:masterClrMapping/>
-  </p:clrMapOvr>
-</p:notes>
-</file>
-
-<file path=ppt/notesSlides/notesSlide8.xml><?xml version="1.0" encoding="utf-8"?>
-<p:notes xmlns:a="http://schemas.openxmlformats.org/drawingml/2006/main" xmlns:r="http://schemas.openxmlformats.org/officeDocument/2006/relationships" xmlns:p="http://schemas.openxmlformats.org/presentationml/2006/main">
-  <p:cSld>
-    <p:spTree>
-      <p:nvGrpSpPr>
-        <p:cNvPr id="1" name=""/>
-        <p:cNvGrpSpPr/>
-        <p:nvPr/>
-      </p:nvGrpSpPr>
-      <p:grpSpPr>
-        <a:xfrm>
-          <a:off x="0" y="0"/>
-          <a:ext cx="0" cy="0"/>
-          <a:chOff x="0" y="0"/>
-          <a:chExt cx="0" cy="0"/>
-        </a:xfrm>
-      </p:grpSpPr>
-      <p:sp>
-        <p:nvSpPr>
-          <p:cNvPr id="2" name="Slide Image Placeholder 1"/>
-          <p:cNvSpPr>
-            <a:spLocks noGrp="1" noRot="1" noChangeAspect="1"/>
-          </p:cNvSpPr>
-          <p:nvPr>
-            <p:ph type="sldImg"/>
-          </p:nvPr>
-        </p:nvSpPr>
-        <p:spPr/>
-      </p:sp>
-      <p:sp>
-        <p:nvSpPr>
-          <p:cNvPr id="3" name="Notes Placeholder 2"/>
-          <p:cNvSpPr>
-            <a:spLocks noGrp="1"/>
-          </p:cNvSpPr>
-          <p:nvPr>
-            <p:ph type="body" idx="1"/>
-          </p:nvPr>
-        </p:nvSpPr>
-        <p:spPr/>
-        <p:txBody>
-          <a:bodyPr/>
-          <a:lstStyle/>
-          <a:p>
-            <a:r>
-              <a:rPr lang="en-US" dirty="0"/>
-              <a:t>Update the field assets, or historical records</a:t>
-            </a:r>
+            <a:endParaRPr lang="en-US" dirty="0"/>
           </a:p>
         </p:txBody>
       </p:sp>
@@ -1568,95 +779,7 @@
     </p:spTree>
     <p:extLst>
       <p:ext uri="{BB962C8B-B14F-4D97-AF65-F5344CB8AC3E}">
-        <p14:creationId xmlns:p14="http://schemas.microsoft.com/office/powerpoint/2010/main" val="396643956"/>
-      </p:ext>
-    </p:extLst>
-  </p:cSld>
-  <p:clrMapOvr>
-    <a:masterClrMapping/>
-  </p:clrMapOvr>
-</p:notes>
-</file>
-
-<file path=ppt/notesSlides/notesSlide9.xml><?xml version="1.0" encoding="utf-8"?>
-<p:notes xmlns:a="http://schemas.openxmlformats.org/drawingml/2006/main" xmlns:r="http://schemas.openxmlformats.org/officeDocument/2006/relationships" xmlns:p="http://schemas.openxmlformats.org/presentationml/2006/main">
-  <p:cSld>
-    <p:spTree>
-      <p:nvGrpSpPr>
-        <p:cNvPr id="1" name=""/>
-        <p:cNvGrpSpPr/>
-        <p:nvPr/>
-      </p:nvGrpSpPr>
-      <p:grpSpPr>
-        <a:xfrm>
-          <a:off x="0" y="0"/>
-          <a:ext cx="0" cy="0"/>
-          <a:chOff x="0" y="0"/>
-          <a:chExt cx="0" cy="0"/>
-        </a:xfrm>
-      </p:grpSpPr>
-      <p:sp>
-        <p:nvSpPr>
-          <p:cNvPr id="2" name="Slide Image Placeholder 1"/>
-          <p:cNvSpPr>
-            <a:spLocks noGrp="1" noRot="1" noChangeAspect="1"/>
-          </p:cNvSpPr>
-          <p:nvPr>
-            <p:ph type="sldImg"/>
-          </p:nvPr>
-        </p:nvSpPr>
-        <p:spPr/>
-      </p:sp>
-      <p:sp>
-        <p:nvSpPr>
-          <p:cNvPr id="3" name="Notes Placeholder 2"/>
-          <p:cNvSpPr>
-            <a:spLocks noGrp="1"/>
-          </p:cNvSpPr>
-          <p:nvPr>
-            <p:ph type="body" idx="1"/>
-          </p:nvPr>
-        </p:nvSpPr>
-        <p:spPr/>
-        <p:txBody>
-          <a:bodyPr/>
-          <a:lstStyle/>
-          <a:p>
-            <a:r>
-              <a:rPr lang="en-US" dirty="0"/>
-              <a:t>Update the field assets, or historical records</a:t>
-            </a:r>
-          </a:p>
-        </p:txBody>
-      </p:sp>
-      <p:sp>
-        <p:nvSpPr>
-          <p:cNvPr id="4" name="Slide Number Placeholder 3"/>
-          <p:cNvSpPr>
-            <a:spLocks noGrp="1"/>
-          </p:cNvSpPr>
-          <p:nvPr>
-            <p:ph type="sldNum" sz="quarter" idx="5"/>
-          </p:nvPr>
-        </p:nvSpPr>
-        <p:spPr/>
-        <p:txBody>
-          <a:bodyPr/>
-          <a:lstStyle/>
-          <a:p>
-            <a:fld id="{56507943-197E-CE46-82F0-5A323A24AE7A}" type="slidenum">
-              <a:rPr lang="en-US" smtClean="0"/>
-              <a:pPr/>
-              <a:t>11</a:t>
-            </a:fld>
-            <a:endParaRPr lang="en-US"/>
-          </a:p>
-        </p:txBody>
-      </p:sp>
-    </p:spTree>
-    <p:extLst>
-      <p:ext uri="{BB962C8B-B14F-4D97-AF65-F5344CB8AC3E}">
-        <p14:creationId xmlns:p14="http://schemas.microsoft.com/office/powerpoint/2010/main" val="1725974056"/>
+        <p14:creationId xmlns:p14="http://schemas.microsoft.com/office/powerpoint/2010/main" val="2956007665"/>
       </p:ext>
     </p:extLst>
   </p:cSld>
@@ -1904,7 +1027,7 @@
           <a:p>
             <a:fld id="{562C3EF4-AD61-48A1-B51C-86BBC26A07EE}" type="datetime1">
               <a:rPr lang="en-US" smtClean="0"/>
-              <a:t>9/8/2025</a:t>
+              <a:t>9/10/2025</a:t>
             </a:fld>
             <a:endParaRPr lang="en-US"/>
           </a:p>
@@ -2108,7 +1231,7 @@
           <a:p>
             <a:fld id="{0C8992A1-5616-4927-9B49-E60372E9FC72}" type="datetime1">
               <a:rPr lang="en-US" smtClean="0"/>
-              <a:t>9/8/2025</a:t>
+              <a:t>9/10/2025</a:t>
             </a:fld>
             <a:endParaRPr lang="en-US"/>
           </a:p>
@@ -2471,7 +1594,7 @@
           <a:p>
             <a:fld id="{A74DECA2-35DB-4F3A-8A04-28A5742D3AB4}" type="datetime1">
               <a:rPr lang="en-US" smtClean="0"/>
-              <a:t>9/8/2025</a:t>
+              <a:t>9/10/2025</a:t>
             </a:fld>
             <a:endParaRPr lang="en-US"/>
           </a:p>
@@ -2783,7 +1906,7 @@
           <a:p>
             <a:fld id="{562C3EF4-AD61-48A1-B51C-86BBC26A07EE}" type="datetime1">
               <a:rPr lang="en-US" smtClean="0"/>
-              <a:t>9/8/2025</a:t>
+              <a:t>9/10/2025</a:t>
             </a:fld>
             <a:endParaRPr lang="en-US"/>
           </a:p>
@@ -2982,7 +2105,7 @@
           <a:p>
             <a:fld id="{BB3E9FF5-A3A3-421D-9FE4-C97ACA9B4B66}" type="datetime1">
               <a:rPr lang="en-US" smtClean="0"/>
-              <a:t>9/8/2025</a:t>
+              <a:t>9/10/2025</a:t>
             </a:fld>
             <a:endParaRPr lang="en-US"/>
           </a:p>
@@ -3295,7 +2418,7 @@
           <a:p>
             <a:fld id="{36E74F4B-9A6E-4B50-BE3E-090D5038F3B5}" type="datetime1">
               <a:rPr lang="en-US" smtClean="0"/>
-              <a:t>9/8/2025</a:t>
+              <a:t>9/10/2025</a:t>
             </a:fld>
             <a:endParaRPr lang="en-US"/>
           </a:p>
@@ -3549,7 +2672,7 @@
           <a:p>
             <a:fld id="{B009AE4F-ECA9-4391-85A0-0BDC121BC912}" type="datetime1">
               <a:rPr lang="en-US" smtClean="0"/>
-              <a:t>9/8/2025</a:t>
+              <a:t>9/10/2025</a:t>
             </a:fld>
             <a:endParaRPr lang="en-US"/>
           </a:p>
@@ -3972,7 +3095,7 @@
           <a:p>
             <a:fld id="{4D8F0038-C403-4E4E-A358-F4B6321C12F5}" type="datetime1">
               <a:rPr lang="en-US" smtClean="0"/>
-              <a:t>9/8/2025</a:t>
+              <a:t>9/10/2025</a:t>
             </a:fld>
             <a:endParaRPr lang="en-US"/>
           </a:p>
@@ -4096,7 +3219,7 @@
           <a:p>
             <a:fld id="{28152514-E107-4B51-A0E4-6CCBE2731D63}" type="datetime1">
               <a:rPr lang="en-US" smtClean="0"/>
-              <a:t>9/8/2025</a:t>
+              <a:t>9/10/2025</a:t>
             </a:fld>
             <a:endParaRPr lang="en-US"/>
           </a:p>
@@ -4192,7 +3315,7 @@
           <a:p>
             <a:fld id="{D075C0F4-646D-457B-9990-7D4E2FD4A597}" type="datetime1">
               <a:rPr lang="en-US" smtClean="0"/>
-              <a:t>9/8/2025</a:t>
+              <a:t>9/10/2025</a:t>
             </a:fld>
             <a:endParaRPr lang="en-US"/>
           </a:p>
@@ -4570,7 +3693,7 @@
           <a:p>
             <a:fld id="{8E4477A8-A506-4192-A810-B96D85416BE8}" type="datetime1">
               <a:rPr lang="en-US" smtClean="0"/>
-              <a:t>9/8/2025</a:t>
+              <a:t>9/10/2025</a:t>
             </a:fld>
             <a:endParaRPr lang="en-US"/>
           </a:p>
@@ -4779,7 +3902,7 @@
           <a:p>
             <a:fld id="{BB3E9FF5-A3A3-421D-9FE4-C97ACA9B4B66}" type="datetime1">
               <a:rPr lang="en-US" smtClean="0"/>
-              <a:t>9/8/2025</a:t>
+              <a:t>9/10/2025</a:t>
             </a:fld>
             <a:endParaRPr lang="en-US"/>
           </a:p>
@@ -5062,7 +4185,7 @@
           <a:p>
             <a:fld id="{C8901744-7364-4EA9-A9E9-43D8A126DBDD}" type="datetime1">
               <a:rPr lang="en-US" smtClean="0"/>
-              <a:t>9/8/2025</a:t>
+              <a:t>9/10/2025</a:t>
             </a:fld>
             <a:endParaRPr lang="en-US"/>
           </a:p>
@@ -5254,7 +4377,7 @@
           <a:p>
             <a:fld id="{0C8992A1-5616-4927-9B49-E60372E9FC72}" type="datetime1">
               <a:rPr lang="en-US" smtClean="0"/>
-              <a:t>9/8/2025</a:t>
+              <a:t>9/10/2025</a:t>
             </a:fld>
             <a:endParaRPr lang="en-US"/>
           </a:p>
@@ -5617,7 +4740,7 @@
           <a:p>
             <a:fld id="{A74DECA2-35DB-4F3A-8A04-28A5742D3AB4}" type="datetime1">
               <a:rPr lang="en-US" smtClean="0"/>
-              <a:t>9/8/2025</a:t>
+              <a:t>9/10/2025</a:t>
             </a:fld>
             <a:endParaRPr lang="en-US"/>
           </a:p>
@@ -5929,7 +5052,7 @@
           <a:p>
             <a:fld id="{ED291B17-9318-49DB-B28B-6E5994AE9581}" type="datetime1">
               <a:rPr lang="en-US" smtClean="0"/>
-              <a:t>9/8/2025</a:t>
+              <a:t>9/10/2025</a:t>
             </a:fld>
             <a:endParaRPr lang="en-US" dirty="0"/>
           </a:p>
@@ -6127,7 +5250,7 @@
           <a:p>
             <a:fld id="{78DD82B9-B8EE-4375-B6FF-88FA6ABB15D9}" type="datetime1">
               <a:rPr lang="en-US" smtClean="0"/>
-              <a:t>9/8/2025</a:t>
+              <a:t>9/10/2025</a:t>
             </a:fld>
             <a:endParaRPr lang="en-US" dirty="0"/>
           </a:p>
@@ -6439,7 +5562,7 @@
           <a:p>
             <a:fld id="{B2497495-0637-405E-AE64-5CC7506D51F5}" type="datetime1">
               <a:rPr lang="en-US" smtClean="0"/>
-              <a:t>9/8/2025</a:t>
+              <a:t>9/10/2025</a:t>
             </a:fld>
             <a:endParaRPr lang="en-US" dirty="0"/>
           </a:p>
@@ -6692,7 +5815,7 @@
           <a:p>
             <a:fld id="{7BFFD690-9426-415D-8B65-26881E07B2D4}" type="datetime1">
               <a:rPr lang="en-US" smtClean="0"/>
-              <a:t>9/8/2025</a:t>
+              <a:t>9/10/2025</a:t>
             </a:fld>
             <a:endParaRPr lang="en-US" dirty="0"/>
           </a:p>
@@ -7114,7 +6237,7 @@
           <a:p>
             <a:fld id="{04C4989A-474C-40DE-95B9-011C28B71673}" type="datetime1">
               <a:rPr lang="en-US" smtClean="0"/>
-              <a:t>9/8/2025</a:t>
+              <a:t>9/10/2025</a:t>
             </a:fld>
             <a:endParaRPr lang="en-US" dirty="0"/>
           </a:p>
@@ -7237,7 +6360,7 @@
           <a:p>
             <a:fld id="{5DB4ED54-5B5E-4A04-93D3-5772E3CE3818}" type="datetime1">
               <a:rPr lang="en-US" smtClean="0"/>
-              <a:t>9/8/2025</a:t>
+              <a:t>9/10/2025</a:t>
             </a:fld>
             <a:endParaRPr lang="en-US" dirty="0"/>
           </a:p>
@@ -7332,7 +6455,7 @@
           <a:p>
             <a:fld id="{4EDE50D6-574B-40AF-946F-D52A04ADE379}" type="datetime1">
               <a:rPr lang="en-US" smtClean="0"/>
-              <a:t>9/8/2025</a:t>
+              <a:t>9/10/2025</a:t>
             </a:fld>
             <a:endParaRPr lang="en-US" dirty="0"/>
           </a:p>
@@ -7632,7 +6755,7 @@
           <a:p>
             <a:fld id="{36E74F4B-9A6E-4B50-BE3E-090D5038F3B5}" type="datetime1">
               <a:rPr lang="en-US" smtClean="0"/>
-              <a:t>9/8/2025</a:t>
+              <a:t>9/10/2025</a:t>
             </a:fld>
             <a:endParaRPr lang="en-US"/>
           </a:p>
@@ -8022,7 +7145,7 @@
           <a:p>
             <a:fld id="{D82884F1-FFEA-405F-9602-3DCA865EDA4E}" type="datetime1">
               <a:rPr lang="en-US" smtClean="0"/>
-              <a:t>9/8/2025</a:t>
+              <a:t>9/10/2025</a:t>
             </a:fld>
             <a:endParaRPr lang="en-US" dirty="0"/>
           </a:p>
@@ -8315,7 +7438,7 @@
           <a:p>
             <a:fld id="{7E18DB4A-8810-4A10-AD5C-D5E2C667F5B3}" type="datetime1">
               <a:rPr lang="en-US" smtClean="0"/>
-              <a:t>9/8/2025</a:t>
+              <a:t>9/10/2025</a:t>
             </a:fld>
             <a:endParaRPr lang="en-US" dirty="0"/>
           </a:p>
@@ -8507,7 +7630,7 @@
           <a:p>
             <a:fld id="{2CED4963-E985-44C4-B8C4-FDD613B7C2F8}" type="datetime1">
               <a:rPr lang="en-US" smtClean="0"/>
-              <a:t>9/8/2025</a:t>
+              <a:t>9/10/2025</a:t>
             </a:fld>
             <a:endParaRPr lang="en-US" dirty="0"/>
           </a:p>
@@ -8869,7 +7992,7 @@
           <a:p>
             <a:fld id="{ED291B17-9318-49DB-B28B-6E5994AE9581}" type="datetime1">
               <a:rPr lang="en-US" smtClean="0"/>
-              <a:t>9/8/2025</a:t>
+              <a:t>9/10/2025</a:t>
             </a:fld>
             <a:endParaRPr lang="en-US" dirty="0"/>
           </a:p>
@@ -9349,7 +8472,7 @@
           <a:p>
             <a:fld id="{ED291B17-9318-49DB-B28B-6E5994AE9581}" type="datetime1">
               <a:rPr lang="en-US" smtClean="0"/>
-              <a:t>9/8/2025</a:t>
+              <a:t>9/10/2025</a:t>
             </a:fld>
             <a:endParaRPr lang="en-US" dirty="0"/>
           </a:p>
@@ -9545,7 +8668,7 @@
           <a:p>
             <a:fld id="{78DD82B9-B8EE-4375-B6FF-88FA6ABB15D9}" type="datetime1">
               <a:rPr lang="en-US" smtClean="0"/>
-              <a:t>9/8/2025</a:t>
+              <a:t>9/10/2025</a:t>
             </a:fld>
             <a:endParaRPr lang="en-US" dirty="0"/>
           </a:p>
@@ -9856,7 +8979,7 @@
           <a:p>
             <a:fld id="{B2497495-0637-405E-AE64-5CC7506D51F5}" type="datetime1">
               <a:rPr lang="en-US" smtClean="0"/>
-              <a:t>9/8/2025</a:t>
+              <a:t>9/10/2025</a:t>
             </a:fld>
             <a:endParaRPr lang="en-US" dirty="0"/>
           </a:p>
@@ -10107,7 +9230,7 @@
           <a:p>
             <a:fld id="{7BFFD690-9426-415D-8B65-26881E07B2D4}" type="datetime1">
               <a:rPr lang="en-US" smtClean="0"/>
-              <a:t>9/8/2025</a:t>
+              <a:t>9/10/2025</a:t>
             </a:fld>
             <a:endParaRPr lang="en-US" dirty="0"/>
           </a:p>
@@ -10527,7 +9650,7 @@
           <a:p>
             <a:fld id="{04C4989A-474C-40DE-95B9-011C28B71673}" type="datetime1">
               <a:rPr lang="en-US" smtClean="0"/>
-              <a:t>9/8/2025</a:t>
+              <a:t>9/10/2025</a:t>
             </a:fld>
             <a:endParaRPr lang="en-US" dirty="0"/>
           </a:p>
@@ -10768,7 +9891,7 @@
           <a:p>
             <a:fld id="{B009AE4F-ECA9-4391-85A0-0BDC121BC912}" type="datetime1">
               <a:rPr lang="en-US" smtClean="0"/>
-              <a:t>9/8/2025</a:t>
+              <a:t>9/10/2025</a:t>
             </a:fld>
             <a:endParaRPr lang="en-US"/>
           </a:p>
@@ -10892,7 +10015,7 @@
           <a:p>
             <a:fld id="{5DB4ED54-5B5E-4A04-93D3-5772E3CE3818}" type="datetime1">
               <a:rPr lang="en-US" smtClean="0"/>
-              <a:t>9/8/2025</a:t>
+              <a:t>9/10/2025</a:t>
             </a:fld>
             <a:endParaRPr lang="en-US" dirty="0"/>
           </a:p>
@@ -10987,7 +10110,7 @@
           <a:p>
             <a:fld id="{4EDE50D6-574B-40AF-946F-D52A04ADE379}" type="datetime1">
               <a:rPr lang="en-US" smtClean="0"/>
-              <a:t>9/8/2025</a:t>
+              <a:t>9/10/2025</a:t>
             </a:fld>
             <a:endParaRPr lang="en-US" dirty="0"/>
           </a:p>
@@ -11363,7 +10486,7 @@
           <a:p>
             <a:fld id="{D82884F1-FFEA-405F-9602-3DCA865EDA4E}" type="datetime1">
               <a:rPr lang="en-US" smtClean="0"/>
-              <a:t>9/8/2025</a:t>
+              <a:t>9/10/2025</a:t>
             </a:fld>
             <a:endParaRPr lang="en-US" dirty="0"/>
           </a:p>
@@ -11656,7 +10779,7 @@
           <a:p>
             <a:fld id="{7E18DB4A-8810-4A10-AD5C-D5E2C667F5B3}" type="datetime1">
               <a:rPr lang="en-US" smtClean="0"/>
-              <a:t>9/8/2025</a:t>
+              <a:t>9/10/2025</a:t>
             </a:fld>
             <a:endParaRPr lang="en-US" dirty="0"/>
           </a:p>
@@ -11848,7 +10971,7 @@
           <a:p>
             <a:fld id="{2CED4963-E985-44C4-B8C4-FDD613B7C2F8}" type="datetime1">
               <a:rPr lang="en-US" smtClean="0"/>
-              <a:t>9/8/2025</a:t>
+              <a:t>9/10/2025</a:t>
             </a:fld>
             <a:endParaRPr lang="en-US" dirty="0"/>
           </a:p>
@@ -12210,7 +11333,7 @@
           <a:p>
             <a:fld id="{ED291B17-9318-49DB-B28B-6E5994AE9581}" type="datetime1">
               <a:rPr lang="en-US" smtClean="0"/>
-              <a:t>9/8/2025</a:t>
+              <a:t>9/10/2025</a:t>
             </a:fld>
             <a:endParaRPr lang="en-US" dirty="0"/>
           </a:p>
@@ -12644,7 +11767,7 @@
           <a:p>
             <a:fld id="{4D8F0038-C403-4E4E-A358-F4B6321C12F5}" type="datetime1">
               <a:rPr lang="en-US" smtClean="0"/>
-              <a:t>9/8/2025</a:t>
+              <a:t>9/10/2025</a:t>
             </a:fld>
             <a:endParaRPr lang="en-US"/>
           </a:p>
@@ -12768,7 +11891,7 @@
           <a:p>
             <a:fld id="{28152514-E107-4B51-A0E4-6CCBE2731D63}" type="datetime1">
               <a:rPr lang="en-US" smtClean="0"/>
-              <a:t>9/8/2025</a:t>
+              <a:t>9/10/2025</a:t>
             </a:fld>
             <a:endParaRPr lang="en-US"/>
           </a:p>
@@ -12864,7 +11987,7 @@
           <a:p>
             <a:fld id="{D075C0F4-646D-457B-9990-7D4E2FD4A597}" type="datetime1">
               <a:rPr lang="en-US" smtClean="0"/>
-              <a:t>9/8/2025</a:t>
+              <a:t>9/10/2025</a:t>
             </a:fld>
             <a:endParaRPr lang="en-US"/>
           </a:p>
@@ -13242,7 +12365,7 @@
           <a:p>
             <a:fld id="{8E4477A8-A506-4192-A810-B96D85416BE8}" type="datetime1">
               <a:rPr lang="en-US" smtClean="0"/>
-              <a:t>9/8/2025</a:t>
+              <a:t>9/10/2025</a:t>
             </a:fld>
             <a:endParaRPr lang="en-US"/>
           </a:p>
@@ -13535,7 +12658,7 @@
           <a:p>
             <a:fld id="{C8901744-7364-4EA9-A9E9-43D8A126DBDD}" type="datetime1">
               <a:rPr lang="en-US" smtClean="0"/>
-              <a:t>9/8/2025</a:t>
+              <a:t>9/10/2025</a:t>
             </a:fld>
             <a:endParaRPr lang="en-US"/>
           </a:p>
@@ -13750,7 +12873,7 @@
           <a:p>
             <a:fld id="{53D9F797-665E-490A-B876-3E21189284AA}" type="datetime1">
               <a:rPr lang="en-US" smtClean="0"/>
-              <a:t>9/8/2025</a:t>
+              <a:t>9/10/2025</a:t>
             </a:fld>
             <a:endParaRPr lang="en-US"/>
           </a:p>
@@ -14531,7 +13654,7 @@
           <a:p>
             <a:fld id="{53D9F797-665E-490A-B876-3E21189284AA}" type="datetime1">
               <a:rPr lang="en-US" smtClean="0"/>
-              <a:t>9/8/2025</a:t>
+              <a:t>9/10/2025</a:t>
             </a:fld>
             <a:endParaRPr lang="en-US"/>
           </a:p>
@@ -15312,7 +14435,7 @@
           <a:p>
             <a:fld id="{ED291B17-9318-49DB-B28B-6E5994AE9581}" type="datetime1">
               <a:rPr lang="en-US" smtClean="0"/>
-              <a:t>9/8/2025</a:t>
+              <a:t>9/10/2025</a:t>
             </a:fld>
             <a:endParaRPr lang="en-US" dirty="0"/>
           </a:p>
@@ -16093,7 +15216,7 @@
           <a:p>
             <a:fld id="{ED291B17-9318-49DB-B28B-6E5994AE9581}" type="datetime1">
               <a:rPr lang="en-US" smtClean="0"/>
-              <a:t>9/8/2025</a:t>
+              <a:t>9/10/2025</a:t>
             </a:fld>
             <a:endParaRPr lang="en-US" dirty="0"/>
           </a:p>
@@ -17079,7 +16202,7 @@
                   <a:srgbClr val="FFFFFF"/>
                 </a:solidFill>
               </a:rPr>
-              <a:t>WEEK 03 </a:t>
+              <a:t>WEEK 04 </a:t>
             </a:r>
             <a:br>
               <a:rPr lang="en-US" sz="2700" dirty="0">
@@ -17096,12 +16219,20 @@
               </a:rPr>
             </a:br>
             <a:r>
+              <a:rPr lang="en-US" sz="2700" dirty="0" err="1">
+                <a:solidFill>
+                  <a:srgbClr val="FFFFFF"/>
+                </a:solidFill>
+              </a:rPr>
+              <a:t>arcgis</a:t>
+            </a:r>
+            <a:r>
               <a:rPr lang="en-US" sz="2700" dirty="0">
                 <a:solidFill>
                   <a:srgbClr val="FFFFFF"/>
                 </a:solidFill>
               </a:rPr>
-              <a:t>survey 123</a:t>
+              <a:t> field map</a:t>
             </a:r>
             <a:br>
               <a:rPr lang="en-US" sz="2700" dirty="0">
@@ -17146,7 +16277,7 @@
         </p:nvSpPr>
         <p:spPr>
           <a:xfrm>
-            <a:off x="346990" y="2896512"/>
+            <a:off x="348018" y="3000092"/>
             <a:ext cx="2916154" cy="1537292"/>
           </a:xfrm>
         </p:spPr>
@@ -17264,2149 +16395,6 @@
           <a:chExt cx="0" cy="0"/>
         </a:xfrm>
       </p:grpSpPr>
-      <p:cxnSp>
-        <p:nvCxnSpPr>
-          <p:cNvPr id="6" name="Straight Connector 5">
-            <a:extLst>
-              <a:ext uri="{FF2B5EF4-FFF2-40B4-BE49-F238E27FC236}">
-                <a16:creationId xmlns:a16="http://schemas.microsoft.com/office/drawing/2014/main" id="{72C807DF-E68B-4FDB-AF8B-FD65014E3363}"/>
-              </a:ext>
-            </a:extLst>
-          </p:cNvPr>
-          <p:cNvCxnSpPr/>
-          <p:nvPr/>
-        </p:nvCxnSpPr>
-        <p:spPr>
-          <a:xfrm>
-            <a:off x="152400" y="922910"/>
-            <a:ext cx="8001000" cy="0"/>
-          </a:xfrm>
-          <a:prstGeom prst="line">
-            <a:avLst/>
-          </a:prstGeom>
-          <a:ln>
-            <a:solidFill>
-              <a:schemeClr val="tx1"/>
-            </a:solidFill>
-          </a:ln>
-          <a:effectLst/>
-        </p:spPr>
-        <p:style>
-          <a:lnRef idx="2">
-            <a:schemeClr val="accent1"/>
-          </a:lnRef>
-          <a:fillRef idx="0">
-            <a:schemeClr val="accent1"/>
-          </a:fillRef>
-          <a:effectRef idx="1">
-            <a:schemeClr val="accent1"/>
-          </a:effectRef>
-          <a:fontRef idx="minor">
-            <a:schemeClr val="tx1"/>
-          </a:fontRef>
-        </p:style>
-      </p:cxnSp>
-      <p:sp>
-        <p:nvSpPr>
-          <p:cNvPr id="7" name="Title 1">
-            <a:extLst>
-              <a:ext uri="{FF2B5EF4-FFF2-40B4-BE49-F238E27FC236}">
-                <a16:creationId xmlns:a16="http://schemas.microsoft.com/office/drawing/2014/main" id="{81ABCB3B-7396-4070-8FA3-31111AB30A9C}"/>
-              </a:ext>
-            </a:extLst>
-          </p:cNvPr>
-          <p:cNvSpPr txBox="1">
-            <a:spLocks/>
-          </p:cNvSpPr>
-          <p:nvPr/>
-        </p:nvSpPr>
-        <p:spPr>
-          <a:xfrm>
-            <a:off x="118533" y="43082"/>
-            <a:ext cx="8077200" cy="857250"/>
-          </a:xfrm>
-          <a:prstGeom prst="rect">
-            <a:avLst/>
-          </a:prstGeom>
-        </p:spPr>
-        <p:txBody>
-          <a:bodyPr vert="horz" lIns="91440" tIns="45720" rIns="91440" bIns="45720" rtlCol="0" anchor="ctr">
-            <a:normAutofit/>
-          </a:bodyPr>
-          <a:lstStyle>
-            <a:lvl1pPr algn="ctr" defTabSz="411480" rtl="0" eaLnBrk="1" latinLnBrk="0" hangingPunct="1">
-              <a:spcBef>
-                <a:spcPct val="0"/>
-              </a:spcBef>
-              <a:buNone/>
-              <a:defRPr sz="3960" kern="1200">
-                <a:solidFill>
-                  <a:schemeClr val="tx1"/>
-                </a:solidFill>
-                <a:latin typeface="+mj-lt"/>
-                <a:ea typeface="+mj-ea"/>
-                <a:cs typeface="+mj-cs"/>
-              </a:defRPr>
-            </a:lvl1pPr>
-          </a:lstStyle>
-          <a:p>
-            <a:pPr algn="l"/>
-            <a:r>
-              <a:rPr lang="en-US" sz="2600" dirty="0">
-                <a:solidFill>
-                  <a:srgbClr val="7030A0"/>
-                </a:solidFill>
-              </a:rPr>
-              <a:t>Workflow</a:t>
-            </a:r>
-          </a:p>
-        </p:txBody>
-      </p:sp>
-      <p:sp>
-        <p:nvSpPr>
-          <p:cNvPr id="2" name="Rectangle 1027">
-            <a:extLst>
-              <a:ext uri="{FF2B5EF4-FFF2-40B4-BE49-F238E27FC236}">
-                <a16:creationId xmlns:a16="http://schemas.microsoft.com/office/drawing/2014/main" id="{6AD63676-E604-4050-BF0E-A7B8DD754C47}"/>
-              </a:ext>
-            </a:extLst>
-          </p:cNvPr>
-          <p:cNvSpPr txBox="1">
-            <a:spLocks noChangeArrowheads="1"/>
-          </p:cNvSpPr>
-          <p:nvPr/>
-        </p:nvSpPr>
-        <p:spPr>
-          <a:xfrm>
-            <a:off x="247135" y="922910"/>
-            <a:ext cx="7679724" cy="3886200"/>
-          </a:xfrm>
-          <a:prstGeom prst="rect">
-            <a:avLst/>
-          </a:prstGeom>
-        </p:spPr>
-        <p:txBody>
-          <a:bodyPr vert="horz" lIns="91440" tIns="45720" rIns="91440" bIns="45720" rtlCol="0">
-            <a:normAutofit/>
-          </a:bodyPr>
-          <a:lstStyle>
-            <a:lvl1pPr marL="308610" indent="-308610" algn="l" defTabSz="411480" rtl="0" eaLnBrk="1" latinLnBrk="0" hangingPunct="1">
-              <a:spcBef>
-                <a:spcPct val="20000"/>
-              </a:spcBef>
-              <a:buFont typeface="Arial"/>
-              <a:buChar char="•"/>
-              <a:defRPr sz="2880" kern="1200">
-                <a:solidFill>
-                  <a:schemeClr val="tx1"/>
-                </a:solidFill>
-                <a:latin typeface="+mn-lt"/>
-                <a:ea typeface="+mn-ea"/>
-                <a:cs typeface="+mn-cs"/>
-              </a:defRPr>
-            </a:lvl1pPr>
-            <a:lvl2pPr marL="668655" indent="-257175" algn="l" defTabSz="411480" rtl="0" eaLnBrk="1" latinLnBrk="0" hangingPunct="1">
-              <a:spcBef>
-                <a:spcPct val="20000"/>
-              </a:spcBef>
-              <a:buFont typeface="Arial"/>
-              <a:buChar char="–"/>
-              <a:defRPr sz="2520" kern="1200">
-                <a:solidFill>
-                  <a:schemeClr val="tx1"/>
-                </a:solidFill>
-                <a:latin typeface="+mn-lt"/>
-                <a:ea typeface="+mn-ea"/>
-                <a:cs typeface="+mn-cs"/>
-              </a:defRPr>
-            </a:lvl2pPr>
-            <a:lvl3pPr marL="1028700" indent="-205740" algn="l" defTabSz="411480" rtl="0" eaLnBrk="1" latinLnBrk="0" hangingPunct="1">
-              <a:spcBef>
-                <a:spcPct val="20000"/>
-              </a:spcBef>
-              <a:buFont typeface="Arial"/>
-              <a:buChar char="•"/>
-              <a:defRPr sz="2160" kern="1200">
-                <a:solidFill>
-                  <a:schemeClr val="tx1"/>
-                </a:solidFill>
-                <a:latin typeface="+mn-lt"/>
-                <a:ea typeface="+mn-ea"/>
-                <a:cs typeface="+mn-cs"/>
-              </a:defRPr>
-            </a:lvl3pPr>
-            <a:lvl4pPr marL="1440180" indent="-205740" algn="l" defTabSz="411480" rtl="0" eaLnBrk="1" latinLnBrk="0" hangingPunct="1">
-              <a:spcBef>
-                <a:spcPct val="20000"/>
-              </a:spcBef>
-              <a:buFont typeface="Arial"/>
-              <a:buChar char="–"/>
-              <a:defRPr sz="1800" kern="1200">
-                <a:solidFill>
-                  <a:schemeClr val="tx1"/>
-                </a:solidFill>
-                <a:latin typeface="+mn-lt"/>
-                <a:ea typeface="+mn-ea"/>
-                <a:cs typeface="+mn-cs"/>
-              </a:defRPr>
-            </a:lvl4pPr>
-            <a:lvl5pPr marL="1851660" indent="-205740" algn="l" defTabSz="411480" rtl="0" eaLnBrk="1" latinLnBrk="0" hangingPunct="1">
-              <a:spcBef>
-                <a:spcPct val="20000"/>
-              </a:spcBef>
-              <a:buFont typeface="Arial"/>
-              <a:buChar char="»"/>
-              <a:defRPr sz="1800" kern="1200">
-                <a:solidFill>
-                  <a:schemeClr val="tx1"/>
-                </a:solidFill>
-                <a:latin typeface="+mn-lt"/>
-                <a:ea typeface="+mn-ea"/>
-                <a:cs typeface="+mn-cs"/>
-              </a:defRPr>
-            </a:lvl5pPr>
-            <a:lvl6pPr marL="2263140" indent="-205740" algn="l" defTabSz="411480" rtl="0" eaLnBrk="1" latinLnBrk="0" hangingPunct="1">
-              <a:spcBef>
-                <a:spcPct val="20000"/>
-              </a:spcBef>
-              <a:buFont typeface="Arial"/>
-              <a:buChar char="•"/>
-              <a:defRPr sz="1800" kern="1200">
-                <a:solidFill>
-                  <a:schemeClr val="tx1"/>
-                </a:solidFill>
-                <a:latin typeface="+mn-lt"/>
-                <a:ea typeface="+mn-ea"/>
-                <a:cs typeface="+mn-cs"/>
-              </a:defRPr>
-            </a:lvl6pPr>
-            <a:lvl7pPr marL="2674620" indent="-205740" algn="l" defTabSz="411480" rtl="0" eaLnBrk="1" latinLnBrk="0" hangingPunct="1">
-              <a:spcBef>
-                <a:spcPct val="20000"/>
-              </a:spcBef>
-              <a:buFont typeface="Arial"/>
-              <a:buChar char="•"/>
-              <a:defRPr sz="1800" kern="1200">
-                <a:solidFill>
-                  <a:schemeClr val="tx1"/>
-                </a:solidFill>
-                <a:latin typeface="+mn-lt"/>
-                <a:ea typeface="+mn-ea"/>
-                <a:cs typeface="+mn-cs"/>
-              </a:defRPr>
-            </a:lvl7pPr>
-            <a:lvl8pPr marL="3086100" indent="-205740" algn="l" defTabSz="411480" rtl="0" eaLnBrk="1" latinLnBrk="0" hangingPunct="1">
-              <a:spcBef>
-                <a:spcPct val="20000"/>
-              </a:spcBef>
-              <a:buFont typeface="Arial"/>
-              <a:buChar char="•"/>
-              <a:defRPr sz="1800" kern="1200">
-                <a:solidFill>
-                  <a:schemeClr val="tx1"/>
-                </a:solidFill>
-                <a:latin typeface="+mn-lt"/>
-                <a:ea typeface="+mn-ea"/>
-                <a:cs typeface="+mn-cs"/>
-              </a:defRPr>
-            </a:lvl8pPr>
-            <a:lvl9pPr marL="3497580" indent="-205740" algn="l" defTabSz="411480" rtl="0" eaLnBrk="1" latinLnBrk="0" hangingPunct="1">
-              <a:spcBef>
-                <a:spcPct val="20000"/>
-              </a:spcBef>
-              <a:buFont typeface="Arial"/>
-              <a:buChar char="•"/>
-              <a:defRPr sz="1800" kern="1200">
-                <a:solidFill>
-                  <a:schemeClr val="tx1"/>
-                </a:solidFill>
-                <a:latin typeface="+mn-lt"/>
-                <a:ea typeface="+mn-ea"/>
-                <a:cs typeface="+mn-cs"/>
-              </a:defRPr>
-            </a:lvl9pPr>
-          </a:lstStyle>
-          <a:p>
-            <a:pPr>
-              <a:buFont typeface="Courier New" panose="02070309020205020404" pitchFamily="49" charset="0"/>
-              <a:buChar char="o"/>
-            </a:pPr>
-            <a:r>
-              <a:rPr lang="en-US" altLang="en-US" dirty="0"/>
-              <a:t>Feature Layer Properties</a:t>
-            </a:r>
-          </a:p>
-          <a:p>
-            <a:pPr marL="411480" lvl="1" indent="0">
-              <a:buNone/>
-            </a:pPr>
-            <a:endParaRPr lang="en-US" altLang="en-US" dirty="0"/>
-          </a:p>
-        </p:txBody>
-      </p:sp>
-      <p:sp>
-        <p:nvSpPr>
-          <p:cNvPr id="3" name="TextBox 2">
-            <a:extLst>
-              <a:ext uri="{FF2B5EF4-FFF2-40B4-BE49-F238E27FC236}">
-                <a16:creationId xmlns:a16="http://schemas.microsoft.com/office/drawing/2014/main" id="{77AC95F2-D596-4A45-A200-10A8AE08F398}"/>
-              </a:ext>
-            </a:extLst>
-          </p:cNvPr>
-          <p:cNvSpPr txBox="1"/>
-          <p:nvPr/>
-        </p:nvSpPr>
-        <p:spPr>
-          <a:xfrm>
-            <a:off x="247135" y="4697393"/>
-            <a:ext cx="701771" cy="246221"/>
-          </a:xfrm>
-          <a:prstGeom prst="rect">
-            <a:avLst/>
-          </a:prstGeom>
-          <a:noFill/>
-        </p:spPr>
-        <p:txBody>
-          <a:bodyPr wrap="square">
-            <a:spAutoFit/>
-          </a:bodyPr>
-          <a:lstStyle/>
-          <a:p>
-            <a:r>
-              <a:rPr lang="en-US" sz="1000" dirty="0">
-                <a:solidFill>
-                  <a:srgbClr val="7030A0"/>
-                </a:solidFill>
-              </a:rPr>
-              <a:t>ESRI</a:t>
-            </a:r>
-          </a:p>
-        </p:txBody>
-      </p:sp>
-      <p:pic>
-        <p:nvPicPr>
-          <p:cNvPr id="5" name="Picture 4" descr="Image showing feature layer properties">
-            <a:extLst>
-              <a:ext uri="{FF2B5EF4-FFF2-40B4-BE49-F238E27FC236}">
-                <a16:creationId xmlns:a16="http://schemas.microsoft.com/office/drawing/2014/main" id="{1C7947FC-928E-4C97-876A-300153273596}"/>
-              </a:ext>
-            </a:extLst>
-          </p:cNvPr>
-          <p:cNvPicPr>
-            <a:picLocks noChangeAspect="1"/>
-          </p:cNvPicPr>
-          <p:nvPr/>
-        </p:nvPicPr>
-        <p:blipFill>
-          <a:blip r:embed="rId3"/>
-          <a:stretch>
-            <a:fillRect/>
-          </a:stretch>
-        </p:blipFill>
-        <p:spPr>
-          <a:xfrm>
-            <a:off x="152400" y="1457315"/>
-            <a:ext cx="7830065" cy="544801"/>
-          </a:xfrm>
-          <a:prstGeom prst="rect">
-            <a:avLst/>
-          </a:prstGeom>
-        </p:spPr>
-      </p:pic>
-      <p:pic>
-        <p:nvPicPr>
-          <p:cNvPr id="9" name="Picture 8" descr="Image showing feature layer properties">
-            <a:extLst>
-              <a:ext uri="{FF2B5EF4-FFF2-40B4-BE49-F238E27FC236}">
-                <a16:creationId xmlns:a16="http://schemas.microsoft.com/office/drawing/2014/main" id="{17B0E753-72E9-4DAD-9962-9078ECAC2199}"/>
-              </a:ext>
-            </a:extLst>
-          </p:cNvPr>
-          <p:cNvPicPr>
-            <a:picLocks noChangeAspect="1"/>
-          </p:cNvPicPr>
-          <p:nvPr/>
-        </p:nvPicPr>
-        <p:blipFill>
-          <a:blip r:embed="rId4"/>
-          <a:stretch>
-            <a:fillRect/>
-          </a:stretch>
-        </p:blipFill>
-        <p:spPr>
-          <a:xfrm>
-            <a:off x="1250675" y="2103191"/>
-            <a:ext cx="5382883" cy="2773171"/>
-          </a:xfrm>
-          <a:prstGeom prst="rect">
-            <a:avLst/>
-          </a:prstGeom>
-        </p:spPr>
-      </p:pic>
-      <p:sp>
-        <p:nvSpPr>
-          <p:cNvPr id="8" name="Slide Number Placeholder 7">
-            <a:extLst>
-              <a:ext uri="{FF2B5EF4-FFF2-40B4-BE49-F238E27FC236}">
-                <a16:creationId xmlns:a16="http://schemas.microsoft.com/office/drawing/2014/main" id="{FB02DED7-5AA4-42E5-A1BC-767B71F26FFF}"/>
-              </a:ext>
-            </a:extLst>
-          </p:cNvPr>
-          <p:cNvSpPr>
-            <a:spLocks noGrp="1"/>
-          </p:cNvSpPr>
-          <p:nvPr>
-            <p:ph type="sldNum" sz="quarter" idx="12"/>
-          </p:nvPr>
-        </p:nvSpPr>
-        <p:spPr/>
-        <p:txBody>
-          <a:bodyPr/>
-          <a:lstStyle/>
-          <a:p>
-            <a:fld id="{127DDC20-79C9-9647-820E-6D40A3D210C3}" type="slidenum">
-              <a:rPr lang="en-US" smtClean="0"/>
-              <a:pPr/>
-              <a:t>10</a:t>
-            </a:fld>
-            <a:endParaRPr lang="en-US"/>
-          </a:p>
-        </p:txBody>
-      </p:sp>
-    </p:spTree>
-    <p:extLst>
-      <p:ext uri="{BB962C8B-B14F-4D97-AF65-F5344CB8AC3E}">
-        <p14:creationId xmlns:p14="http://schemas.microsoft.com/office/powerpoint/2010/main" val="616267063"/>
-      </p:ext>
-    </p:extLst>
-  </p:cSld>
-  <p:clrMapOvr>
-    <a:masterClrMapping/>
-  </p:clrMapOvr>
-</p:sld>
-</file>
-
-<file path=ppt/slides/slide11.xml><?xml version="1.0" encoding="utf-8"?>
-<p:sld xmlns:a="http://schemas.openxmlformats.org/drawingml/2006/main" xmlns:r="http://schemas.openxmlformats.org/officeDocument/2006/relationships" xmlns:p="http://schemas.openxmlformats.org/presentationml/2006/main">
-  <p:cSld>
-    <p:spTree>
-      <p:nvGrpSpPr>
-        <p:cNvPr id="1" name=""/>
-        <p:cNvGrpSpPr/>
-        <p:nvPr/>
-      </p:nvGrpSpPr>
-      <p:grpSpPr>
-        <a:xfrm>
-          <a:off x="0" y="0"/>
-          <a:ext cx="0" cy="0"/>
-          <a:chOff x="0" y="0"/>
-          <a:chExt cx="0" cy="0"/>
-        </a:xfrm>
-      </p:grpSpPr>
-      <p:cxnSp>
-        <p:nvCxnSpPr>
-          <p:cNvPr id="6" name="Straight Connector 5">
-            <a:extLst>
-              <a:ext uri="{FF2B5EF4-FFF2-40B4-BE49-F238E27FC236}">
-                <a16:creationId xmlns:a16="http://schemas.microsoft.com/office/drawing/2014/main" id="{72C807DF-E68B-4FDB-AF8B-FD65014E3363}"/>
-              </a:ext>
-            </a:extLst>
-          </p:cNvPr>
-          <p:cNvCxnSpPr/>
-          <p:nvPr/>
-        </p:nvCxnSpPr>
-        <p:spPr>
-          <a:xfrm>
-            <a:off x="152400" y="922910"/>
-            <a:ext cx="8001000" cy="0"/>
-          </a:xfrm>
-          <a:prstGeom prst="line">
-            <a:avLst/>
-          </a:prstGeom>
-          <a:ln>
-            <a:solidFill>
-              <a:schemeClr val="tx1"/>
-            </a:solidFill>
-          </a:ln>
-          <a:effectLst/>
-        </p:spPr>
-        <p:style>
-          <a:lnRef idx="2">
-            <a:schemeClr val="accent1"/>
-          </a:lnRef>
-          <a:fillRef idx="0">
-            <a:schemeClr val="accent1"/>
-          </a:fillRef>
-          <a:effectRef idx="1">
-            <a:schemeClr val="accent1"/>
-          </a:effectRef>
-          <a:fontRef idx="minor">
-            <a:schemeClr val="tx1"/>
-          </a:fontRef>
-        </p:style>
-      </p:cxnSp>
-      <p:sp>
-        <p:nvSpPr>
-          <p:cNvPr id="7" name="Title 1">
-            <a:extLst>
-              <a:ext uri="{FF2B5EF4-FFF2-40B4-BE49-F238E27FC236}">
-                <a16:creationId xmlns:a16="http://schemas.microsoft.com/office/drawing/2014/main" id="{81ABCB3B-7396-4070-8FA3-31111AB30A9C}"/>
-              </a:ext>
-            </a:extLst>
-          </p:cNvPr>
-          <p:cNvSpPr txBox="1">
-            <a:spLocks/>
-          </p:cNvSpPr>
-          <p:nvPr/>
-        </p:nvSpPr>
-        <p:spPr>
-          <a:xfrm>
-            <a:off x="118533" y="43082"/>
-            <a:ext cx="8077200" cy="857250"/>
-          </a:xfrm>
-          <a:prstGeom prst="rect">
-            <a:avLst/>
-          </a:prstGeom>
-        </p:spPr>
-        <p:txBody>
-          <a:bodyPr vert="horz" lIns="91440" tIns="45720" rIns="91440" bIns="45720" rtlCol="0" anchor="ctr">
-            <a:normAutofit/>
-          </a:bodyPr>
-          <a:lstStyle>
-            <a:lvl1pPr algn="ctr" defTabSz="411480" rtl="0" eaLnBrk="1" latinLnBrk="0" hangingPunct="1">
-              <a:spcBef>
-                <a:spcPct val="0"/>
-              </a:spcBef>
-              <a:buNone/>
-              <a:defRPr sz="3960" kern="1200">
-                <a:solidFill>
-                  <a:schemeClr val="tx1"/>
-                </a:solidFill>
-                <a:latin typeface="+mj-lt"/>
-                <a:ea typeface="+mj-ea"/>
-                <a:cs typeface="+mj-cs"/>
-              </a:defRPr>
-            </a:lvl1pPr>
-          </a:lstStyle>
-          <a:p>
-            <a:pPr algn="l"/>
-            <a:r>
-              <a:rPr lang="en-US" sz="2600" dirty="0">
-                <a:solidFill>
-                  <a:srgbClr val="7030A0"/>
-                </a:solidFill>
-              </a:rPr>
-              <a:t>Workflow</a:t>
-            </a:r>
-          </a:p>
-        </p:txBody>
-      </p:sp>
-      <p:sp>
-        <p:nvSpPr>
-          <p:cNvPr id="2" name="Rectangle 1027">
-            <a:extLst>
-              <a:ext uri="{FF2B5EF4-FFF2-40B4-BE49-F238E27FC236}">
-                <a16:creationId xmlns:a16="http://schemas.microsoft.com/office/drawing/2014/main" id="{6AD63676-E604-4050-BF0E-A7B8DD754C47}"/>
-              </a:ext>
-            </a:extLst>
-          </p:cNvPr>
-          <p:cNvSpPr txBox="1">
-            <a:spLocks noChangeArrowheads="1"/>
-          </p:cNvSpPr>
-          <p:nvPr/>
-        </p:nvSpPr>
-        <p:spPr>
-          <a:xfrm>
-            <a:off x="247135" y="922910"/>
-            <a:ext cx="7679724" cy="3886200"/>
-          </a:xfrm>
-          <a:prstGeom prst="rect">
-            <a:avLst/>
-          </a:prstGeom>
-        </p:spPr>
-        <p:txBody>
-          <a:bodyPr vert="horz" lIns="91440" tIns="45720" rIns="91440" bIns="45720" rtlCol="0">
-            <a:normAutofit fontScale="92500" lnSpcReduction="10000"/>
-          </a:bodyPr>
-          <a:lstStyle>
-            <a:lvl1pPr marL="308610" indent="-308610" algn="l" defTabSz="411480" rtl="0" eaLnBrk="1" latinLnBrk="0" hangingPunct="1">
-              <a:spcBef>
-                <a:spcPct val="20000"/>
-              </a:spcBef>
-              <a:buFont typeface="Arial"/>
-              <a:buChar char="•"/>
-              <a:defRPr sz="2880" kern="1200">
-                <a:solidFill>
-                  <a:schemeClr val="tx1"/>
-                </a:solidFill>
-                <a:latin typeface="+mn-lt"/>
-                <a:ea typeface="+mn-ea"/>
-                <a:cs typeface="+mn-cs"/>
-              </a:defRPr>
-            </a:lvl1pPr>
-            <a:lvl2pPr marL="668655" indent="-257175" algn="l" defTabSz="411480" rtl="0" eaLnBrk="1" latinLnBrk="0" hangingPunct="1">
-              <a:spcBef>
-                <a:spcPct val="20000"/>
-              </a:spcBef>
-              <a:buFont typeface="Arial"/>
-              <a:buChar char="–"/>
-              <a:defRPr sz="2520" kern="1200">
-                <a:solidFill>
-                  <a:schemeClr val="tx1"/>
-                </a:solidFill>
-                <a:latin typeface="+mn-lt"/>
-                <a:ea typeface="+mn-ea"/>
-                <a:cs typeface="+mn-cs"/>
-              </a:defRPr>
-            </a:lvl2pPr>
-            <a:lvl3pPr marL="1028700" indent="-205740" algn="l" defTabSz="411480" rtl="0" eaLnBrk="1" latinLnBrk="0" hangingPunct="1">
-              <a:spcBef>
-                <a:spcPct val="20000"/>
-              </a:spcBef>
-              <a:buFont typeface="Arial"/>
-              <a:buChar char="•"/>
-              <a:defRPr sz="2160" kern="1200">
-                <a:solidFill>
-                  <a:schemeClr val="tx1"/>
-                </a:solidFill>
-                <a:latin typeface="+mn-lt"/>
-                <a:ea typeface="+mn-ea"/>
-                <a:cs typeface="+mn-cs"/>
-              </a:defRPr>
-            </a:lvl3pPr>
-            <a:lvl4pPr marL="1440180" indent="-205740" algn="l" defTabSz="411480" rtl="0" eaLnBrk="1" latinLnBrk="0" hangingPunct="1">
-              <a:spcBef>
-                <a:spcPct val="20000"/>
-              </a:spcBef>
-              <a:buFont typeface="Arial"/>
-              <a:buChar char="–"/>
-              <a:defRPr sz="1800" kern="1200">
-                <a:solidFill>
-                  <a:schemeClr val="tx1"/>
-                </a:solidFill>
-                <a:latin typeface="+mn-lt"/>
-                <a:ea typeface="+mn-ea"/>
-                <a:cs typeface="+mn-cs"/>
-              </a:defRPr>
-            </a:lvl4pPr>
-            <a:lvl5pPr marL="1851660" indent="-205740" algn="l" defTabSz="411480" rtl="0" eaLnBrk="1" latinLnBrk="0" hangingPunct="1">
-              <a:spcBef>
-                <a:spcPct val="20000"/>
-              </a:spcBef>
-              <a:buFont typeface="Arial"/>
-              <a:buChar char="»"/>
-              <a:defRPr sz="1800" kern="1200">
-                <a:solidFill>
-                  <a:schemeClr val="tx1"/>
-                </a:solidFill>
-                <a:latin typeface="+mn-lt"/>
-                <a:ea typeface="+mn-ea"/>
-                <a:cs typeface="+mn-cs"/>
-              </a:defRPr>
-            </a:lvl5pPr>
-            <a:lvl6pPr marL="2263140" indent="-205740" algn="l" defTabSz="411480" rtl="0" eaLnBrk="1" latinLnBrk="0" hangingPunct="1">
-              <a:spcBef>
-                <a:spcPct val="20000"/>
-              </a:spcBef>
-              <a:buFont typeface="Arial"/>
-              <a:buChar char="•"/>
-              <a:defRPr sz="1800" kern="1200">
-                <a:solidFill>
-                  <a:schemeClr val="tx1"/>
-                </a:solidFill>
-                <a:latin typeface="+mn-lt"/>
-                <a:ea typeface="+mn-ea"/>
-                <a:cs typeface="+mn-cs"/>
-              </a:defRPr>
-            </a:lvl6pPr>
-            <a:lvl7pPr marL="2674620" indent="-205740" algn="l" defTabSz="411480" rtl="0" eaLnBrk="1" latinLnBrk="0" hangingPunct="1">
-              <a:spcBef>
-                <a:spcPct val="20000"/>
-              </a:spcBef>
-              <a:buFont typeface="Arial"/>
-              <a:buChar char="•"/>
-              <a:defRPr sz="1800" kern="1200">
-                <a:solidFill>
-                  <a:schemeClr val="tx1"/>
-                </a:solidFill>
-                <a:latin typeface="+mn-lt"/>
-                <a:ea typeface="+mn-ea"/>
-                <a:cs typeface="+mn-cs"/>
-              </a:defRPr>
-            </a:lvl7pPr>
-            <a:lvl8pPr marL="3086100" indent="-205740" algn="l" defTabSz="411480" rtl="0" eaLnBrk="1" latinLnBrk="0" hangingPunct="1">
-              <a:spcBef>
-                <a:spcPct val="20000"/>
-              </a:spcBef>
-              <a:buFont typeface="Arial"/>
-              <a:buChar char="•"/>
-              <a:defRPr sz="1800" kern="1200">
-                <a:solidFill>
-                  <a:schemeClr val="tx1"/>
-                </a:solidFill>
-                <a:latin typeface="+mn-lt"/>
-                <a:ea typeface="+mn-ea"/>
-                <a:cs typeface="+mn-cs"/>
-              </a:defRPr>
-            </a:lvl8pPr>
-            <a:lvl9pPr marL="3497580" indent="-205740" algn="l" defTabSz="411480" rtl="0" eaLnBrk="1" latinLnBrk="0" hangingPunct="1">
-              <a:spcBef>
-                <a:spcPct val="20000"/>
-              </a:spcBef>
-              <a:buFont typeface="Arial"/>
-              <a:buChar char="•"/>
-              <a:defRPr sz="1800" kern="1200">
-                <a:solidFill>
-                  <a:schemeClr val="tx1"/>
-                </a:solidFill>
-                <a:latin typeface="+mn-lt"/>
-                <a:ea typeface="+mn-ea"/>
-                <a:cs typeface="+mn-cs"/>
-              </a:defRPr>
-            </a:lvl9pPr>
-          </a:lstStyle>
-          <a:p>
-            <a:pPr>
-              <a:buFont typeface="Courier New" panose="02070309020205020404" pitchFamily="49" charset="0"/>
-              <a:buChar char="o"/>
-            </a:pPr>
-            <a:r>
-              <a:rPr lang="en-US" altLang="en-US" dirty="0"/>
-              <a:t>Add to a Web Map</a:t>
-            </a:r>
-          </a:p>
-          <a:p>
-            <a:pPr lvl="1">
-              <a:buFont typeface="Wingdings" panose="05000000000000000000" pitchFamily="2" charset="2"/>
-              <a:buChar char="ü"/>
-            </a:pPr>
-            <a:r>
-              <a:rPr lang="en-US" altLang="en-US" dirty="0"/>
-              <a:t>Requirements</a:t>
-            </a:r>
-          </a:p>
-          <a:p>
-            <a:pPr lvl="2">
-              <a:buFont typeface="Arial" panose="020B0604020202020204" pitchFamily="34" charset="0"/>
-              <a:buChar char="•"/>
-            </a:pPr>
-            <a:r>
-              <a:rPr lang="en-US" altLang="en-US" dirty="0"/>
-              <a:t>At least one editable feature layer</a:t>
-            </a:r>
-          </a:p>
-          <a:p>
-            <a:pPr lvl="2">
-              <a:buFont typeface="Arial" panose="020B0604020202020204" pitchFamily="34" charset="0"/>
-              <a:buChar char="•"/>
-            </a:pPr>
-            <a:r>
-              <a:rPr lang="en-US" altLang="en-US" dirty="0" err="1"/>
-              <a:t>Basemap</a:t>
-            </a:r>
-            <a:endParaRPr lang="en-US" altLang="en-US" dirty="0"/>
-          </a:p>
-          <a:p>
-            <a:pPr lvl="1">
-              <a:buFont typeface="Wingdings" panose="05000000000000000000" pitchFamily="2" charset="2"/>
-              <a:buChar char="ü"/>
-            </a:pPr>
-            <a:r>
-              <a:rPr lang="en-US" altLang="en-US" dirty="0"/>
-              <a:t>Map setting</a:t>
-            </a:r>
-          </a:p>
-          <a:p>
-            <a:pPr lvl="2">
-              <a:buFont typeface="Arial" panose="020B0604020202020204" pitchFamily="34" charset="0"/>
-              <a:buChar char="•"/>
-            </a:pPr>
-            <a:r>
-              <a:rPr lang="en-US" altLang="en-US" dirty="0"/>
-              <a:t>Search by layer</a:t>
-            </a:r>
-          </a:p>
-          <a:p>
-            <a:pPr lvl="2">
-              <a:buFont typeface="Arial" panose="020B0604020202020204" pitchFamily="34" charset="0"/>
-              <a:buChar char="•"/>
-            </a:pPr>
-            <a:r>
-              <a:rPr lang="en-US" altLang="en-US" dirty="0"/>
-              <a:t>Advanced offline settings and map areas</a:t>
-            </a:r>
-          </a:p>
-          <a:p>
-            <a:pPr lvl="1">
-              <a:buFont typeface="Wingdings" panose="05000000000000000000" pitchFamily="2" charset="2"/>
-              <a:buChar char="ü"/>
-            </a:pPr>
-            <a:r>
-              <a:rPr lang="en-US" altLang="en-US" dirty="0"/>
-              <a:t>Configure the form (pop-ups)</a:t>
-            </a:r>
-          </a:p>
-          <a:p>
-            <a:pPr lvl="1">
-              <a:buFont typeface="Wingdings" panose="05000000000000000000" pitchFamily="2" charset="2"/>
-              <a:buChar char="ü"/>
-            </a:pPr>
-            <a:r>
-              <a:rPr lang="en-US" altLang="en-US" dirty="0"/>
-              <a:t>Reference data</a:t>
-            </a:r>
-          </a:p>
-          <a:p>
-            <a:pPr lvl="1">
-              <a:buFont typeface="Wingdings" panose="05000000000000000000" pitchFamily="2" charset="2"/>
-              <a:buChar char="ü"/>
-            </a:pPr>
-            <a:r>
-              <a:rPr lang="en-US" altLang="en-US" dirty="0"/>
-              <a:t>Share with mobile workers via groups</a:t>
-            </a:r>
-          </a:p>
-          <a:p>
-            <a:pPr marL="411480" lvl="1" indent="0">
-              <a:buNone/>
-            </a:pPr>
-            <a:endParaRPr lang="en-US" altLang="en-US" dirty="0"/>
-          </a:p>
-        </p:txBody>
-      </p:sp>
-      <p:sp>
-        <p:nvSpPr>
-          <p:cNvPr id="3" name="TextBox 2">
-            <a:extLst>
-              <a:ext uri="{FF2B5EF4-FFF2-40B4-BE49-F238E27FC236}">
-                <a16:creationId xmlns:a16="http://schemas.microsoft.com/office/drawing/2014/main" id="{77AC95F2-D596-4A45-A200-10A8AE08F398}"/>
-              </a:ext>
-            </a:extLst>
-          </p:cNvPr>
-          <p:cNvSpPr txBox="1"/>
-          <p:nvPr/>
-        </p:nvSpPr>
-        <p:spPr>
-          <a:xfrm>
-            <a:off x="247135" y="4697393"/>
-            <a:ext cx="701771" cy="246221"/>
-          </a:xfrm>
-          <a:prstGeom prst="rect">
-            <a:avLst/>
-          </a:prstGeom>
-          <a:noFill/>
-        </p:spPr>
-        <p:txBody>
-          <a:bodyPr wrap="square">
-            <a:spAutoFit/>
-          </a:bodyPr>
-          <a:lstStyle/>
-          <a:p>
-            <a:r>
-              <a:rPr lang="en-US" sz="1000" dirty="0">
-                <a:solidFill>
-                  <a:srgbClr val="7030A0"/>
-                </a:solidFill>
-              </a:rPr>
-              <a:t>ESRI</a:t>
-            </a:r>
-          </a:p>
-        </p:txBody>
-      </p:sp>
-      <p:sp>
-        <p:nvSpPr>
-          <p:cNvPr id="5" name="Slide Number Placeholder 4">
-            <a:extLst>
-              <a:ext uri="{FF2B5EF4-FFF2-40B4-BE49-F238E27FC236}">
-                <a16:creationId xmlns:a16="http://schemas.microsoft.com/office/drawing/2014/main" id="{2F40F93A-6205-42FE-A403-3D315D0A8B22}"/>
-              </a:ext>
-            </a:extLst>
-          </p:cNvPr>
-          <p:cNvSpPr>
-            <a:spLocks noGrp="1"/>
-          </p:cNvSpPr>
-          <p:nvPr>
-            <p:ph type="sldNum" sz="quarter" idx="12"/>
-          </p:nvPr>
-        </p:nvSpPr>
-        <p:spPr/>
-        <p:txBody>
-          <a:bodyPr/>
-          <a:lstStyle/>
-          <a:p>
-            <a:fld id="{127DDC20-79C9-9647-820E-6D40A3D210C3}" type="slidenum">
-              <a:rPr lang="en-US" smtClean="0"/>
-              <a:pPr/>
-              <a:t>11</a:t>
-            </a:fld>
-            <a:endParaRPr lang="en-US"/>
-          </a:p>
-        </p:txBody>
-      </p:sp>
-    </p:spTree>
-    <p:extLst>
-      <p:ext uri="{BB962C8B-B14F-4D97-AF65-F5344CB8AC3E}">
-        <p14:creationId xmlns:p14="http://schemas.microsoft.com/office/powerpoint/2010/main" val="1355513387"/>
-      </p:ext>
-    </p:extLst>
-  </p:cSld>
-  <p:clrMapOvr>
-    <a:masterClrMapping/>
-  </p:clrMapOvr>
-</p:sld>
-</file>
-
-<file path=ppt/slides/slide12.xml><?xml version="1.0" encoding="utf-8"?>
-<p:sld xmlns:a="http://schemas.openxmlformats.org/drawingml/2006/main" xmlns:r="http://schemas.openxmlformats.org/officeDocument/2006/relationships" xmlns:p="http://schemas.openxmlformats.org/presentationml/2006/main">
-  <p:cSld>
-    <p:spTree>
-      <p:nvGrpSpPr>
-        <p:cNvPr id="1" name=""/>
-        <p:cNvGrpSpPr/>
-        <p:nvPr/>
-      </p:nvGrpSpPr>
-      <p:grpSpPr>
-        <a:xfrm>
-          <a:off x="0" y="0"/>
-          <a:ext cx="0" cy="0"/>
-          <a:chOff x="0" y="0"/>
-          <a:chExt cx="0" cy="0"/>
-        </a:xfrm>
-      </p:grpSpPr>
-      <p:cxnSp>
-        <p:nvCxnSpPr>
-          <p:cNvPr id="6" name="Straight Connector 5">
-            <a:extLst>
-              <a:ext uri="{FF2B5EF4-FFF2-40B4-BE49-F238E27FC236}">
-                <a16:creationId xmlns:a16="http://schemas.microsoft.com/office/drawing/2014/main" id="{72C807DF-E68B-4FDB-AF8B-FD65014E3363}"/>
-              </a:ext>
-            </a:extLst>
-          </p:cNvPr>
-          <p:cNvCxnSpPr/>
-          <p:nvPr/>
-        </p:nvCxnSpPr>
-        <p:spPr>
-          <a:xfrm>
-            <a:off x="152400" y="922910"/>
-            <a:ext cx="8001000" cy="0"/>
-          </a:xfrm>
-          <a:prstGeom prst="line">
-            <a:avLst/>
-          </a:prstGeom>
-          <a:ln>
-            <a:solidFill>
-              <a:schemeClr val="tx1"/>
-            </a:solidFill>
-          </a:ln>
-          <a:effectLst/>
-        </p:spPr>
-        <p:style>
-          <a:lnRef idx="2">
-            <a:schemeClr val="accent1"/>
-          </a:lnRef>
-          <a:fillRef idx="0">
-            <a:schemeClr val="accent1"/>
-          </a:fillRef>
-          <a:effectRef idx="1">
-            <a:schemeClr val="accent1"/>
-          </a:effectRef>
-          <a:fontRef idx="minor">
-            <a:schemeClr val="tx1"/>
-          </a:fontRef>
-        </p:style>
-      </p:cxnSp>
-      <p:sp>
-        <p:nvSpPr>
-          <p:cNvPr id="7" name="Title 1">
-            <a:extLst>
-              <a:ext uri="{FF2B5EF4-FFF2-40B4-BE49-F238E27FC236}">
-                <a16:creationId xmlns:a16="http://schemas.microsoft.com/office/drawing/2014/main" id="{81ABCB3B-7396-4070-8FA3-31111AB30A9C}"/>
-              </a:ext>
-            </a:extLst>
-          </p:cNvPr>
-          <p:cNvSpPr txBox="1">
-            <a:spLocks/>
-          </p:cNvSpPr>
-          <p:nvPr/>
-        </p:nvSpPr>
-        <p:spPr>
-          <a:xfrm>
-            <a:off x="118533" y="43082"/>
-            <a:ext cx="8077200" cy="857250"/>
-          </a:xfrm>
-          <a:prstGeom prst="rect">
-            <a:avLst/>
-          </a:prstGeom>
-        </p:spPr>
-        <p:txBody>
-          <a:bodyPr vert="horz" lIns="91440" tIns="45720" rIns="91440" bIns="45720" rtlCol="0" anchor="ctr">
-            <a:normAutofit/>
-          </a:bodyPr>
-          <a:lstStyle>
-            <a:lvl1pPr algn="ctr" defTabSz="411480" rtl="0" eaLnBrk="1" latinLnBrk="0" hangingPunct="1">
-              <a:spcBef>
-                <a:spcPct val="0"/>
-              </a:spcBef>
-              <a:buNone/>
-              <a:defRPr sz="3960" kern="1200">
-                <a:solidFill>
-                  <a:schemeClr val="tx1"/>
-                </a:solidFill>
-                <a:latin typeface="+mj-lt"/>
-                <a:ea typeface="+mj-ea"/>
-                <a:cs typeface="+mj-cs"/>
-              </a:defRPr>
-            </a:lvl1pPr>
-          </a:lstStyle>
-          <a:p>
-            <a:pPr algn="l"/>
-            <a:r>
-              <a:rPr lang="en-US" sz="2600" dirty="0">
-                <a:solidFill>
-                  <a:srgbClr val="7030A0"/>
-                </a:solidFill>
-              </a:rPr>
-              <a:t>Workflow</a:t>
-            </a:r>
-          </a:p>
-        </p:txBody>
-      </p:sp>
-      <p:sp>
-        <p:nvSpPr>
-          <p:cNvPr id="2" name="Rectangle 1027">
-            <a:extLst>
-              <a:ext uri="{FF2B5EF4-FFF2-40B4-BE49-F238E27FC236}">
-                <a16:creationId xmlns:a16="http://schemas.microsoft.com/office/drawing/2014/main" id="{6AD63676-E604-4050-BF0E-A7B8DD754C47}"/>
-              </a:ext>
-            </a:extLst>
-          </p:cNvPr>
-          <p:cNvSpPr txBox="1">
-            <a:spLocks noChangeArrowheads="1"/>
-          </p:cNvSpPr>
-          <p:nvPr/>
-        </p:nvSpPr>
-        <p:spPr>
-          <a:xfrm>
-            <a:off x="247135" y="922910"/>
-            <a:ext cx="7679724" cy="3886200"/>
-          </a:xfrm>
-          <a:prstGeom prst="rect">
-            <a:avLst/>
-          </a:prstGeom>
-        </p:spPr>
-        <p:txBody>
-          <a:bodyPr vert="horz" lIns="91440" tIns="45720" rIns="91440" bIns="45720" rtlCol="0">
-            <a:normAutofit/>
-          </a:bodyPr>
-          <a:lstStyle>
-            <a:lvl1pPr marL="308610" indent="-308610" algn="l" defTabSz="411480" rtl="0" eaLnBrk="1" latinLnBrk="0" hangingPunct="1">
-              <a:spcBef>
-                <a:spcPct val="20000"/>
-              </a:spcBef>
-              <a:buFont typeface="Arial"/>
-              <a:buChar char="•"/>
-              <a:defRPr sz="2880" kern="1200">
-                <a:solidFill>
-                  <a:schemeClr val="tx1"/>
-                </a:solidFill>
-                <a:latin typeface="+mn-lt"/>
-                <a:ea typeface="+mn-ea"/>
-                <a:cs typeface="+mn-cs"/>
-              </a:defRPr>
-            </a:lvl1pPr>
-            <a:lvl2pPr marL="668655" indent="-257175" algn="l" defTabSz="411480" rtl="0" eaLnBrk="1" latinLnBrk="0" hangingPunct="1">
-              <a:spcBef>
-                <a:spcPct val="20000"/>
-              </a:spcBef>
-              <a:buFont typeface="Arial"/>
-              <a:buChar char="–"/>
-              <a:defRPr sz="2520" kern="1200">
-                <a:solidFill>
-                  <a:schemeClr val="tx1"/>
-                </a:solidFill>
-                <a:latin typeface="+mn-lt"/>
-                <a:ea typeface="+mn-ea"/>
-                <a:cs typeface="+mn-cs"/>
-              </a:defRPr>
-            </a:lvl2pPr>
-            <a:lvl3pPr marL="1028700" indent="-205740" algn="l" defTabSz="411480" rtl="0" eaLnBrk="1" latinLnBrk="0" hangingPunct="1">
-              <a:spcBef>
-                <a:spcPct val="20000"/>
-              </a:spcBef>
-              <a:buFont typeface="Arial"/>
-              <a:buChar char="•"/>
-              <a:defRPr sz="2160" kern="1200">
-                <a:solidFill>
-                  <a:schemeClr val="tx1"/>
-                </a:solidFill>
-                <a:latin typeface="+mn-lt"/>
-                <a:ea typeface="+mn-ea"/>
-                <a:cs typeface="+mn-cs"/>
-              </a:defRPr>
-            </a:lvl3pPr>
-            <a:lvl4pPr marL="1440180" indent="-205740" algn="l" defTabSz="411480" rtl="0" eaLnBrk="1" latinLnBrk="0" hangingPunct="1">
-              <a:spcBef>
-                <a:spcPct val="20000"/>
-              </a:spcBef>
-              <a:buFont typeface="Arial"/>
-              <a:buChar char="–"/>
-              <a:defRPr sz="1800" kern="1200">
-                <a:solidFill>
-                  <a:schemeClr val="tx1"/>
-                </a:solidFill>
-                <a:latin typeface="+mn-lt"/>
-                <a:ea typeface="+mn-ea"/>
-                <a:cs typeface="+mn-cs"/>
-              </a:defRPr>
-            </a:lvl4pPr>
-            <a:lvl5pPr marL="1851660" indent="-205740" algn="l" defTabSz="411480" rtl="0" eaLnBrk="1" latinLnBrk="0" hangingPunct="1">
-              <a:spcBef>
-                <a:spcPct val="20000"/>
-              </a:spcBef>
-              <a:buFont typeface="Arial"/>
-              <a:buChar char="»"/>
-              <a:defRPr sz="1800" kern="1200">
-                <a:solidFill>
-                  <a:schemeClr val="tx1"/>
-                </a:solidFill>
-                <a:latin typeface="+mn-lt"/>
-                <a:ea typeface="+mn-ea"/>
-                <a:cs typeface="+mn-cs"/>
-              </a:defRPr>
-            </a:lvl5pPr>
-            <a:lvl6pPr marL="2263140" indent="-205740" algn="l" defTabSz="411480" rtl="0" eaLnBrk="1" latinLnBrk="0" hangingPunct="1">
-              <a:spcBef>
-                <a:spcPct val="20000"/>
-              </a:spcBef>
-              <a:buFont typeface="Arial"/>
-              <a:buChar char="•"/>
-              <a:defRPr sz="1800" kern="1200">
-                <a:solidFill>
-                  <a:schemeClr val="tx1"/>
-                </a:solidFill>
-                <a:latin typeface="+mn-lt"/>
-                <a:ea typeface="+mn-ea"/>
-                <a:cs typeface="+mn-cs"/>
-              </a:defRPr>
-            </a:lvl6pPr>
-            <a:lvl7pPr marL="2674620" indent="-205740" algn="l" defTabSz="411480" rtl="0" eaLnBrk="1" latinLnBrk="0" hangingPunct="1">
-              <a:spcBef>
-                <a:spcPct val="20000"/>
-              </a:spcBef>
-              <a:buFont typeface="Arial"/>
-              <a:buChar char="•"/>
-              <a:defRPr sz="1800" kern="1200">
-                <a:solidFill>
-                  <a:schemeClr val="tx1"/>
-                </a:solidFill>
-                <a:latin typeface="+mn-lt"/>
-                <a:ea typeface="+mn-ea"/>
-                <a:cs typeface="+mn-cs"/>
-              </a:defRPr>
-            </a:lvl7pPr>
-            <a:lvl8pPr marL="3086100" indent="-205740" algn="l" defTabSz="411480" rtl="0" eaLnBrk="1" latinLnBrk="0" hangingPunct="1">
-              <a:spcBef>
-                <a:spcPct val="20000"/>
-              </a:spcBef>
-              <a:buFont typeface="Arial"/>
-              <a:buChar char="•"/>
-              <a:defRPr sz="1800" kern="1200">
-                <a:solidFill>
-                  <a:schemeClr val="tx1"/>
-                </a:solidFill>
-                <a:latin typeface="+mn-lt"/>
-                <a:ea typeface="+mn-ea"/>
-                <a:cs typeface="+mn-cs"/>
-              </a:defRPr>
-            </a:lvl8pPr>
-            <a:lvl9pPr marL="3497580" indent="-205740" algn="l" defTabSz="411480" rtl="0" eaLnBrk="1" latinLnBrk="0" hangingPunct="1">
-              <a:spcBef>
-                <a:spcPct val="20000"/>
-              </a:spcBef>
-              <a:buFont typeface="Arial"/>
-              <a:buChar char="•"/>
-              <a:defRPr sz="1800" kern="1200">
-                <a:solidFill>
-                  <a:schemeClr val="tx1"/>
-                </a:solidFill>
-                <a:latin typeface="+mn-lt"/>
-                <a:ea typeface="+mn-ea"/>
-                <a:cs typeface="+mn-cs"/>
-              </a:defRPr>
-            </a:lvl9pPr>
-          </a:lstStyle>
-          <a:p>
-            <a:pPr>
-              <a:buFont typeface="Courier New" panose="02070309020205020404" pitchFamily="49" charset="0"/>
-              <a:buChar char="o"/>
-            </a:pPr>
-            <a:r>
-              <a:rPr lang="en-US" altLang="en-US" dirty="0"/>
-              <a:t>Add to a Web Map</a:t>
-            </a:r>
-          </a:p>
-          <a:p>
-            <a:pPr marL="411480" lvl="1" indent="0">
-              <a:buNone/>
-            </a:pPr>
-            <a:endParaRPr lang="en-US" altLang="en-US" dirty="0"/>
-          </a:p>
-        </p:txBody>
-      </p:sp>
-      <p:sp>
-        <p:nvSpPr>
-          <p:cNvPr id="3" name="TextBox 2">
-            <a:extLst>
-              <a:ext uri="{FF2B5EF4-FFF2-40B4-BE49-F238E27FC236}">
-                <a16:creationId xmlns:a16="http://schemas.microsoft.com/office/drawing/2014/main" id="{77AC95F2-D596-4A45-A200-10A8AE08F398}"/>
-              </a:ext>
-            </a:extLst>
-          </p:cNvPr>
-          <p:cNvSpPr txBox="1"/>
-          <p:nvPr/>
-        </p:nvSpPr>
-        <p:spPr>
-          <a:xfrm>
-            <a:off x="247135" y="4697393"/>
-            <a:ext cx="701771" cy="246221"/>
-          </a:xfrm>
-          <a:prstGeom prst="rect">
-            <a:avLst/>
-          </a:prstGeom>
-          <a:noFill/>
-        </p:spPr>
-        <p:txBody>
-          <a:bodyPr wrap="square">
-            <a:spAutoFit/>
-          </a:bodyPr>
-          <a:lstStyle/>
-          <a:p>
-            <a:r>
-              <a:rPr lang="en-US" sz="1000" dirty="0">
-                <a:solidFill>
-                  <a:srgbClr val="7030A0"/>
-                </a:solidFill>
-              </a:rPr>
-              <a:t>ESRI</a:t>
-            </a:r>
-          </a:p>
-        </p:txBody>
-      </p:sp>
-      <p:pic>
-        <p:nvPicPr>
-          <p:cNvPr id="5" name="Picture 4" descr="Image showing where is the web map">
-            <a:extLst>
-              <a:ext uri="{FF2B5EF4-FFF2-40B4-BE49-F238E27FC236}">
-                <a16:creationId xmlns:a16="http://schemas.microsoft.com/office/drawing/2014/main" id="{5271F6C2-8494-4545-91A8-F48BC69E2EA9}"/>
-              </a:ext>
-            </a:extLst>
-          </p:cNvPr>
-          <p:cNvPicPr>
-            <a:picLocks noChangeAspect="1"/>
-          </p:cNvPicPr>
-          <p:nvPr/>
-        </p:nvPicPr>
-        <p:blipFill>
-          <a:blip r:embed="rId3"/>
-          <a:stretch>
-            <a:fillRect/>
-          </a:stretch>
-        </p:blipFill>
-        <p:spPr>
-          <a:xfrm>
-            <a:off x="441113" y="1600252"/>
-            <a:ext cx="7423574" cy="843839"/>
-          </a:xfrm>
-          <a:prstGeom prst="rect">
-            <a:avLst/>
-          </a:prstGeom>
-        </p:spPr>
-      </p:pic>
-      <p:pic>
-        <p:nvPicPr>
-          <p:cNvPr id="9" name="Picture 8" descr="Image showing where is the offline mode">
-            <a:extLst>
-              <a:ext uri="{FF2B5EF4-FFF2-40B4-BE49-F238E27FC236}">
-                <a16:creationId xmlns:a16="http://schemas.microsoft.com/office/drawing/2014/main" id="{315BE287-47B8-4F50-8C59-B88C8E719D4C}"/>
-              </a:ext>
-            </a:extLst>
-          </p:cNvPr>
-          <p:cNvPicPr>
-            <a:picLocks noChangeAspect="1"/>
-          </p:cNvPicPr>
-          <p:nvPr/>
-        </p:nvPicPr>
-        <p:blipFill>
-          <a:blip r:embed="rId4"/>
-          <a:stretch>
-            <a:fillRect/>
-          </a:stretch>
-        </p:blipFill>
-        <p:spPr>
-          <a:xfrm>
-            <a:off x="1597431" y="2571750"/>
-            <a:ext cx="5456616" cy="2507094"/>
-          </a:xfrm>
-          <a:prstGeom prst="rect">
-            <a:avLst/>
-          </a:prstGeom>
-        </p:spPr>
-      </p:pic>
-      <p:sp>
-        <p:nvSpPr>
-          <p:cNvPr id="8" name="Slide Number Placeholder 7">
-            <a:extLst>
-              <a:ext uri="{FF2B5EF4-FFF2-40B4-BE49-F238E27FC236}">
-                <a16:creationId xmlns:a16="http://schemas.microsoft.com/office/drawing/2014/main" id="{39BF43D4-C1EC-439E-81BB-EFA87BA21630}"/>
-              </a:ext>
-            </a:extLst>
-          </p:cNvPr>
-          <p:cNvSpPr>
-            <a:spLocks noGrp="1"/>
-          </p:cNvSpPr>
-          <p:nvPr>
-            <p:ph type="sldNum" sz="quarter" idx="12"/>
-          </p:nvPr>
-        </p:nvSpPr>
-        <p:spPr/>
-        <p:txBody>
-          <a:bodyPr/>
-          <a:lstStyle/>
-          <a:p>
-            <a:fld id="{127DDC20-79C9-9647-820E-6D40A3D210C3}" type="slidenum">
-              <a:rPr lang="en-US" smtClean="0"/>
-              <a:pPr/>
-              <a:t>12</a:t>
-            </a:fld>
-            <a:endParaRPr lang="en-US"/>
-          </a:p>
-        </p:txBody>
-      </p:sp>
-    </p:spTree>
-    <p:extLst>
-      <p:ext uri="{BB962C8B-B14F-4D97-AF65-F5344CB8AC3E}">
-        <p14:creationId xmlns:p14="http://schemas.microsoft.com/office/powerpoint/2010/main" val="281227651"/>
-      </p:ext>
-    </p:extLst>
-  </p:cSld>
-  <p:clrMapOvr>
-    <a:masterClrMapping/>
-  </p:clrMapOvr>
-</p:sld>
-</file>
-
-<file path=ppt/slides/slide13.xml><?xml version="1.0" encoding="utf-8"?>
-<p:sld xmlns:a="http://schemas.openxmlformats.org/drawingml/2006/main" xmlns:r="http://schemas.openxmlformats.org/officeDocument/2006/relationships" xmlns:p="http://schemas.openxmlformats.org/presentationml/2006/main">
-  <p:cSld>
-    <p:spTree>
-      <p:nvGrpSpPr>
-        <p:cNvPr id="1" name=""/>
-        <p:cNvGrpSpPr/>
-        <p:nvPr/>
-      </p:nvGrpSpPr>
-      <p:grpSpPr>
-        <a:xfrm>
-          <a:off x="0" y="0"/>
-          <a:ext cx="0" cy="0"/>
-          <a:chOff x="0" y="0"/>
-          <a:chExt cx="0" cy="0"/>
-        </a:xfrm>
-      </p:grpSpPr>
-      <p:cxnSp>
-        <p:nvCxnSpPr>
-          <p:cNvPr id="6" name="Straight Connector 5">
-            <a:extLst>
-              <a:ext uri="{FF2B5EF4-FFF2-40B4-BE49-F238E27FC236}">
-                <a16:creationId xmlns:a16="http://schemas.microsoft.com/office/drawing/2014/main" id="{72C807DF-E68B-4FDB-AF8B-FD65014E3363}"/>
-              </a:ext>
-            </a:extLst>
-          </p:cNvPr>
-          <p:cNvCxnSpPr/>
-          <p:nvPr/>
-        </p:nvCxnSpPr>
-        <p:spPr>
-          <a:xfrm>
-            <a:off x="152400" y="922910"/>
-            <a:ext cx="8001000" cy="0"/>
-          </a:xfrm>
-          <a:prstGeom prst="line">
-            <a:avLst/>
-          </a:prstGeom>
-          <a:ln>
-            <a:solidFill>
-              <a:schemeClr val="tx1"/>
-            </a:solidFill>
-          </a:ln>
-          <a:effectLst/>
-        </p:spPr>
-        <p:style>
-          <a:lnRef idx="2">
-            <a:schemeClr val="accent1"/>
-          </a:lnRef>
-          <a:fillRef idx="0">
-            <a:schemeClr val="accent1"/>
-          </a:fillRef>
-          <a:effectRef idx="1">
-            <a:schemeClr val="accent1"/>
-          </a:effectRef>
-          <a:fontRef idx="minor">
-            <a:schemeClr val="tx1"/>
-          </a:fontRef>
-        </p:style>
-      </p:cxnSp>
-      <p:sp>
-        <p:nvSpPr>
-          <p:cNvPr id="7" name="Title 1">
-            <a:extLst>
-              <a:ext uri="{FF2B5EF4-FFF2-40B4-BE49-F238E27FC236}">
-                <a16:creationId xmlns:a16="http://schemas.microsoft.com/office/drawing/2014/main" id="{81ABCB3B-7396-4070-8FA3-31111AB30A9C}"/>
-              </a:ext>
-            </a:extLst>
-          </p:cNvPr>
-          <p:cNvSpPr txBox="1">
-            <a:spLocks/>
-          </p:cNvSpPr>
-          <p:nvPr/>
-        </p:nvSpPr>
-        <p:spPr>
-          <a:xfrm>
-            <a:off x="118533" y="43082"/>
-            <a:ext cx="8077200" cy="857250"/>
-          </a:xfrm>
-          <a:prstGeom prst="rect">
-            <a:avLst/>
-          </a:prstGeom>
-        </p:spPr>
-        <p:txBody>
-          <a:bodyPr vert="horz" lIns="91440" tIns="45720" rIns="91440" bIns="45720" rtlCol="0" anchor="ctr">
-            <a:normAutofit/>
-          </a:bodyPr>
-          <a:lstStyle>
-            <a:lvl1pPr algn="ctr" defTabSz="411480" rtl="0" eaLnBrk="1" latinLnBrk="0" hangingPunct="1">
-              <a:spcBef>
-                <a:spcPct val="0"/>
-              </a:spcBef>
-              <a:buNone/>
-              <a:defRPr sz="3960" kern="1200">
-                <a:solidFill>
-                  <a:schemeClr val="tx1"/>
-                </a:solidFill>
-                <a:latin typeface="+mj-lt"/>
-                <a:ea typeface="+mj-ea"/>
-                <a:cs typeface="+mj-cs"/>
-              </a:defRPr>
-            </a:lvl1pPr>
-          </a:lstStyle>
-          <a:p>
-            <a:pPr algn="l"/>
-            <a:r>
-              <a:rPr lang="en-US" sz="2600" dirty="0">
-                <a:solidFill>
-                  <a:srgbClr val="7030A0"/>
-                </a:solidFill>
-              </a:rPr>
-              <a:t>Workflow</a:t>
-            </a:r>
-          </a:p>
-        </p:txBody>
-      </p:sp>
-      <p:sp>
-        <p:nvSpPr>
-          <p:cNvPr id="2" name="Rectangle 1027">
-            <a:extLst>
-              <a:ext uri="{FF2B5EF4-FFF2-40B4-BE49-F238E27FC236}">
-                <a16:creationId xmlns:a16="http://schemas.microsoft.com/office/drawing/2014/main" id="{6AD63676-E604-4050-BF0E-A7B8DD754C47}"/>
-              </a:ext>
-            </a:extLst>
-          </p:cNvPr>
-          <p:cNvSpPr txBox="1">
-            <a:spLocks noChangeArrowheads="1"/>
-          </p:cNvSpPr>
-          <p:nvPr/>
-        </p:nvSpPr>
-        <p:spPr>
-          <a:xfrm>
-            <a:off x="247135" y="922910"/>
-            <a:ext cx="7679724" cy="3886200"/>
-          </a:xfrm>
-          <a:prstGeom prst="rect">
-            <a:avLst/>
-          </a:prstGeom>
-        </p:spPr>
-        <p:txBody>
-          <a:bodyPr vert="horz" lIns="91440" tIns="45720" rIns="91440" bIns="45720" rtlCol="0">
-            <a:normAutofit/>
-          </a:bodyPr>
-          <a:lstStyle>
-            <a:lvl1pPr marL="308610" indent="-308610" algn="l" defTabSz="411480" rtl="0" eaLnBrk="1" latinLnBrk="0" hangingPunct="1">
-              <a:spcBef>
-                <a:spcPct val="20000"/>
-              </a:spcBef>
-              <a:buFont typeface="Arial"/>
-              <a:buChar char="•"/>
-              <a:defRPr sz="2880" kern="1200">
-                <a:solidFill>
-                  <a:schemeClr val="tx1"/>
-                </a:solidFill>
-                <a:latin typeface="+mn-lt"/>
-                <a:ea typeface="+mn-ea"/>
-                <a:cs typeface="+mn-cs"/>
-              </a:defRPr>
-            </a:lvl1pPr>
-            <a:lvl2pPr marL="668655" indent="-257175" algn="l" defTabSz="411480" rtl="0" eaLnBrk="1" latinLnBrk="0" hangingPunct="1">
-              <a:spcBef>
-                <a:spcPct val="20000"/>
-              </a:spcBef>
-              <a:buFont typeface="Arial"/>
-              <a:buChar char="–"/>
-              <a:defRPr sz="2520" kern="1200">
-                <a:solidFill>
-                  <a:schemeClr val="tx1"/>
-                </a:solidFill>
-                <a:latin typeface="+mn-lt"/>
-                <a:ea typeface="+mn-ea"/>
-                <a:cs typeface="+mn-cs"/>
-              </a:defRPr>
-            </a:lvl2pPr>
-            <a:lvl3pPr marL="1028700" indent="-205740" algn="l" defTabSz="411480" rtl="0" eaLnBrk="1" latinLnBrk="0" hangingPunct="1">
-              <a:spcBef>
-                <a:spcPct val="20000"/>
-              </a:spcBef>
-              <a:buFont typeface="Arial"/>
-              <a:buChar char="•"/>
-              <a:defRPr sz="2160" kern="1200">
-                <a:solidFill>
-                  <a:schemeClr val="tx1"/>
-                </a:solidFill>
-                <a:latin typeface="+mn-lt"/>
-                <a:ea typeface="+mn-ea"/>
-                <a:cs typeface="+mn-cs"/>
-              </a:defRPr>
-            </a:lvl3pPr>
-            <a:lvl4pPr marL="1440180" indent="-205740" algn="l" defTabSz="411480" rtl="0" eaLnBrk="1" latinLnBrk="0" hangingPunct="1">
-              <a:spcBef>
-                <a:spcPct val="20000"/>
-              </a:spcBef>
-              <a:buFont typeface="Arial"/>
-              <a:buChar char="–"/>
-              <a:defRPr sz="1800" kern="1200">
-                <a:solidFill>
-                  <a:schemeClr val="tx1"/>
-                </a:solidFill>
-                <a:latin typeface="+mn-lt"/>
-                <a:ea typeface="+mn-ea"/>
-                <a:cs typeface="+mn-cs"/>
-              </a:defRPr>
-            </a:lvl4pPr>
-            <a:lvl5pPr marL="1851660" indent="-205740" algn="l" defTabSz="411480" rtl="0" eaLnBrk="1" latinLnBrk="0" hangingPunct="1">
-              <a:spcBef>
-                <a:spcPct val="20000"/>
-              </a:spcBef>
-              <a:buFont typeface="Arial"/>
-              <a:buChar char="»"/>
-              <a:defRPr sz="1800" kern="1200">
-                <a:solidFill>
-                  <a:schemeClr val="tx1"/>
-                </a:solidFill>
-                <a:latin typeface="+mn-lt"/>
-                <a:ea typeface="+mn-ea"/>
-                <a:cs typeface="+mn-cs"/>
-              </a:defRPr>
-            </a:lvl5pPr>
-            <a:lvl6pPr marL="2263140" indent="-205740" algn="l" defTabSz="411480" rtl="0" eaLnBrk="1" latinLnBrk="0" hangingPunct="1">
-              <a:spcBef>
-                <a:spcPct val="20000"/>
-              </a:spcBef>
-              <a:buFont typeface="Arial"/>
-              <a:buChar char="•"/>
-              <a:defRPr sz="1800" kern="1200">
-                <a:solidFill>
-                  <a:schemeClr val="tx1"/>
-                </a:solidFill>
-                <a:latin typeface="+mn-lt"/>
-                <a:ea typeface="+mn-ea"/>
-                <a:cs typeface="+mn-cs"/>
-              </a:defRPr>
-            </a:lvl6pPr>
-            <a:lvl7pPr marL="2674620" indent="-205740" algn="l" defTabSz="411480" rtl="0" eaLnBrk="1" latinLnBrk="0" hangingPunct="1">
-              <a:spcBef>
-                <a:spcPct val="20000"/>
-              </a:spcBef>
-              <a:buFont typeface="Arial"/>
-              <a:buChar char="•"/>
-              <a:defRPr sz="1800" kern="1200">
-                <a:solidFill>
-                  <a:schemeClr val="tx1"/>
-                </a:solidFill>
-                <a:latin typeface="+mn-lt"/>
-                <a:ea typeface="+mn-ea"/>
-                <a:cs typeface="+mn-cs"/>
-              </a:defRPr>
-            </a:lvl7pPr>
-            <a:lvl8pPr marL="3086100" indent="-205740" algn="l" defTabSz="411480" rtl="0" eaLnBrk="1" latinLnBrk="0" hangingPunct="1">
-              <a:spcBef>
-                <a:spcPct val="20000"/>
-              </a:spcBef>
-              <a:buFont typeface="Arial"/>
-              <a:buChar char="•"/>
-              <a:defRPr sz="1800" kern="1200">
-                <a:solidFill>
-                  <a:schemeClr val="tx1"/>
-                </a:solidFill>
-                <a:latin typeface="+mn-lt"/>
-                <a:ea typeface="+mn-ea"/>
-                <a:cs typeface="+mn-cs"/>
-              </a:defRPr>
-            </a:lvl8pPr>
-            <a:lvl9pPr marL="3497580" indent="-205740" algn="l" defTabSz="411480" rtl="0" eaLnBrk="1" latinLnBrk="0" hangingPunct="1">
-              <a:spcBef>
-                <a:spcPct val="20000"/>
-              </a:spcBef>
-              <a:buFont typeface="Arial"/>
-              <a:buChar char="•"/>
-              <a:defRPr sz="1800" kern="1200">
-                <a:solidFill>
-                  <a:schemeClr val="tx1"/>
-                </a:solidFill>
-                <a:latin typeface="+mn-lt"/>
-                <a:ea typeface="+mn-ea"/>
-                <a:cs typeface="+mn-cs"/>
-              </a:defRPr>
-            </a:lvl9pPr>
-          </a:lstStyle>
-          <a:p>
-            <a:pPr>
-              <a:buFont typeface="Courier New" panose="02070309020205020404" pitchFamily="49" charset="0"/>
-              <a:buChar char="o"/>
-            </a:pPr>
-            <a:r>
-              <a:rPr lang="en-US" altLang="en-US" dirty="0"/>
-              <a:t>Use the map in the Collector</a:t>
-            </a:r>
-          </a:p>
-          <a:p>
-            <a:pPr marL="411480" lvl="1" indent="0">
-              <a:buNone/>
-            </a:pPr>
-            <a:endParaRPr lang="en-US" altLang="en-US" dirty="0"/>
-          </a:p>
-        </p:txBody>
-      </p:sp>
-      <p:sp>
-        <p:nvSpPr>
-          <p:cNvPr id="3" name="TextBox 2">
-            <a:extLst>
-              <a:ext uri="{FF2B5EF4-FFF2-40B4-BE49-F238E27FC236}">
-                <a16:creationId xmlns:a16="http://schemas.microsoft.com/office/drawing/2014/main" id="{77AC95F2-D596-4A45-A200-10A8AE08F398}"/>
-              </a:ext>
-            </a:extLst>
-          </p:cNvPr>
-          <p:cNvSpPr txBox="1"/>
-          <p:nvPr/>
-        </p:nvSpPr>
-        <p:spPr>
-          <a:xfrm>
-            <a:off x="247135" y="4697393"/>
-            <a:ext cx="701771" cy="246221"/>
-          </a:xfrm>
-          <a:prstGeom prst="rect">
-            <a:avLst/>
-          </a:prstGeom>
-          <a:noFill/>
-        </p:spPr>
-        <p:txBody>
-          <a:bodyPr wrap="square">
-            <a:spAutoFit/>
-          </a:bodyPr>
-          <a:lstStyle/>
-          <a:p>
-            <a:r>
-              <a:rPr lang="en-US" sz="1000" dirty="0">
-                <a:solidFill>
-                  <a:srgbClr val="7030A0"/>
-                </a:solidFill>
-              </a:rPr>
-              <a:t>ESRI</a:t>
-            </a:r>
-          </a:p>
-        </p:txBody>
-      </p:sp>
-      <p:pic>
-        <p:nvPicPr>
-          <p:cNvPr id="8" name="Picture 7" descr="Diagram, map&#10;&#10;Description automatically generated">
-            <a:extLst>
-              <a:ext uri="{FF2B5EF4-FFF2-40B4-BE49-F238E27FC236}">
-                <a16:creationId xmlns:a16="http://schemas.microsoft.com/office/drawing/2014/main" id="{4FA7D6C9-DA8F-4413-8AEC-74BD7A0F72BA}"/>
-              </a:ext>
-            </a:extLst>
-          </p:cNvPr>
-          <p:cNvPicPr/>
-          <p:nvPr/>
-        </p:nvPicPr>
-        <p:blipFill>
-          <a:blip r:embed="rId3" cstate="print">
-            <a:extLst>
-              <a:ext uri="{28A0092B-C50C-407E-A947-70E740481C1C}">
-                <a14:useLocalDpi xmlns:a14="http://schemas.microsoft.com/office/drawing/2010/main" val="0"/>
-              </a:ext>
-            </a:extLst>
-          </a:blip>
-          <a:stretch>
-            <a:fillRect/>
-          </a:stretch>
-        </p:blipFill>
-        <p:spPr>
-          <a:xfrm>
-            <a:off x="1800488" y="1514525"/>
-            <a:ext cx="1777365" cy="3162300"/>
-          </a:xfrm>
-          <a:prstGeom prst="rect">
-            <a:avLst/>
-          </a:prstGeom>
-        </p:spPr>
-      </p:pic>
-      <p:pic>
-        <p:nvPicPr>
-          <p:cNvPr id="10" name="Picture 9" descr="Graphical user interface, application&#10;&#10;Description automatically generated">
-            <a:extLst>
-              <a:ext uri="{FF2B5EF4-FFF2-40B4-BE49-F238E27FC236}">
-                <a16:creationId xmlns:a16="http://schemas.microsoft.com/office/drawing/2014/main" id="{F881A594-AB65-459A-94B9-E68533321B8E}"/>
-              </a:ext>
-            </a:extLst>
-          </p:cNvPr>
-          <p:cNvPicPr/>
-          <p:nvPr/>
-        </p:nvPicPr>
-        <p:blipFill>
-          <a:blip r:embed="rId4" cstate="print">
-            <a:extLst>
-              <a:ext uri="{28A0092B-C50C-407E-A947-70E740481C1C}">
-                <a14:useLocalDpi xmlns:a14="http://schemas.microsoft.com/office/drawing/2010/main" val="0"/>
-              </a:ext>
-            </a:extLst>
-          </a:blip>
-          <a:stretch>
-            <a:fillRect/>
-          </a:stretch>
-        </p:blipFill>
-        <p:spPr>
-          <a:xfrm>
-            <a:off x="4497053" y="1475253"/>
-            <a:ext cx="1932059" cy="3222140"/>
-          </a:xfrm>
-          <a:prstGeom prst="rect">
-            <a:avLst/>
-          </a:prstGeom>
-        </p:spPr>
-      </p:pic>
-      <p:sp>
-        <p:nvSpPr>
-          <p:cNvPr id="9" name="Slide Number Placeholder 8">
-            <a:extLst>
-              <a:ext uri="{FF2B5EF4-FFF2-40B4-BE49-F238E27FC236}">
-                <a16:creationId xmlns:a16="http://schemas.microsoft.com/office/drawing/2014/main" id="{D1D2CD32-9F26-42E4-A42E-F480629C04D2}"/>
-              </a:ext>
-            </a:extLst>
-          </p:cNvPr>
-          <p:cNvSpPr>
-            <a:spLocks noGrp="1"/>
-          </p:cNvSpPr>
-          <p:nvPr>
-            <p:ph type="sldNum" sz="quarter" idx="12"/>
-          </p:nvPr>
-        </p:nvSpPr>
-        <p:spPr/>
-        <p:txBody>
-          <a:bodyPr/>
-          <a:lstStyle/>
-          <a:p>
-            <a:fld id="{127DDC20-79C9-9647-820E-6D40A3D210C3}" type="slidenum">
-              <a:rPr lang="en-US" smtClean="0"/>
-              <a:pPr/>
-              <a:t>13</a:t>
-            </a:fld>
-            <a:endParaRPr lang="en-US"/>
-          </a:p>
-        </p:txBody>
-      </p:sp>
-    </p:spTree>
-    <p:extLst>
-      <p:ext uri="{BB962C8B-B14F-4D97-AF65-F5344CB8AC3E}">
-        <p14:creationId xmlns:p14="http://schemas.microsoft.com/office/powerpoint/2010/main" val="2499755175"/>
-      </p:ext>
-    </p:extLst>
-  </p:cSld>
-  <p:clrMapOvr>
-    <a:masterClrMapping/>
-  </p:clrMapOvr>
-</p:sld>
-</file>
-
-<file path=ppt/slides/slide14.xml><?xml version="1.0" encoding="utf-8"?>
-<p:sld xmlns:a="http://schemas.openxmlformats.org/drawingml/2006/main" xmlns:r="http://schemas.openxmlformats.org/officeDocument/2006/relationships" xmlns:p="http://schemas.openxmlformats.org/presentationml/2006/main">
-  <p:cSld>
-    <p:spTree>
-      <p:nvGrpSpPr>
-        <p:cNvPr id="1" name=""/>
-        <p:cNvGrpSpPr/>
-        <p:nvPr/>
-      </p:nvGrpSpPr>
-      <p:grpSpPr>
-        <a:xfrm>
-          <a:off x="0" y="0"/>
-          <a:ext cx="0" cy="0"/>
-          <a:chOff x="0" y="0"/>
-          <a:chExt cx="0" cy="0"/>
-        </a:xfrm>
-      </p:grpSpPr>
-      <p:cxnSp>
-        <p:nvCxnSpPr>
-          <p:cNvPr id="6" name="Straight Connector 5">
-            <a:extLst>
-              <a:ext uri="{FF2B5EF4-FFF2-40B4-BE49-F238E27FC236}">
-                <a16:creationId xmlns:a16="http://schemas.microsoft.com/office/drawing/2014/main" id="{72C807DF-E68B-4FDB-AF8B-FD65014E3363}"/>
-              </a:ext>
-            </a:extLst>
-          </p:cNvPr>
-          <p:cNvCxnSpPr/>
-          <p:nvPr/>
-        </p:nvCxnSpPr>
-        <p:spPr>
-          <a:xfrm>
-            <a:off x="152400" y="922910"/>
-            <a:ext cx="8001000" cy="0"/>
-          </a:xfrm>
-          <a:prstGeom prst="line">
-            <a:avLst/>
-          </a:prstGeom>
-          <a:ln>
-            <a:solidFill>
-              <a:schemeClr val="tx1"/>
-            </a:solidFill>
-          </a:ln>
-          <a:effectLst/>
-        </p:spPr>
-        <p:style>
-          <a:lnRef idx="2">
-            <a:schemeClr val="accent1"/>
-          </a:lnRef>
-          <a:fillRef idx="0">
-            <a:schemeClr val="accent1"/>
-          </a:fillRef>
-          <a:effectRef idx="1">
-            <a:schemeClr val="accent1"/>
-          </a:effectRef>
-          <a:fontRef idx="minor">
-            <a:schemeClr val="tx1"/>
-          </a:fontRef>
-        </p:style>
-      </p:cxnSp>
-      <p:sp>
-        <p:nvSpPr>
-          <p:cNvPr id="7" name="Title 1">
-            <a:extLst>
-              <a:ext uri="{FF2B5EF4-FFF2-40B4-BE49-F238E27FC236}">
-                <a16:creationId xmlns:a16="http://schemas.microsoft.com/office/drawing/2014/main" id="{81ABCB3B-7396-4070-8FA3-31111AB30A9C}"/>
-              </a:ext>
-            </a:extLst>
-          </p:cNvPr>
-          <p:cNvSpPr txBox="1">
-            <a:spLocks/>
-          </p:cNvSpPr>
-          <p:nvPr/>
-        </p:nvSpPr>
-        <p:spPr>
-          <a:xfrm>
-            <a:off x="118533" y="43082"/>
-            <a:ext cx="8077200" cy="857250"/>
-          </a:xfrm>
-          <a:prstGeom prst="rect">
-            <a:avLst/>
-          </a:prstGeom>
-        </p:spPr>
-        <p:txBody>
-          <a:bodyPr vert="horz" lIns="91440" tIns="45720" rIns="91440" bIns="45720" rtlCol="0" anchor="ctr">
-            <a:normAutofit/>
-          </a:bodyPr>
-          <a:lstStyle>
-            <a:lvl1pPr algn="ctr" defTabSz="411480" rtl="0" eaLnBrk="1" latinLnBrk="0" hangingPunct="1">
-              <a:spcBef>
-                <a:spcPct val="0"/>
-              </a:spcBef>
-              <a:buNone/>
-              <a:defRPr sz="3960" kern="1200">
-                <a:solidFill>
-                  <a:schemeClr val="tx1"/>
-                </a:solidFill>
-                <a:latin typeface="+mj-lt"/>
-                <a:ea typeface="+mj-ea"/>
-                <a:cs typeface="+mj-cs"/>
-              </a:defRPr>
-            </a:lvl1pPr>
-          </a:lstStyle>
-          <a:p>
-            <a:pPr algn="l"/>
-            <a:endParaRPr lang="en-US" sz="2600" dirty="0">
-              <a:solidFill>
-                <a:srgbClr val="7030A0"/>
-              </a:solidFill>
-            </a:endParaRPr>
-          </a:p>
-        </p:txBody>
-      </p:sp>
-      <p:sp>
-        <p:nvSpPr>
-          <p:cNvPr id="5" name="Rectangle 1027">
-            <a:extLst>
-              <a:ext uri="{FF2B5EF4-FFF2-40B4-BE49-F238E27FC236}">
-                <a16:creationId xmlns:a16="http://schemas.microsoft.com/office/drawing/2014/main" id="{25AF5660-DB0A-4125-80CA-291BE1C4C96E}"/>
-              </a:ext>
-            </a:extLst>
-          </p:cNvPr>
-          <p:cNvSpPr txBox="1">
-            <a:spLocks noChangeArrowheads="1"/>
-          </p:cNvSpPr>
-          <p:nvPr/>
-        </p:nvSpPr>
-        <p:spPr>
-          <a:xfrm>
-            <a:off x="274937" y="969524"/>
-            <a:ext cx="7679724" cy="3886200"/>
-          </a:xfrm>
-          <a:prstGeom prst="rect">
-            <a:avLst/>
-          </a:prstGeom>
-        </p:spPr>
-        <p:txBody>
-          <a:bodyPr vert="horz" lIns="91440" tIns="45720" rIns="91440" bIns="45720" rtlCol="0">
-            <a:normAutofit/>
-          </a:bodyPr>
-          <a:lstStyle>
-            <a:lvl1pPr marL="308610" indent="-308610" algn="l" defTabSz="411480" rtl="0" eaLnBrk="1" latinLnBrk="0" hangingPunct="1">
-              <a:spcBef>
-                <a:spcPct val="20000"/>
-              </a:spcBef>
-              <a:buFont typeface="Arial"/>
-              <a:buChar char="•"/>
-              <a:defRPr sz="2880" kern="1200">
-                <a:solidFill>
-                  <a:schemeClr val="tx1"/>
-                </a:solidFill>
-                <a:latin typeface="+mn-lt"/>
-                <a:ea typeface="+mn-ea"/>
-                <a:cs typeface="+mn-cs"/>
-              </a:defRPr>
-            </a:lvl1pPr>
-            <a:lvl2pPr marL="668655" indent="-257175" algn="l" defTabSz="411480" rtl="0" eaLnBrk="1" latinLnBrk="0" hangingPunct="1">
-              <a:spcBef>
-                <a:spcPct val="20000"/>
-              </a:spcBef>
-              <a:buFont typeface="Arial"/>
-              <a:buChar char="–"/>
-              <a:defRPr sz="2520" kern="1200">
-                <a:solidFill>
-                  <a:schemeClr val="tx1"/>
-                </a:solidFill>
-                <a:latin typeface="+mn-lt"/>
-                <a:ea typeface="+mn-ea"/>
-                <a:cs typeface="+mn-cs"/>
-              </a:defRPr>
-            </a:lvl2pPr>
-            <a:lvl3pPr marL="1028700" indent="-205740" algn="l" defTabSz="411480" rtl="0" eaLnBrk="1" latinLnBrk="0" hangingPunct="1">
-              <a:spcBef>
-                <a:spcPct val="20000"/>
-              </a:spcBef>
-              <a:buFont typeface="Arial"/>
-              <a:buChar char="•"/>
-              <a:defRPr sz="2160" kern="1200">
-                <a:solidFill>
-                  <a:schemeClr val="tx1"/>
-                </a:solidFill>
-                <a:latin typeface="+mn-lt"/>
-                <a:ea typeface="+mn-ea"/>
-                <a:cs typeface="+mn-cs"/>
-              </a:defRPr>
-            </a:lvl3pPr>
-            <a:lvl4pPr marL="1440180" indent="-205740" algn="l" defTabSz="411480" rtl="0" eaLnBrk="1" latinLnBrk="0" hangingPunct="1">
-              <a:spcBef>
-                <a:spcPct val="20000"/>
-              </a:spcBef>
-              <a:buFont typeface="Arial"/>
-              <a:buChar char="–"/>
-              <a:defRPr sz="1800" kern="1200">
-                <a:solidFill>
-                  <a:schemeClr val="tx1"/>
-                </a:solidFill>
-                <a:latin typeface="+mn-lt"/>
-                <a:ea typeface="+mn-ea"/>
-                <a:cs typeface="+mn-cs"/>
-              </a:defRPr>
-            </a:lvl4pPr>
-            <a:lvl5pPr marL="1851660" indent="-205740" algn="l" defTabSz="411480" rtl="0" eaLnBrk="1" latinLnBrk="0" hangingPunct="1">
-              <a:spcBef>
-                <a:spcPct val="20000"/>
-              </a:spcBef>
-              <a:buFont typeface="Arial"/>
-              <a:buChar char="»"/>
-              <a:defRPr sz="1800" kern="1200">
-                <a:solidFill>
-                  <a:schemeClr val="tx1"/>
-                </a:solidFill>
-                <a:latin typeface="+mn-lt"/>
-                <a:ea typeface="+mn-ea"/>
-                <a:cs typeface="+mn-cs"/>
-              </a:defRPr>
-            </a:lvl5pPr>
-            <a:lvl6pPr marL="2263140" indent="-205740" algn="l" defTabSz="411480" rtl="0" eaLnBrk="1" latinLnBrk="0" hangingPunct="1">
-              <a:spcBef>
-                <a:spcPct val="20000"/>
-              </a:spcBef>
-              <a:buFont typeface="Arial"/>
-              <a:buChar char="•"/>
-              <a:defRPr sz="1800" kern="1200">
-                <a:solidFill>
-                  <a:schemeClr val="tx1"/>
-                </a:solidFill>
-                <a:latin typeface="+mn-lt"/>
-                <a:ea typeface="+mn-ea"/>
-                <a:cs typeface="+mn-cs"/>
-              </a:defRPr>
-            </a:lvl6pPr>
-            <a:lvl7pPr marL="2674620" indent="-205740" algn="l" defTabSz="411480" rtl="0" eaLnBrk="1" latinLnBrk="0" hangingPunct="1">
-              <a:spcBef>
-                <a:spcPct val="20000"/>
-              </a:spcBef>
-              <a:buFont typeface="Arial"/>
-              <a:buChar char="•"/>
-              <a:defRPr sz="1800" kern="1200">
-                <a:solidFill>
-                  <a:schemeClr val="tx1"/>
-                </a:solidFill>
-                <a:latin typeface="+mn-lt"/>
-                <a:ea typeface="+mn-ea"/>
-                <a:cs typeface="+mn-cs"/>
-              </a:defRPr>
-            </a:lvl7pPr>
-            <a:lvl8pPr marL="3086100" indent="-205740" algn="l" defTabSz="411480" rtl="0" eaLnBrk="1" latinLnBrk="0" hangingPunct="1">
-              <a:spcBef>
-                <a:spcPct val="20000"/>
-              </a:spcBef>
-              <a:buFont typeface="Arial"/>
-              <a:buChar char="•"/>
-              <a:defRPr sz="1800" kern="1200">
-                <a:solidFill>
-                  <a:schemeClr val="tx1"/>
-                </a:solidFill>
-                <a:latin typeface="+mn-lt"/>
-                <a:ea typeface="+mn-ea"/>
-                <a:cs typeface="+mn-cs"/>
-              </a:defRPr>
-            </a:lvl8pPr>
-            <a:lvl9pPr marL="3497580" indent="-205740" algn="l" defTabSz="411480" rtl="0" eaLnBrk="1" latinLnBrk="0" hangingPunct="1">
-              <a:spcBef>
-                <a:spcPct val="20000"/>
-              </a:spcBef>
-              <a:buFont typeface="Arial"/>
-              <a:buChar char="•"/>
-              <a:defRPr sz="1800" kern="1200">
-                <a:solidFill>
-                  <a:schemeClr val="tx1"/>
-                </a:solidFill>
-                <a:latin typeface="+mn-lt"/>
-                <a:ea typeface="+mn-ea"/>
-                <a:cs typeface="+mn-cs"/>
-              </a:defRPr>
-            </a:lvl9pPr>
-          </a:lstStyle>
-          <a:p>
-            <a:pPr>
-              <a:buFont typeface="Courier New" panose="02070309020205020404" pitchFamily="49" charset="0"/>
-              <a:buChar char="o"/>
-            </a:pPr>
-            <a:r>
-              <a:rPr lang="en-US" altLang="en-US" dirty="0"/>
-              <a:t>IOS: Collector (new generation) and Collector Classic</a:t>
-            </a:r>
-          </a:p>
-          <a:p>
-            <a:pPr>
-              <a:buFont typeface="Courier New" panose="02070309020205020404" pitchFamily="49" charset="0"/>
-              <a:buChar char="o"/>
-            </a:pPr>
-            <a:r>
-              <a:rPr lang="en-US" altLang="en-US" dirty="0"/>
-              <a:t>Android: Collector and Beta (new generation)</a:t>
-            </a:r>
-          </a:p>
-          <a:p>
-            <a:pPr lvl="1">
-              <a:buFont typeface="Wingdings" panose="05000000000000000000" pitchFamily="2" charset="2"/>
-              <a:buChar char="ü"/>
-            </a:pPr>
-            <a:endParaRPr lang="en-US" altLang="en-US" dirty="0"/>
-          </a:p>
-        </p:txBody>
-      </p:sp>
-      <p:sp>
-        <p:nvSpPr>
-          <p:cNvPr id="3" name="Slide Number Placeholder 2">
-            <a:extLst>
-              <a:ext uri="{FF2B5EF4-FFF2-40B4-BE49-F238E27FC236}">
-                <a16:creationId xmlns:a16="http://schemas.microsoft.com/office/drawing/2014/main" id="{F1069721-C244-47E2-A49B-A3F491D5CCA5}"/>
-              </a:ext>
-            </a:extLst>
-          </p:cNvPr>
-          <p:cNvSpPr>
-            <a:spLocks noGrp="1"/>
-          </p:cNvSpPr>
-          <p:nvPr>
-            <p:ph type="sldNum" sz="quarter" idx="12"/>
-          </p:nvPr>
-        </p:nvSpPr>
-        <p:spPr/>
-        <p:txBody>
-          <a:bodyPr/>
-          <a:lstStyle/>
-          <a:p>
-            <a:fld id="{127DDC20-79C9-9647-820E-6D40A3D210C3}" type="slidenum">
-              <a:rPr lang="en-US" smtClean="0"/>
-              <a:pPr/>
-              <a:t>14</a:t>
-            </a:fld>
-            <a:endParaRPr lang="en-US"/>
-          </a:p>
-        </p:txBody>
-      </p:sp>
-    </p:spTree>
-    <p:extLst>
-      <p:ext uri="{BB962C8B-B14F-4D97-AF65-F5344CB8AC3E}">
-        <p14:creationId xmlns:p14="http://schemas.microsoft.com/office/powerpoint/2010/main" val="1191237860"/>
-      </p:ext>
-    </p:extLst>
-  </p:cSld>
-  <p:clrMapOvr>
-    <a:masterClrMapping/>
-  </p:clrMapOvr>
-</p:sld>
-</file>
-
-<file path=ppt/slides/slide15.xml><?xml version="1.0" encoding="utf-8"?>
-<p:sld xmlns:a="http://schemas.openxmlformats.org/drawingml/2006/main" xmlns:r="http://schemas.openxmlformats.org/officeDocument/2006/relationships" xmlns:p="http://schemas.openxmlformats.org/presentationml/2006/main">
-  <p:cSld>
-    <p:spTree>
-      <p:nvGrpSpPr>
-        <p:cNvPr id="1" name=""/>
-        <p:cNvGrpSpPr/>
-        <p:nvPr/>
-      </p:nvGrpSpPr>
-      <p:grpSpPr>
-        <a:xfrm>
-          <a:off x="0" y="0"/>
-          <a:ext cx="0" cy="0"/>
-          <a:chOff x="0" y="0"/>
-          <a:chExt cx="0" cy="0"/>
-        </a:xfrm>
-      </p:grpSpPr>
       <p:sp>
         <p:nvSpPr>
           <p:cNvPr id="2" name="Rectangle 1"/>
@@ -19481,7 +16469,7 @@
             <a:fld id="{127DDC20-79C9-9647-820E-6D40A3D210C3}" type="slidenum">
               <a:rPr lang="en-US" smtClean="0"/>
               <a:pPr/>
-              <a:t>15</a:t>
+              <a:t>10</a:t>
             </a:fld>
             <a:endParaRPr lang="en-US"/>
           </a:p>
@@ -20264,7 +17252,7 @@
                   <a:srgbClr val="FFFFFF"/>
                 </a:solidFill>
               </a:rPr>
-              <a:t>2.1 </a:t>
+              <a:t>4.1 </a:t>
             </a:r>
             <a:br>
               <a:rPr lang="en-US" sz="4050" dirty="0">
@@ -20518,7 +17506,7 @@
         <p:spPr>
           <a:xfrm>
             <a:off x="302741" y="1197227"/>
-            <a:ext cx="7679724" cy="3886200"/>
+            <a:ext cx="7679724" cy="2731592"/>
           </a:xfrm>
         </p:spPr>
         <p:txBody>
@@ -20528,48 +17516,41 @@
           <a:lstStyle/>
           <a:p>
             <a:pPr>
-              <a:buFont typeface="Courier New" panose="02070309020205020404" pitchFamily="49" charset="0"/>
-              <a:buChar char="o"/>
+              <a:buFont typeface="Wingdings" panose="05000000000000000000" pitchFamily="2" charset="2"/>
+              <a:buChar char="Ø"/>
             </a:pPr>
             <a:r>
-              <a:rPr lang="en-US" altLang="en-US" dirty="0"/>
-              <a:t>A</a:t>
-            </a:r>
-            <a:r>
-              <a:rPr lang="en-US" altLang="zh-CN" dirty="0"/>
-              <a:t>rcGIS Collector</a:t>
-            </a:r>
-          </a:p>
-          <a:p>
-            <a:pPr lvl="1">
+              <a:rPr lang="en-US" altLang="en-US" sz="2400" dirty="0"/>
+              <a:t>Field Maps is an all-in-one app that is widely used for </a:t>
+            </a:r>
+            <a:r>
+              <a:rPr lang="en-US" altLang="en-US" sz="2400" dirty="0" err="1"/>
+              <a:t>mapcentric</a:t>
+            </a:r>
+            <a:r>
+              <a:rPr lang="en-US" altLang="en-US" sz="2400" dirty="0"/>
+              <a:t> data collection</a:t>
+            </a:r>
+          </a:p>
+          <a:p>
+            <a:pPr>
               <a:buFont typeface="Wingdings" panose="05000000000000000000" pitchFamily="2" charset="2"/>
-              <a:buChar char="ü"/>
+              <a:buChar char="Ø"/>
             </a:pPr>
             <a:r>
-              <a:rPr lang="en-US" altLang="en-US" dirty="0"/>
-              <a:t>Capture assets and observations</a:t>
-            </a:r>
-          </a:p>
-          <a:p>
-            <a:pPr lvl="1">
+              <a:rPr lang="en-US" altLang="en-US" sz="2400" dirty="0"/>
+              <a:t>functioning with or without network connectivity. </a:t>
+            </a:r>
+          </a:p>
+          <a:p>
+            <a:pPr>
               <a:buFont typeface="Wingdings" panose="05000000000000000000" pitchFamily="2" charset="2"/>
-              <a:buChar char="ü"/>
+              <a:buChar char="Ø"/>
             </a:pPr>
             <a:r>
-              <a:rPr lang="en-US" altLang="en-US" dirty="0"/>
-              <a:t>Perform inspections</a:t>
-            </a:r>
-          </a:p>
-          <a:p>
-            <a:pPr>
-              <a:buFont typeface="Courier New" panose="02070309020205020404" pitchFamily="49" charset="0"/>
-              <a:buChar char="o"/>
-            </a:pPr>
-            <a:r>
-              <a:rPr lang="en-US" altLang="en-US" dirty="0"/>
-              <a:t>Workflow</a:t>
-            </a:r>
-            <a:endParaRPr lang="en-US" altLang="en-US" sz="2520" dirty="0"/>
+              <a:rPr lang="en-US" altLang="en-US" sz="2400" dirty="0"/>
+              <a:t>It also supports utility network editing and tracing, location sharing, Geofences, task assignments, workforce coordination, webhook automation, and more</a:t>
+            </a:r>
           </a:p>
         </p:txBody>
       </p:sp>
@@ -20661,8 +17642,8 @@
         </p:nvSpPr>
         <p:spPr>
           <a:xfrm>
-            <a:off x="118533" y="43082"/>
-            <a:ext cx="8077200" cy="857250"/>
+            <a:off x="237640" y="202819"/>
+            <a:ext cx="2087105" cy="857250"/>
           </a:xfrm>
           <a:prstGeom prst="rect">
             <a:avLst/>
@@ -20731,54 +17712,81 @@
           <a:chExt cx="0" cy="0"/>
         </a:xfrm>
       </p:grpSpPr>
-      <p:cxnSp>
-        <p:nvCxnSpPr>
-          <p:cNvPr id="6" name="Straight Connector 5">
+      <p:sp>
+        <p:nvSpPr>
+          <p:cNvPr id="3" name="Content Placeholder 2">
             <a:extLst>
               <a:ext uri="{FF2B5EF4-FFF2-40B4-BE49-F238E27FC236}">
-                <a16:creationId xmlns:a16="http://schemas.microsoft.com/office/drawing/2014/main" id="{72C807DF-E68B-4FDB-AF8B-FD65014E3363}"/>
+                <a16:creationId xmlns:a16="http://schemas.microsoft.com/office/drawing/2014/main" id="{9EF5046A-F5C4-33F0-EB79-A3724D17E8D8}"/>
               </a:ext>
             </a:extLst>
           </p:cNvPr>
-          <p:cNvCxnSpPr/>
-          <p:nvPr/>
-        </p:nvCxnSpPr>
-        <p:spPr>
-          <a:xfrm>
-            <a:off x="152400" y="922910"/>
-            <a:ext cx="8001000" cy="0"/>
-          </a:xfrm>
-          <a:prstGeom prst="line">
-            <a:avLst/>
-          </a:prstGeom>
-          <a:ln>
-            <a:solidFill>
-              <a:schemeClr val="tx1"/>
-            </a:solidFill>
-          </a:ln>
-          <a:effectLst/>
-        </p:spPr>
-        <p:style>
-          <a:lnRef idx="2">
-            <a:schemeClr val="accent1"/>
-          </a:lnRef>
-          <a:fillRef idx="0">
-            <a:schemeClr val="accent1"/>
-          </a:fillRef>
-          <a:effectRef idx="1">
-            <a:schemeClr val="accent1"/>
-          </a:effectRef>
-          <a:fontRef idx="minor">
-            <a:schemeClr val="tx1"/>
-          </a:fontRef>
-        </p:style>
-      </p:cxnSp>
-      <p:sp>
-        <p:nvSpPr>
-          <p:cNvPr id="7" name="Title 1">
+          <p:cNvSpPr>
+            <a:spLocks noGrp="1"/>
+          </p:cNvSpPr>
+          <p:nvPr>
+            <p:ph idx="1"/>
+          </p:nvPr>
+        </p:nvSpPr>
+        <p:spPr>
+          <a:xfrm>
+            <a:off x="392307" y="914400"/>
+            <a:ext cx="7444990" cy="1560989"/>
+          </a:xfrm>
+        </p:spPr>
+        <p:txBody>
+          <a:bodyPr/>
+          <a:lstStyle/>
+          <a:p>
+            <a:r>
+              <a:rPr lang="en-US" dirty="0"/>
+              <a:t>Field Maps Designer: This component is for solution creators or map authors to use. It can design layers and maps, create smart forms, enable maps for offline use, set up Geofences, and configure various settings to optimize maps for field workflows.</a:t>
+            </a:r>
+          </a:p>
+          <a:p>
+            <a:r>
+              <a:rPr lang="en-US" dirty="0"/>
+              <a:t>Field Maps mobile app: This component is for mobile workers to use. Using this app, mobile workers can open the maps, forms, data, and tools necessary to complete their field tasks. Field Maps is designed to function online and offline, as well as in outdoor and indoor environments.</a:t>
+            </a:r>
+          </a:p>
+        </p:txBody>
+      </p:sp>
+      <p:sp>
+        <p:nvSpPr>
+          <p:cNvPr id="4" name="Slide Number Placeholder 3">
             <a:extLst>
               <a:ext uri="{FF2B5EF4-FFF2-40B4-BE49-F238E27FC236}">
-                <a16:creationId xmlns:a16="http://schemas.microsoft.com/office/drawing/2014/main" id="{81ABCB3B-7396-4070-8FA3-31111AB30A9C}"/>
+                <a16:creationId xmlns:a16="http://schemas.microsoft.com/office/drawing/2014/main" id="{9C8A7BA2-4501-4F7E-97AB-EF86901ED23C}"/>
+              </a:ext>
+            </a:extLst>
+          </p:cNvPr>
+          <p:cNvSpPr>
+            <a:spLocks noGrp="1"/>
+          </p:cNvSpPr>
+          <p:nvPr>
+            <p:ph type="sldNum" sz="quarter" idx="12"/>
+          </p:nvPr>
+        </p:nvSpPr>
+        <p:spPr/>
+        <p:txBody>
+          <a:bodyPr/>
+          <a:lstStyle/>
+          <a:p>
+            <a:fld id="{127DDC20-79C9-9647-820E-6D40A3D210C3}" type="slidenum">
+              <a:rPr lang="en-US" smtClean="0"/>
+              <a:pPr/>
+              <a:t>4</a:t>
+            </a:fld>
+            <a:endParaRPr lang="en-US"/>
+          </a:p>
+        </p:txBody>
+      </p:sp>
+      <p:sp>
+        <p:nvSpPr>
+          <p:cNvPr id="5" name="Title 1">
+            <a:extLst>
+              <a:ext uri="{FF2B5EF4-FFF2-40B4-BE49-F238E27FC236}">
+                <a16:creationId xmlns:a16="http://schemas.microsoft.com/office/drawing/2014/main" id="{356E5FA1-9CF4-D41A-9DA6-4060B69791E7}"/>
               </a:ext>
             </a:extLst>
           </p:cNvPr>
@@ -20789,8 +17797,8 @@
         </p:nvSpPr>
         <p:spPr>
           <a:xfrm>
-            <a:off x="118533" y="43082"/>
-            <a:ext cx="8077200" cy="857250"/>
+            <a:off x="237640" y="350053"/>
+            <a:ext cx="3636936" cy="603093"/>
           </a:xfrm>
           <a:prstGeom prst="rect">
             <a:avLst/>
@@ -20824,337 +17832,66 @@
                   <a:srgbClr val="7030A0"/>
                 </a:solidFill>
               </a:rPr>
-              <a:t>Collector</a:t>
-            </a:r>
-          </a:p>
-        </p:txBody>
-      </p:sp>
-      <p:sp>
-        <p:nvSpPr>
-          <p:cNvPr id="8" name="Rectangle 1027">
-            <a:extLst>
-              <a:ext uri="{FF2B5EF4-FFF2-40B4-BE49-F238E27FC236}">
-                <a16:creationId xmlns:a16="http://schemas.microsoft.com/office/drawing/2014/main" id="{67E998B9-FF6A-4D21-9681-07FB6BCEFB5A}"/>
-              </a:ext>
-            </a:extLst>
-          </p:cNvPr>
-          <p:cNvSpPr txBox="1">
-            <a:spLocks noChangeArrowheads="1"/>
-          </p:cNvSpPr>
-          <p:nvPr/>
-        </p:nvSpPr>
-        <p:spPr>
-          <a:xfrm>
-            <a:off x="302741" y="1197227"/>
-            <a:ext cx="7679724" cy="3886200"/>
-          </a:xfrm>
-          <a:prstGeom prst="rect">
-            <a:avLst/>
-          </a:prstGeom>
-        </p:spPr>
-        <p:txBody>
-          <a:bodyPr vert="horz" lIns="91440" tIns="45720" rIns="91440" bIns="45720" rtlCol="0">
-            <a:normAutofit/>
-          </a:bodyPr>
-          <a:lstStyle>
-            <a:lvl1pPr marL="308610" indent="-308610" algn="l" defTabSz="411480" rtl="0" eaLnBrk="1" latinLnBrk="0" hangingPunct="1">
-              <a:spcBef>
-                <a:spcPct val="20000"/>
-              </a:spcBef>
-              <a:buFont typeface="Arial"/>
-              <a:buChar char="•"/>
-              <a:defRPr sz="2880" kern="1200">
-                <a:solidFill>
-                  <a:schemeClr val="tx1"/>
-                </a:solidFill>
-                <a:latin typeface="+mn-lt"/>
-                <a:ea typeface="+mn-ea"/>
-                <a:cs typeface="+mn-cs"/>
-              </a:defRPr>
-            </a:lvl1pPr>
-            <a:lvl2pPr marL="668655" indent="-257175" algn="l" defTabSz="411480" rtl="0" eaLnBrk="1" latinLnBrk="0" hangingPunct="1">
-              <a:spcBef>
-                <a:spcPct val="20000"/>
-              </a:spcBef>
-              <a:buFont typeface="Arial"/>
-              <a:buChar char="–"/>
-              <a:defRPr sz="2520" kern="1200">
-                <a:solidFill>
-                  <a:schemeClr val="tx1"/>
-                </a:solidFill>
-                <a:latin typeface="+mn-lt"/>
-                <a:ea typeface="+mn-ea"/>
-                <a:cs typeface="+mn-cs"/>
-              </a:defRPr>
-            </a:lvl2pPr>
-            <a:lvl3pPr marL="1028700" indent="-205740" algn="l" defTabSz="411480" rtl="0" eaLnBrk="1" latinLnBrk="0" hangingPunct="1">
-              <a:spcBef>
-                <a:spcPct val="20000"/>
-              </a:spcBef>
-              <a:buFont typeface="Arial"/>
-              <a:buChar char="•"/>
-              <a:defRPr sz="2160" kern="1200">
-                <a:solidFill>
-                  <a:schemeClr val="tx1"/>
-                </a:solidFill>
-                <a:latin typeface="+mn-lt"/>
-                <a:ea typeface="+mn-ea"/>
-                <a:cs typeface="+mn-cs"/>
-              </a:defRPr>
-            </a:lvl3pPr>
-            <a:lvl4pPr marL="1440180" indent="-205740" algn="l" defTabSz="411480" rtl="0" eaLnBrk="1" latinLnBrk="0" hangingPunct="1">
-              <a:spcBef>
-                <a:spcPct val="20000"/>
-              </a:spcBef>
-              <a:buFont typeface="Arial"/>
-              <a:buChar char="–"/>
-              <a:defRPr sz="1800" kern="1200">
-                <a:solidFill>
-                  <a:schemeClr val="tx1"/>
-                </a:solidFill>
-                <a:latin typeface="+mn-lt"/>
-                <a:ea typeface="+mn-ea"/>
-                <a:cs typeface="+mn-cs"/>
-              </a:defRPr>
-            </a:lvl4pPr>
-            <a:lvl5pPr marL="1851660" indent="-205740" algn="l" defTabSz="411480" rtl="0" eaLnBrk="1" latinLnBrk="0" hangingPunct="1">
-              <a:spcBef>
-                <a:spcPct val="20000"/>
-              </a:spcBef>
-              <a:buFont typeface="Arial"/>
-              <a:buChar char="»"/>
-              <a:defRPr sz="1800" kern="1200">
-                <a:solidFill>
-                  <a:schemeClr val="tx1"/>
-                </a:solidFill>
-                <a:latin typeface="+mn-lt"/>
-                <a:ea typeface="+mn-ea"/>
-                <a:cs typeface="+mn-cs"/>
-              </a:defRPr>
-            </a:lvl5pPr>
-            <a:lvl6pPr marL="2263140" indent="-205740" algn="l" defTabSz="411480" rtl="0" eaLnBrk="1" latinLnBrk="0" hangingPunct="1">
-              <a:spcBef>
-                <a:spcPct val="20000"/>
-              </a:spcBef>
-              <a:buFont typeface="Arial"/>
-              <a:buChar char="•"/>
-              <a:defRPr sz="1800" kern="1200">
-                <a:solidFill>
-                  <a:schemeClr val="tx1"/>
-                </a:solidFill>
-                <a:latin typeface="+mn-lt"/>
-                <a:ea typeface="+mn-ea"/>
-                <a:cs typeface="+mn-cs"/>
-              </a:defRPr>
-            </a:lvl6pPr>
-            <a:lvl7pPr marL="2674620" indent="-205740" algn="l" defTabSz="411480" rtl="0" eaLnBrk="1" latinLnBrk="0" hangingPunct="1">
-              <a:spcBef>
-                <a:spcPct val="20000"/>
-              </a:spcBef>
-              <a:buFont typeface="Arial"/>
-              <a:buChar char="•"/>
-              <a:defRPr sz="1800" kern="1200">
-                <a:solidFill>
-                  <a:schemeClr val="tx1"/>
-                </a:solidFill>
-                <a:latin typeface="+mn-lt"/>
-                <a:ea typeface="+mn-ea"/>
-                <a:cs typeface="+mn-cs"/>
-              </a:defRPr>
-            </a:lvl7pPr>
-            <a:lvl8pPr marL="3086100" indent="-205740" algn="l" defTabSz="411480" rtl="0" eaLnBrk="1" latinLnBrk="0" hangingPunct="1">
-              <a:spcBef>
-                <a:spcPct val="20000"/>
-              </a:spcBef>
-              <a:buFont typeface="Arial"/>
-              <a:buChar char="•"/>
-              <a:defRPr sz="1800" kern="1200">
-                <a:solidFill>
-                  <a:schemeClr val="tx1"/>
-                </a:solidFill>
-                <a:latin typeface="+mn-lt"/>
-                <a:ea typeface="+mn-ea"/>
-                <a:cs typeface="+mn-cs"/>
-              </a:defRPr>
-            </a:lvl8pPr>
-            <a:lvl9pPr marL="3497580" indent="-205740" algn="l" defTabSz="411480" rtl="0" eaLnBrk="1" latinLnBrk="0" hangingPunct="1">
-              <a:spcBef>
-                <a:spcPct val="20000"/>
-              </a:spcBef>
-              <a:buFont typeface="Arial"/>
-              <a:buChar char="•"/>
-              <a:defRPr sz="1800" kern="1200">
-                <a:solidFill>
-                  <a:schemeClr val="tx1"/>
-                </a:solidFill>
-                <a:latin typeface="+mn-lt"/>
-                <a:ea typeface="+mn-ea"/>
-                <a:cs typeface="+mn-cs"/>
-              </a:defRPr>
-            </a:lvl9pPr>
-          </a:lstStyle>
-          <a:p>
-            <a:pPr>
-              <a:buFont typeface="Courier New" panose="02070309020205020404" pitchFamily="49" charset="0"/>
-              <a:buChar char="o"/>
-            </a:pPr>
-            <a:r>
-              <a:rPr lang="en-US" altLang="en-US" dirty="0"/>
-              <a:t>Map- centric data collection field solution</a:t>
-            </a:r>
-          </a:p>
-          <a:p>
-            <a:pPr lvl="1">
-              <a:buFont typeface="Wingdings" panose="05000000000000000000" pitchFamily="2" charset="2"/>
-              <a:buChar char="ü"/>
-            </a:pPr>
-            <a:r>
-              <a:rPr lang="en-US" altLang="en-US" dirty="0"/>
-              <a:t>Web maps</a:t>
-            </a:r>
-          </a:p>
-          <a:p>
-            <a:pPr lvl="1">
-              <a:buFont typeface="Wingdings" panose="05000000000000000000" pitchFamily="2" charset="2"/>
-              <a:buChar char="ü"/>
-            </a:pPr>
-            <a:r>
-              <a:rPr lang="en-US" altLang="en-US" dirty="0"/>
-              <a:t>Works offline</a:t>
-            </a:r>
-          </a:p>
-          <a:p>
-            <a:pPr lvl="1">
-              <a:buFont typeface="Wingdings" panose="05000000000000000000" pitchFamily="2" charset="2"/>
-              <a:buChar char="ü"/>
-            </a:pPr>
-            <a:r>
-              <a:rPr lang="en-US" altLang="en-US" dirty="0"/>
-              <a:t>High accuracy data</a:t>
-            </a:r>
-          </a:p>
-        </p:txBody>
-      </p:sp>
-      <p:sp>
-        <p:nvSpPr>
-          <p:cNvPr id="11" name="TextBox 10">
-            <a:extLst>
-              <a:ext uri="{FF2B5EF4-FFF2-40B4-BE49-F238E27FC236}">
-                <a16:creationId xmlns:a16="http://schemas.microsoft.com/office/drawing/2014/main" id="{D156F405-2A0D-4BE8-B032-FAF6CA11EE67}"/>
-              </a:ext>
-            </a:extLst>
-          </p:cNvPr>
-          <p:cNvSpPr txBox="1"/>
-          <p:nvPr/>
-        </p:nvSpPr>
-        <p:spPr>
-          <a:xfrm>
-            <a:off x="4637248" y="4744132"/>
-            <a:ext cx="3592351" cy="400110"/>
-          </a:xfrm>
-          <a:prstGeom prst="rect">
-            <a:avLst/>
-          </a:prstGeom>
-          <a:noFill/>
-        </p:spPr>
-        <p:txBody>
-          <a:bodyPr wrap="square">
-            <a:spAutoFit/>
-          </a:bodyPr>
-          <a:lstStyle/>
-          <a:p>
-            <a:r>
-              <a:rPr lang="en-US" sz="1000" dirty="0">
+              <a:t>TWO</a:t>
+            </a:r>
+            <a:r>
+              <a:rPr lang="zh-CN" altLang="en-US" sz="2600" dirty="0">
                 <a:solidFill>
                   <a:srgbClr val="7030A0"/>
                 </a:solidFill>
               </a:rPr>
-              <a:t>https://www.esri.com/en-us/arcgis/products/arcgis-collector/overview</a:t>
-            </a:r>
+              <a:t> </a:t>
+            </a:r>
+            <a:r>
+              <a:rPr lang="en-US" altLang="zh-CN" sz="2600" dirty="0">
+                <a:solidFill>
+                  <a:srgbClr val="7030A0"/>
+                </a:solidFill>
+              </a:rPr>
+              <a:t>COMPONENTS</a:t>
+            </a:r>
+            <a:endParaRPr lang="en-US" sz="2600" dirty="0">
+              <a:solidFill>
+                <a:srgbClr val="7030A0"/>
+              </a:solidFill>
+            </a:endParaRPr>
           </a:p>
         </p:txBody>
       </p:sp>
       <p:pic>
         <p:nvPicPr>
-          <p:cNvPr id="2" name="Picture 2" descr="Image showing collector example">
+          <p:cNvPr id="7" name="Picture 6">
             <a:extLst>
               <a:ext uri="{FF2B5EF4-FFF2-40B4-BE49-F238E27FC236}">
-                <a16:creationId xmlns:a16="http://schemas.microsoft.com/office/drawing/2014/main" id="{DD5C3935-655C-45B4-B8EE-140250441705}"/>
+                <a16:creationId xmlns:a16="http://schemas.microsoft.com/office/drawing/2014/main" id="{3DFC7217-2BEF-34A2-F9C7-CA2911E7ECA4}"/>
               </a:ext>
             </a:extLst>
           </p:cNvPr>
           <p:cNvPicPr>
-            <a:picLocks noChangeAspect="1" noChangeArrowheads="1"/>
+            <a:picLocks noChangeAspect="1"/>
           </p:cNvPicPr>
           <p:nvPr/>
         </p:nvPicPr>
         <p:blipFill>
-          <a:blip r:embed="rId3">
-            <a:extLst>
-              <a:ext uri="{28A0092B-C50C-407E-A947-70E740481C1C}">
-                <a14:useLocalDpi xmlns:a14="http://schemas.microsoft.com/office/drawing/2010/main" val="0"/>
-              </a:ext>
-            </a:extLst>
-          </a:blip>
-          <a:srcRect/>
+          <a:blip r:embed="rId2"/>
           <a:stretch>
             <a:fillRect/>
           </a:stretch>
         </p:blipFill>
-        <p:spPr bwMode="auto">
-          <a:xfrm>
-            <a:off x="3479385" y="1422985"/>
-            <a:ext cx="4934757" cy="3024252"/>
+        <p:spPr>
+          <a:xfrm>
+            <a:off x="1395493" y="2358664"/>
+            <a:ext cx="5575516" cy="2596194"/>
           </a:xfrm>
           <a:prstGeom prst="rect">
             <a:avLst/>
           </a:prstGeom>
-          <a:noFill/>
-          <a:extLst>
-            <a:ext uri="{909E8E84-426E-40DD-AFC4-6F175D3DCCD1}">
-              <a14:hiddenFill xmlns:a14="http://schemas.microsoft.com/office/drawing/2010/main">
-                <a:solidFill>
-                  <a:srgbClr val="FFFFFF"/>
-                </a:solidFill>
-              </a14:hiddenFill>
-            </a:ext>
-          </a:extLst>
         </p:spPr>
       </p:pic>
-      <p:sp>
-        <p:nvSpPr>
-          <p:cNvPr id="4" name="Slide Number Placeholder 3">
-            <a:extLst>
-              <a:ext uri="{FF2B5EF4-FFF2-40B4-BE49-F238E27FC236}">
-                <a16:creationId xmlns:a16="http://schemas.microsoft.com/office/drawing/2014/main" id="{65E2FFE1-717D-4C84-ADB9-4B85EEA0EB8C}"/>
-              </a:ext>
-            </a:extLst>
-          </p:cNvPr>
-          <p:cNvSpPr>
-            <a:spLocks noGrp="1"/>
-          </p:cNvSpPr>
-          <p:nvPr>
-            <p:ph type="sldNum" sz="quarter" idx="12"/>
-          </p:nvPr>
-        </p:nvSpPr>
-        <p:spPr/>
-        <p:txBody>
-          <a:bodyPr/>
-          <a:lstStyle/>
-          <a:p>
-            <a:fld id="{127DDC20-79C9-9647-820E-6D40A3D210C3}" type="slidenum">
-              <a:rPr lang="en-US" smtClean="0"/>
-              <a:pPr/>
-              <a:t>4</a:t>
-            </a:fld>
-            <a:endParaRPr lang="en-US"/>
-          </a:p>
-        </p:txBody>
-      </p:sp>
     </p:spTree>
     <p:extLst>
       <p:ext uri="{BB962C8B-B14F-4D97-AF65-F5344CB8AC3E}">
-        <p14:creationId xmlns:p14="http://schemas.microsoft.com/office/powerpoint/2010/main" val="1003169840"/>
+        <p14:creationId xmlns:p14="http://schemas.microsoft.com/office/powerpoint/2010/main" val="2417424427"/>
       </p:ext>
     </p:extLst>
   </p:cSld>
@@ -21181,482 +17918,62 @@
           <a:chExt cx="0" cy="0"/>
         </a:xfrm>
       </p:grpSpPr>
-      <p:cxnSp>
-        <p:nvCxnSpPr>
-          <p:cNvPr id="6" name="Straight Connector 5">
+      <p:sp>
+        <p:nvSpPr>
+          <p:cNvPr id="2" name="Title 1">
             <a:extLst>
               <a:ext uri="{FF2B5EF4-FFF2-40B4-BE49-F238E27FC236}">
-                <a16:creationId xmlns:a16="http://schemas.microsoft.com/office/drawing/2014/main" id="{72C807DF-E68B-4FDB-AF8B-FD65014E3363}"/>
+                <a16:creationId xmlns:a16="http://schemas.microsoft.com/office/drawing/2014/main" id="{E0309208-AC8F-DAC9-89D2-617CA62D1D2B}"/>
               </a:ext>
             </a:extLst>
           </p:cNvPr>
-          <p:cNvCxnSpPr/>
-          <p:nvPr/>
-        </p:nvCxnSpPr>
-        <p:spPr>
-          <a:xfrm>
-            <a:off x="152400" y="922910"/>
-            <a:ext cx="8001000" cy="0"/>
-          </a:xfrm>
-          <a:prstGeom prst="line">
-            <a:avLst/>
-          </a:prstGeom>
-          <a:ln>
-            <a:solidFill>
-              <a:schemeClr val="tx1"/>
-            </a:solidFill>
-          </a:ln>
-          <a:effectLst/>
-        </p:spPr>
-        <p:style>
-          <a:lnRef idx="2">
-            <a:schemeClr val="accent1"/>
-          </a:lnRef>
-          <a:fillRef idx="0">
-            <a:schemeClr val="accent1"/>
-          </a:fillRef>
-          <a:effectRef idx="1">
-            <a:schemeClr val="accent1"/>
-          </a:effectRef>
-          <a:fontRef idx="minor">
-            <a:schemeClr val="tx1"/>
-          </a:fontRef>
-        </p:style>
-      </p:cxnSp>
-      <p:sp>
-        <p:nvSpPr>
-          <p:cNvPr id="7" name="Title 1">
+          <p:cNvSpPr>
+            <a:spLocks noGrp="1"/>
+          </p:cNvSpPr>
+          <p:nvPr>
+            <p:ph type="title"/>
+          </p:nvPr>
+        </p:nvSpPr>
+        <p:spPr/>
+        <p:txBody>
+          <a:bodyPr/>
+          <a:lstStyle/>
+          <a:p>
+            <a:endParaRPr lang="en-US"/>
+          </a:p>
+        </p:txBody>
+      </p:sp>
+      <p:sp>
+        <p:nvSpPr>
+          <p:cNvPr id="3" name="Content Placeholder 2">
             <a:extLst>
               <a:ext uri="{FF2B5EF4-FFF2-40B4-BE49-F238E27FC236}">
-                <a16:creationId xmlns:a16="http://schemas.microsoft.com/office/drawing/2014/main" id="{81ABCB3B-7396-4070-8FA3-31111AB30A9C}"/>
+                <a16:creationId xmlns:a16="http://schemas.microsoft.com/office/drawing/2014/main" id="{6608C841-946F-AB28-9F23-C5D4D31D07E1}"/>
               </a:ext>
             </a:extLst>
           </p:cNvPr>
-          <p:cNvSpPr txBox="1">
-            <a:spLocks/>
-          </p:cNvSpPr>
-          <p:nvPr/>
-        </p:nvSpPr>
-        <p:spPr>
-          <a:xfrm>
-            <a:off x="118533" y="43082"/>
-            <a:ext cx="8077200" cy="857250"/>
-          </a:xfrm>
-          <a:prstGeom prst="rect">
-            <a:avLst/>
-          </a:prstGeom>
-        </p:spPr>
-        <p:txBody>
-          <a:bodyPr vert="horz" lIns="91440" tIns="45720" rIns="91440" bIns="45720" rtlCol="0" anchor="ctr">
-            <a:normAutofit/>
-          </a:bodyPr>
-          <a:lstStyle>
-            <a:lvl1pPr algn="ctr" defTabSz="411480" rtl="0" eaLnBrk="1" latinLnBrk="0" hangingPunct="1">
-              <a:spcBef>
-                <a:spcPct val="0"/>
-              </a:spcBef>
-              <a:buNone/>
-              <a:defRPr sz="3960" kern="1200">
-                <a:solidFill>
-                  <a:schemeClr val="tx1"/>
-                </a:solidFill>
-                <a:latin typeface="+mj-lt"/>
-                <a:ea typeface="+mj-ea"/>
-                <a:cs typeface="+mj-cs"/>
-              </a:defRPr>
-            </a:lvl1pPr>
-          </a:lstStyle>
-          <a:p>
-            <a:pPr algn="l"/>
-            <a:r>
-              <a:rPr lang="en-US" sz="2600" dirty="0">
-                <a:solidFill>
-                  <a:srgbClr val="7030A0"/>
-                </a:solidFill>
-              </a:rPr>
-              <a:t>Collector</a:t>
-            </a:r>
-          </a:p>
-        </p:txBody>
-      </p:sp>
-      <p:sp>
-        <p:nvSpPr>
-          <p:cNvPr id="2" name="Rectangle 1027">
+          <p:cNvSpPr>
+            <a:spLocks noGrp="1"/>
+          </p:cNvSpPr>
+          <p:nvPr>
+            <p:ph idx="1"/>
+          </p:nvPr>
+        </p:nvSpPr>
+        <p:spPr/>
+        <p:txBody>
+          <a:bodyPr/>
+          <a:lstStyle/>
+          <a:p>
+            <a:endParaRPr lang="en-US"/>
+          </a:p>
+        </p:txBody>
+      </p:sp>
+      <p:sp>
+        <p:nvSpPr>
+          <p:cNvPr id="4" name="Slide Number Placeholder 3">
             <a:extLst>
               <a:ext uri="{FF2B5EF4-FFF2-40B4-BE49-F238E27FC236}">
-                <a16:creationId xmlns:a16="http://schemas.microsoft.com/office/drawing/2014/main" id="{6AD63676-E604-4050-BF0E-A7B8DD754C47}"/>
-              </a:ext>
-            </a:extLst>
-          </p:cNvPr>
-          <p:cNvSpPr txBox="1">
-            <a:spLocks noChangeArrowheads="1"/>
-          </p:cNvSpPr>
-          <p:nvPr/>
-        </p:nvSpPr>
-        <p:spPr>
-          <a:xfrm>
-            <a:off x="152400" y="1057414"/>
-            <a:ext cx="7679724" cy="3886200"/>
-          </a:xfrm>
-          <a:prstGeom prst="rect">
-            <a:avLst/>
-          </a:prstGeom>
-        </p:spPr>
-        <p:txBody>
-          <a:bodyPr vert="horz" lIns="91440" tIns="45720" rIns="91440" bIns="45720" rtlCol="0">
-            <a:normAutofit/>
-          </a:bodyPr>
-          <a:lstStyle>
-            <a:lvl1pPr marL="308610" indent="-308610" algn="l" defTabSz="411480" rtl="0" eaLnBrk="1" latinLnBrk="0" hangingPunct="1">
-              <a:spcBef>
-                <a:spcPct val="20000"/>
-              </a:spcBef>
-              <a:buFont typeface="Arial"/>
-              <a:buChar char="•"/>
-              <a:defRPr sz="2880" kern="1200">
-                <a:solidFill>
-                  <a:schemeClr val="tx1"/>
-                </a:solidFill>
-                <a:latin typeface="+mn-lt"/>
-                <a:ea typeface="+mn-ea"/>
-                <a:cs typeface="+mn-cs"/>
-              </a:defRPr>
-            </a:lvl1pPr>
-            <a:lvl2pPr marL="668655" indent="-257175" algn="l" defTabSz="411480" rtl="0" eaLnBrk="1" latinLnBrk="0" hangingPunct="1">
-              <a:spcBef>
-                <a:spcPct val="20000"/>
-              </a:spcBef>
-              <a:buFont typeface="Arial"/>
-              <a:buChar char="–"/>
-              <a:defRPr sz="2520" kern="1200">
-                <a:solidFill>
-                  <a:schemeClr val="tx1"/>
-                </a:solidFill>
-                <a:latin typeface="+mn-lt"/>
-                <a:ea typeface="+mn-ea"/>
-                <a:cs typeface="+mn-cs"/>
-              </a:defRPr>
-            </a:lvl2pPr>
-            <a:lvl3pPr marL="1028700" indent="-205740" algn="l" defTabSz="411480" rtl="0" eaLnBrk="1" latinLnBrk="0" hangingPunct="1">
-              <a:spcBef>
-                <a:spcPct val="20000"/>
-              </a:spcBef>
-              <a:buFont typeface="Arial"/>
-              <a:buChar char="•"/>
-              <a:defRPr sz="2160" kern="1200">
-                <a:solidFill>
-                  <a:schemeClr val="tx1"/>
-                </a:solidFill>
-                <a:latin typeface="+mn-lt"/>
-                <a:ea typeface="+mn-ea"/>
-                <a:cs typeface="+mn-cs"/>
-              </a:defRPr>
-            </a:lvl3pPr>
-            <a:lvl4pPr marL="1440180" indent="-205740" algn="l" defTabSz="411480" rtl="0" eaLnBrk="1" latinLnBrk="0" hangingPunct="1">
-              <a:spcBef>
-                <a:spcPct val="20000"/>
-              </a:spcBef>
-              <a:buFont typeface="Arial"/>
-              <a:buChar char="–"/>
-              <a:defRPr sz="1800" kern="1200">
-                <a:solidFill>
-                  <a:schemeClr val="tx1"/>
-                </a:solidFill>
-                <a:latin typeface="+mn-lt"/>
-                <a:ea typeface="+mn-ea"/>
-                <a:cs typeface="+mn-cs"/>
-              </a:defRPr>
-            </a:lvl4pPr>
-            <a:lvl5pPr marL="1851660" indent="-205740" algn="l" defTabSz="411480" rtl="0" eaLnBrk="1" latinLnBrk="0" hangingPunct="1">
-              <a:spcBef>
-                <a:spcPct val="20000"/>
-              </a:spcBef>
-              <a:buFont typeface="Arial"/>
-              <a:buChar char="»"/>
-              <a:defRPr sz="1800" kern="1200">
-                <a:solidFill>
-                  <a:schemeClr val="tx1"/>
-                </a:solidFill>
-                <a:latin typeface="+mn-lt"/>
-                <a:ea typeface="+mn-ea"/>
-                <a:cs typeface="+mn-cs"/>
-              </a:defRPr>
-            </a:lvl5pPr>
-            <a:lvl6pPr marL="2263140" indent="-205740" algn="l" defTabSz="411480" rtl="0" eaLnBrk="1" latinLnBrk="0" hangingPunct="1">
-              <a:spcBef>
-                <a:spcPct val="20000"/>
-              </a:spcBef>
-              <a:buFont typeface="Arial"/>
-              <a:buChar char="•"/>
-              <a:defRPr sz="1800" kern="1200">
-                <a:solidFill>
-                  <a:schemeClr val="tx1"/>
-                </a:solidFill>
-                <a:latin typeface="+mn-lt"/>
-                <a:ea typeface="+mn-ea"/>
-                <a:cs typeface="+mn-cs"/>
-              </a:defRPr>
-            </a:lvl6pPr>
-            <a:lvl7pPr marL="2674620" indent="-205740" algn="l" defTabSz="411480" rtl="0" eaLnBrk="1" latinLnBrk="0" hangingPunct="1">
-              <a:spcBef>
-                <a:spcPct val="20000"/>
-              </a:spcBef>
-              <a:buFont typeface="Arial"/>
-              <a:buChar char="•"/>
-              <a:defRPr sz="1800" kern="1200">
-                <a:solidFill>
-                  <a:schemeClr val="tx1"/>
-                </a:solidFill>
-                <a:latin typeface="+mn-lt"/>
-                <a:ea typeface="+mn-ea"/>
-                <a:cs typeface="+mn-cs"/>
-              </a:defRPr>
-            </a:lvl7pPr>
-            <a:lvl8pPr marL="3086100" indent="-205740" algn="l" defTabSz="411480" rtl="0" eaLnBrk="1" latinLnBrk="0" hangingPunct="1">
-              <a:spcBef>
-                <a:spcPct val="20000"/>
-              </a:spcBef>
-              <a:buFont typeface="Arial"/>
-              <a:buChar char="•"/>
-              <a:defRPr sz="1800" kern="1200">
-                <a:solidFill>
-                  <a:schemeClr val="tx1"/>
-                </a:solidFill>
-                <a:latin typeface="+mn-lt"/>
-                <a:ea typeface="+mn-ea"/>
-                <a:cs typeface="+mn-cs"/>
-              </a:defRPr>
-            </a:lvl8pPr>
-            <a:lvl9pPr marL="3497580" indent="-205740" algn="l" defTabSz="411480" rtl="0" eaLnBrk="1" latinLnBrk="0" hangingPunct="1">
-              <a:spcBef>
-                <a:spcPct val="20000"/>
-              </a:spcBef>
-              <a:buFont typeface="Arial"/>
-              <a:buChar char="•"/>
-              <a:defRPr sz="1800" kern="1200">
-                <a:solidFill>
-                  <a:schemeClr val="tx1"/>
-                </a:solidFill>
-                <a:latin typeface="+mn-lt"/>
-                <a:ea typeface="+mn-ea"/>
-                <a:cs typeface="+mn-cs"/>
-              </a:defRPr>
-            </a:lvl9pPr>
-          </a:lstStyle>
-          <a:p>
-            <a:pPr>
-              <a:buFont typeface="Courier New" panose="02070309020205020404" pitchFamily="49" charset="0"/>
-              <a:buChar char="o"/>
-            </a:pPr>
-            <a:r>
-              <a:rPr lang="en-US" altLang="en-US" dirty="0"/>
-              <a:t>Capture assets and observations</a:t>
-            </a:r>
-          </a:p>
-          <a:p>
-            <a:pPr lvl="1">
-              <a:buFont typeface="Wingdings" panose="05000000000000000000" pitchFamily="2" charset="2"/>
-              <a:buChar char="ü"/>
-            </a:pPr>
-            <a:r>
-              <a:rPr lang="en-US" altLang="en-US" dirty="0"/>
-              <a:t>Improve accuracy and currency of data</a:t>
-            </a:r>
-          </a:p>
-          <a:p>
-            <a:pPr lvl="1">
-              <a:buFont typeface="Wingdings" panose="05000000000000000000" pitchFamily="2" charset="2"/>
-              <a:buChar char="ü"/>
-            </a:pPr>
-            <a:r>
-              <a:rPr lang="en-US" altLang="en-US" dirty="0"/>
-              <a:t>Modernize field workflows</a:t>
-            </a:r>
-          </a:p>
-          <a:p>
-            <a:pPr lvl="1">
-              <a:buFont typeface="Wingdings" panose="05000000000000000000" pitchFamily="2" charset="2"/>
-              <a:buChar char="ü"/>
-            </a:pPr>
-            <a:endParaRPr lang="en-US" altLang="en-US" dirty="0"/>
-          </a:p>
-        </p:txBody>
-      </p:sp>
-      <p:pic>
-        <p:nvPicPr>
-          <p:cNvPr id="4" name="Picture 3" descr="Image showing collector example">
-            <a:extLst>
-              <a:ext uri="{FF2B5EF4-FFF2-40B4-BE49-F238E27FC236}">
-                <a16:creationId xmlns:a16="http://schemas.microsoft.com/office/drawing/2014/main" id="{2B9EE066-1ECE-46D4-A1F6-E7FE1A5128A7}"/>
-              </a:ext>
-            </a:extLst>
-          </p:cNvPr>
-          <p:cNvPicPr>
-            <a:picLocks noChangeAspect="1"/>
-          </p:cNvPicPr>
-          <p:nvPr/>
-        </p:nvPicPr>
-        <p:blipFill>
-          <a:blip r:embed="rId3"/>
-          <a:stretch>
-            <a:fillRect/>
-          </a:stretch>
-        </p:blipFill>
-        <p:spPr>
-          <a:xfrm>
-            <a:off x="1110021" y="2591815"/>
-            <a:ext cx="1247775" cy="1628775"/>
-          </a:xfrm>
-          <a:prstGeom prst="rect">
-            <a:avLst/>
-          </a:prstGeom>
-        </p:spPr>
-      </p:pic>
-      <p:sp>
-        <p:nvSpPr>
-          <p:cNvPr id="5" name="TextBox 4">
-            <a:extLst>
-              <a:ext uri="{FF2B5EF4-FFF2-40B4-BE49-F238E27FC236}">
-                <a16:creationId xmlns:a16="http://schemas.microsoft.com/office/drawing/2014/main" id="{21D8F6A3-8136-432E-B5EF-F96F5687DBDF}"/>
-              </a:ext>
-            </a:extLst>
-          </p:cNvPr>
-          <p:cNvSpPr txBox="1"/>
-          <p:nvPr/>
-        </p:nvSpPr>
-        <p:spPr>
-          <a:xfrm>
-            <a:off x="1110021" y="4433405"/>
-            <a:ext cx="1443396" cy="646331"/>
-          </a:xfrm>
-          <a:prstGeom prst="rect">
-            <a:avLst/>
-          </a:prstGeom>
-          <a:noFill/>
-        </p:spPr>
-        <p:txBody>
-          <a:bodyPr wrap="square" rtlCol="0">
-            <a:spAutoFit/>
-          </a:bodyPr>
-          <a:lstStyle/>
-          <a:p>
-            <a:r>
-              <a:rPr lang="en-US" dirty="0"/>
-              <a:t>Hydrant Collections</a:t>
-            </a:r>
-          </a:p>
-        </p:txBody>
-      </p:sp>
-      <p:pic>
-        <p:nvPicPr>
-          <p:cNvPr id="9" name="Picture 8" descr="Image showing collector example">
-            <a:extLst>
-              <a:ext uri="{FF2B5EF4-FFF2-40B4-BE49-F238E27FC236}">
-                <a16:creationId xmlns:a16="http://schemas.microsoft.com/office/drawing/2014/main" id="{6A0B4A48-7AAA-4627-A779-D3ED1624EC22}"/>
-              </a:ext>
-            </a:extLst>
-          </p:cNvPr>
-          <p:cNvPicPr>
-            <a:picLocks noChangeAspect="1"/>
-          </p:cNvPicPr>
-          <p:nvPr/>
-        </p:nvPicPr>
-        <p:blipFill>
-          <a:blip r:embed="rId4"/>
-          <a:stretch>
-            <a:fillRect/>
-          </a:stretch>
-        </p:blipFill>
-        <p:spPr>
-          <a:xfrm>
-            <a:off x="4909781" y="2591815"/>
-            <a:ext cx="1247775" cy="1643110"/>
-          </a:xfrm>
-          <a:prstGeom prst="rect">
-            <a:avLst/>
-          </a:prstGeom>
-        </p:spPr>
-      </p:pic>
-      <p:sp>
-        <p:nvSpPr>
-          <p:cNvPr id="10" name="TextBox 9">
-            <a:extLst>
-              <a:ext uri="{FF2B5EF4-FFF2-40B4-BE49-F238E27FC236}">
-                <a16:creationId xmlns:a16="http://schemas.microsoft.com/office/drawing/2014/main" id="{4BEA1A25-C1AB-43F1-A05B-E100BBE3985E}"/>
-              </a:ext>
-            </a:extLst>
-          </p:cNvPr>
-          <p:cNvSpPr txBox="1"/>
-          <p:nvPr/>
-        </p:nvSpPr>
-        <p:spPr>
-          <a:xfrm>
-            <a:off x="5004541" y="4429385"/>
-            <a:ext cx="1443396" cy="646331"/>
-          </a:xfrm>
-          <a:prstGeom prst="rect">
-            <a:avLst/>
-          </a:prstGeom>
-          <a:noFill/>
-        </p:spPr>
-        <p:txBody>
-          <a:bodyPr wrap="square" rtlCol="0">
-            <a:spAutoFit/>
-          </a:bodyPr>
-          <a:lstStyle/>
-          <a:p>
-            <a:r>
-              <a:rPr lang="en-US" dirty="0"/>
-              <a:t>Sign Inventory</a:t>
-            </a:r>
-          </a:p>
-        </p:txBody>
-      </p:sp>
-      <p:sp>
-        <p:nvSpPr>
-          <p:cNvPr id="12" name="TextBox 11">
-            <a:extLst>
-              <a:ext uri="{FF2B5EF4-FFF2-40B4-BE49-F238E27FC236}">
-                <a16:creationId xmlns:a16="http://schemas.microsoft.com/office/drawing/2014/main" id="{2A9149D2-DA1D-4B32-94D4-A8DE3F46F0F5}"/>
-              </a:ext>
-            </a:extLst>
-          </p:cNvPr>
-          <p:cNvSpPr txBox="1"/>
-          <p:nvPr/>
-        </p:nvSpPr>
-        <p:spPr>
-          <a:xfrm>
-            <a:off x="247135" y="4697393"/>
-            <a:ext cx="701771" cy="246221"/>
-          </a:xfrm>
-          <a:prstGeom prst="rect">
-            <a:avLst/>
-          </a:prstGeom>
-          <a:noFill/>
-        </p:spPr>
-        <p:txBody>
-          <a:bodyPr wrap="square">
-            <a:spAutoFit/>
-          </a:bodyPr>
-          <a:lstStyle/>
-          <a:p>
-            <a:r>
-              <a:rPr lang="en-US" sz="1000" dirty="0">
-                <a:solidFill>
-                  <a:srgbClr val="7030A0"/>
-                </a:solidFill>
-              </a:rPr>
-              <a:t>ESRI</a:t>
-            </a:r>
-          </a:p>
-        </p:txBody>
-      </p:sp>
-      <p:sp>
-        <p:nvSpPr>
-          <p:cNvPr id="8" name="Slide Number Placeholder 7">
-            <a:extLst>
-              <a:ext uri="{FF2B5EF4-FFF2-40B4-BE49-F238E27FC236}">
-                <a16:creationId xmlns:a16="http://schemas.microsoft.com/office/drawing/2014/main" id="{45D92992-B9A5-45AB-B662-B343EC853C3F}"/>
+                <a16:creationId xmlns:a16="http://schemas.microsoft.com/office/drawing/2014/main" id="{51484D15-7CEC-FECE-1162-FFA1ACCD9876}"/>
               </a:ext>
             </a:extLst>
           </p:cNvPr>
@@ -21684,7 +18001,7 @@
     </p:spTree>
     <p:extLst>
       <p:ext uri="{BB962C8B-B14F-4D97-AF65-F5344CB8AC3E}">
-        <p14:creationId xmlns:p14="http://schemas.microsoft.com/office/powerpoint/2010/main" val="4244169940"/>
+        <p14:creationId xmlns:p14="http://schemas.microsoft.com/office/powerpoint/2010/main" val="751933952"/>
       </p:ext>
     </p:extLst>
   </p:cSld>
@@ -21711,430 +18028,62 @@
           <a:chExt cx="0" cy="0"/>
         </a:xfrm>
       </p:grpSpPr>
-      <p:cxnSp>
-        <p:nvCxnSpPr>
-          <p:cNvPr id="6" name="Straight Connector 5">
+      <p:sp>
+        <p:nvSpPr>
+          <p:cNvPr id="2" name="Title 1">
             <a:extLst>
               <a:ext uri="{FF2B5EF4-FFF2-40B4-BE49-F238E27FC236}">
-                <a16:creationId xmlns:a16="http://schemas.microsoft.com/office/drawing/2014/main" id="{72C807DF-E68B-4FDB-AF8B-FD65014E3363}"/>
+                <a16:creationId xmlns:a16="http://schemas.microsoft.com/office/drawing/2014/main" id="{FDAC3782-3336-9664-1B95-D172A46A842F}"/>
               </a:ext>
             </a:extLst>
           </p:cNvPr>
-          <p:cNvCxnSpPr/>
-          <p:nvPr/>
-        </p:nvCxnSpPr>
-        <p:spPr>
-          <a:xfrm>
-            <a:off x="152400" y="922910"/>
-            <a:ext cx="8001000" cy="0"/>
-          </a:xfrm>
-          <a:prstGeom prst="line">
-            <a:avLst/>
-          </a:prstGeom>
-          <a:ln>
-            <a:solidFill>
-              <a:schemeClr val="tx1"/>
-            </a:solidFill>
-          </a:ln>
-          <a:effectLst/>
-        </p:spPr>
-        <p:style>
-          <a:lnRef idx="2">
-            <a:schemeClr val="accent1"/>
-          </a:lnRef>
-          <a:fillRef idx="0">
-            <a:schemeClr val="accent1"/>
-          </a:fillRef>
-          <a:effectRef idx="1">
-            <a:schemeClr val="accent1"/>
-          </a:effectRef>
-          <a:fontRef idx="minor">
-            <a:schemeClr val="tx1"/>
-          </a:fontRef>
-        </p:style>
-      </p:cxnSp>
-      <p:sp>
-        <p:nvSpPr>
-          <p:cNvPr id="7" name="Title 1">
+          <p:cNvSpPr>
+            <a:spLocks noGrp="1"/>
+          </p:cNvSpPr>
+          <p:nvPr>
+            <p:ph type="title"/>
+          </p:nvPr>
+        </p:nvSpPr>
+        <p:spPr/>
+        <p:txBody>
+          <a:bodyPr/>
+          <a:lstStyle/>
+          <a:p>
+            <a:endParaRPr lang="en-US"/>
+          </a:p>
+        </p:txBody>
+      </p:sp>
+      <p:sp>
+        <p:nvSpPr>
+          <p:cNvPr id="3" name="Content Placeholder 2">
             <a:extLst>
               <a:ext uri="{FF2B5EF4-FFF2-40B4-BE49-F238E27FC236}">
-                <a16:creationId xmlns:a16="http://schemas.microsoft.com/office/drawing/2014/main" id="{81ABCB3B-7396-4070-8FA3-31111AB30A9C}"/>
+                <a16:creationId xmlns:a16="http://schemas.microsoft.com/office/drawing/2014/main" id="{E8C88111-D446-4B30-E1CE-2DCC2B27222B}"/>
               </a:ext>
             </a:extLst>
           </p:cNvPr>
-          <p:cNvSpPr txBox="1">
-            <a:spLocks/>
-          </p:cNvSpPr>
-          <p:nvPr/>
-        </p:nvSpPr>
-        <p:spPr>
-          <a:xfrm>
-            <a:off x="118533" y="43082"/>
-            <a:ext cx="8077200" cy="857250"/>
-          </a:xfrm>
-          <a:prstGeom prst="rect">
-            <a:avLst/>
-          </a:prstGeom>
-        </p:spPr>
-        <p:txBody>
-          <a:bodyPr vert="horz" lIns="91440" tIns="45720" rIns="91440" bIns="45720" rtlCol="0" anchor="ctr">
-            <a:normAutofit/>
-          </a:bodyPr>
-          <a:lstStyle>
-            <a:lvl1pPr algn="ctr" defTabSz="411480" rtl="0" eaLnBrk="1" latinLnBrk="0" hangingPunct="1">
-              <a:spcBef>
-                <a:spcPct val="0"/>
-              </a:spcBef>
-              <a:buNone/>
-              <a:defRPr sz="3960" kern="1200">
-                <a:solidFill>
-                  <a:schemeClr val="tx1"/>
-                </a:solidFill>
-                <a:latin typeface="+mj-lt"/>
-                <a:ea typeface="+mj-ea"/>
-                <a:cs typeface="+mj-cs"/>
-              </a:defRPr>
-            </a:lvl1pPr>
-          </a:lstStyle>
-          <a:p>
-            <a:pPr algn="l"/>
-            <a:r>
-              <a:rPr lang="en-US" sz="2600" dirty="0">
-                <a:solidFill>
-                  <a:srgbClr val="7030A0"/>
-                </a:solidFill>
-              </a:rPr>
-              <a:t>C</a:t>
-            </a:r>
-            <a:r>
-              <a:rPr lang="en-US" altLang="zh-CN" sz="2600" dirty="0">
-                <a:solidFill>
-                  <a:srgbClr val="7030A0"/>
-                </a:solidFill>
-              </a:rPr>
-              <a:t>ollector</a:t>
-            </a:r>
-            <a:endParaRPr lang="en-US" sz="2600" dirty="0">
-              <a:solidFill>
-                <a:srgbClr val="7030A0"/>
-              </a:solidFill>
-            </a:endParaRPr>
-          </a:p>
-        </p:txBody>
-      </p:sp>
-      <p:sp>
-        <p:nvSpPr>
-          <p:cNvPr id="2" name="Rectangle 1027">
+          <p:cNvSpPr>
+            <a:spLocks noGrp="1"/>
+          </p:cNvSpPr>
+          <p:nvPr>
+            <p:ph idx="1"/>
+          </p:nvPr>
+        </p:nvSpPr>
+        <p:spPr/>
+        <p:txBody>
+          <a:bodyPr/>
+          <a:lstStyle/>
+          <a:p>
+            <a:endParaRPr lang="en-US"/>
+          </a:p>
+        </p:txBody>
+      </p:sp>
+      <p:sp>
+        <p:nvSpPr>
+          <p:cNvPr id="4" name="Slide Number Placeholder 3">
             <a:extLst>
               <a:ext uri="{FF2B5EF4-FFF2-40B4-BE49-F238E27FC236}">
-                <a16:creationId xmlns:a16="http://schemas.microsoft.com/office/drawing/2014/main" id="{6AD63676-E604-4050-BF0E-A7B8DD754C47}"/>
-              </a:ext>
-            </a:extLst>
-          </p:cNvPr>
-          <p:cNvSpPr txBox="1">
-            <a:spLocks noChangeArrowheads="1"/>
-          </p:cNvSpPr>
-          <p:nvPr/>
-        </p:nvSpPr>
-        <p:spPr>
-          <a:xfrm>
-            <a:off x="247135" y="922910"/>
-            <a:ext cx="7679724" cy="3886200"/>
-          </a:xfrm>
-          <a:prstGeom prst="rect">
-            <a:avLst/>
-          </a:prstGeom>
-        </p:spPr>
-        <p:txBody>
-          <a:bodyPr vert="horz" lIns="91440" tIns="45720" rIns="91440" bIns="45720" rtlCol="0">
-            <a:normAutofit/>
-          </a:bodyPr>
-          <a:lstStyle>
-            <a:lvl1pPr marL="308610" indent="-308610" algn="l" defTabSz="411480" rtl="0" eaLnBrk="1" latinLnBrk="0" hangingPunct="1">
-              <a:spcBef>
-                <a:spcPct val="20000"/>
-              </a:spcBef>
-              <a:buFont typeface="Arial"/>
-              <a:buChar char="•"/>
-              <a:defRPr sz="2880" kern="1200">
-                <a:solidFill>
-                  <a:schemeClr val="tx1"/>
-                </a:solidFill>
-                <a:latin typeface="+mn-lt"/>
-                <a:ea typeface="+mn-ea"/>
-                <a:cs typeface="+mn-cs"/>
-              </a:defRPr>
-            </a:lvl1pPr>
-            <a:lvl2pPr marL="668655" indent="-257175" algn="l" defTabSz="411480" rtl="0" eaLnBrk="1" latinLnBrk="0" hangingPunct="1">
-              <a:spcBef>
-                <a:spcPct val="20000"/>
-              </a:spcBef>
-              <a:buFont typeface="Arial"/>
-              <a:buChar char="–"/>
-              <a:defRPr sz="2520" kern="1200">
-                <a:solidFill>
-                  <a:schemeClr val="tx1"/>
-                </a:solidFill>
-                <a:latin typeface="+mn-lt"/>
-                <a:ea typeface="+mn-ea"/>
-                <a:cs typeface="+mn-cs"/>
-              </a:defRPr>
-            </a:lvl2pPr>
-            <a:lvl3pPr marL="1028700" indent="-205740" algn="l" defTabSz="411480" rtl="0" eaLnBrk="1" latinLnBrk="0" hangingPunct="1">
-              <a:spcBef>
-                <a:spcPct val="20000"/>
-              </a:spcBef>
-              <a:buFont typeface="Arial"/>
-              <a:buChar char="•"/>
-              <a:defRPr sz="2160" kern="1200">
-                <a:solidFill>
-                  <a:schemeClr val="tx1"/>
-                </a:solidFill>
-                <a:latin typeface="+mn-lt"/>
-                <a:ea typeface="+mn-ea"/>
-                <a:cs typeface="+mn-cs"/>
-              </a:defRPr>
-            </a:lvl3pPr>
-            <a:lvl4pPr marL="1440180" indent="-205740" algn="l" defTabSz="411480" rtl="0" eaLnBrk="1" latinLnBrk="0" hangingPunct="1">
-              <a:spcBef>
-                <a:spcPct val="20000"/>
-              </a:spcBef>
-              <a:buFont typeface="Arial"/>
-              <a:buChar char="–"/>
-              <a:defRPr sz="1800" kern="1200">
-                <a:solidFill>
-                  <a:schemeClr val="tx1"/>
-                </a:solidFill>
-                <a:latin typeface="+mn-lt"/>
-                <a:ea typeface="+mn-ea"/>
-                <a:cs typeface="+mn-cs"/>
-              </a:defRPr>
-            </a:lvl4pPr>
-            <a:lvl5pPr marL="1851660" indent="-205740" algn="l" defTabSz="411480" rtl="0" eaLnBrk="1" latinLnBrk="0" hangingPunct="1">
-              <a:spcBef>
-                <a:spcPct val="20000"/>
-              </a:spcBef>
-              <a:buFont typeface="Arial"/>
-              <a:buChar char="»"/>
-              <a:defRPr sz="1800" kern="1200">
-                <a:solidFill>
-                  <a:schemeClr val="tx1"/>
-                </a:solidFill>
-                <a:latin typeface="+mn-lt"/>
-                <a:ea typeface="+mn-ea"/>
-                <a:cs typeface="+mn-cs"/>
-              </a:defRPr>
-            </a:lvl5pPr>
-            <a:lvl6pPr marL="2263140" indent="-205740" algn="l" defTabSz="411480" rtl="0" eaLnBrk="1" latinLnBrk="0" hangingPunct="1">
-              <a:spcBef>
-                <a:spcPct val="20000"/>
-              </a:spcBef>
-              <a:buFont typeface="Arial"/>
-              <a:buChar char="•"/>
-              <a:defRPr sz="1800" kern="1200">
-                <a:solidFill>
-                  <a:schemeClr val="tx1"/>
-                </a:solidFill>
-                <a:latin typeface="+mn-lt"/>
-                <a:ea typeface="+mn-ea"/>
-                <a:cs typeface="+mn-cs"/>
-              </a:defRPr>
-            </a:lvl6pPr>
-            <a:lvl7pPr marL="2674620" indent="-205740" algn="l" defTabSz="411480" rtl="0" eaLnBrk="1" latinLnBrk="0" hangingPunct="1">
-              <a:spcBef>
-                <a:spcPct val="20000"/>
-              </a:spcBef>
-              <a:buFont typeface="Arial"/>
-              <a:buChar char="•"/>
-              <a:defRPr sz="1800" kern="1200">
-                <a:solidFill>
-                  <a:schemeClr val="tx1"/>
-                </a:solidFill>
-                <a:latin typeface="+mn-lt"/>
-                <a:ea typeface="+mn-ea"/>
-                <a:cs typeface="+mn-cs"/>
-              </a:defRPr>
-            </a:lvl7pPr>
-            <a:lvl8pPr marL="3086100" indent="-205740" algn="l" defTabSz="411480" rtl="0" eaLnBrk="1" latinLnBrk="0" hangingPunct="1">
-              <a:spcBef>
-                <a:spcPct val="20000"/>
-              </a:spcBef>
-              <a:buFont typeface="Arial"/>
-              <a:buChar char="•"/>
-              <a:defRPr sz="1800" kern="1200">
-                <a:solidFill>
-                  <a:schemeClr val="tx1"/>
-                </a:solidFill>
-                <a:latin typeface="+mn-lt"/>
-                <a:ea typeface="+mn-ea"/>
-                <a:cs typeface="+mn-cs"/>
-              </a:defRPr>
-            </a:lvl8pPr>
-            <a:lvl9pPr marL="3497580" indent="-205740" algn="l" defTabSz="411480" rtl="0" eaLnBrk="1" latinLnBrk="0" hangingPunct="1">
-              <a:spcBef>
-                <a:spcPct val="20000"/>
-              </a:spcBef>
-              <a:buFont typeface="Arial"/>
-              <a:buChar char="•"/>
-              <a:defRPr sz="1800" kern="1200">
-                <a:solidFill>
-                  <a:schemeClr val="tx1"/>
-                </a:solidFill>
-                <a:latin typeface="+mn-lt"/>
-                <a:ea typeface="+mn-ea"/>
-                <a:cs typeface="+mn-cs"/>
-              </a:defRPr>
-            </a:lvl9pPr>
-          </a:lstStyle>
-          <a:p>
-            <a:pPr>
-              <a:buFont typeface="Courier New" panose="02070309020205020404" pitchFamily="49" charset="0"/>
-              <a:buChar char="o"/>
-            </a:pPr>
-            <a:r>
-              <a:rPr lang="en-US" altLang="en-US" dirty="0"/>
-              <a:t>Perform inspections</a:t>
-            </a:r>
-          </a:p>
-          <a:p>
-            <a:pPr lvl="1">
-              <a:buFont typeface="Wingdings" panose="05000000000000000000" pitchFamily="2" charset="2"/>
-              <a:buChar char="ü"/>
-            </a:pPr>
-            <a:r>
-              <a:rPr lang="en-US" altLang="en-US" dirty="0"/>
-              <a:t>Replace redundant, inefficient field processes</a:t>
-            </a:r>
-          </a:p>
-          <a:p>
-            <a:pPr lvl="1">
-              <a:buFont typeface="Wingdings" panose="05000000000000000000" pitchFamily="2" charset="2"/>
-              <a:buChar char="ü"/>
-            </a:pPr>
-            <a:r>
-              <a:rPr lang="en-US" altLang="en-US" dirty="0"/>
-              <a:t>Improve operational efficiency</a:t>
-            </a:r>
-          </a:p>
-          <a:p>
-            <a:pPr lvl="1">
-              <a:buFont typeface="Wingdings" panose="05000000000000000000" pitchFamily="2" charset="2"/>
-              <a:buChar char="ü"/>
-            </a:pPr>
-            <a:endParaRPr lang="en-US" altLang="en-US" dirty="0"/>
-          </a:p>
-        </p:txBody>
-      </p:sp>
-      <p:sp>
-        <p:nvSpPr>
-          <p:cNvPr id="5" name="TextBox 4">
-            <a:extLst>
-              <a:ext uri="{FF2B5EF4-FFF2-40B4-BE49-F238E27FC236}">
-                <a16:creationId xmlns:a16="http://schemas.microsoft.com/office/drawing/2014/main" id="{21D8F6A3-8136-432E-B5EF-F96F5687DBDF}"/>
-              </a:ext>
-            </a:extLst>
-          </p:cNvPr>
-          <p:cNvSpPr txBox="1"/>
-          <p:nvPr/>
-        </p:nvSpPr>
-        <p:spPr>
-          <a:xfrm>
-            <a:off x="2603957" y="4731086"/>
-            <a:ext cx="2674188" cy="369332"/>
-          </a:xfrm>
-          <a:prstGeom prst="rect">
-            <a:avLst/>
-          </a:prstGeom>
-          <a:noFill/>
-        </p:spPr>
-        <p:txBody>
-          <a:bodyPr wrap="square" rtlCol="0">
-            <a:spAutoFit/>
-          </a:bodyPr>
-          <a:lstStyle/>
-          <a:p>
-            <a:r>
-              <a:rPr lang="en-US" dirty="0"/>
-              <a:t>Water valve inspections</a:t>
-            </a:r>
-          </a:p>
-        </p:txBody>
-      </p:sp>
-      <p:sp>
-        <p:nvSpPr>
-          <p:cNvPr id="3" name="TextBox 2">
-            <a:extLst>
-              <a:ext uri="{FF2B5EF4-FFF2-40B4-BE49-F238E27FC236}">
-                <a16:creationId xmlns:a16="http://schemas.microsoft.com/office/drawing/2014/main" id="{77AC95F2-D596-4A45-A200-10A8AE08F398}"/>
-              </a:ext>
-            </a:extLst>
-          </p:cNvPr>
-          <p:cNvSpPr txBox="1"/>
-          <p:nvPr/>
-        </p:nvSpPr>
-        <p:spPr>
-          <a:xfrm>
-            <a:off x="247135" y="4697393"/>
-            <a:ext cx="701771" cy="246221"/>
-          </a:xfrm>
-          <a:prstGeom prst="rect">
-            <a:avLst/>
-          </a:prstGeom>
-          <a:noFill/>
-        </p:spPr>
-        <p:txBody>
-          <a:bodyPr wrap="square">
-            <a:spAutoFit/>
-          </a:bodyPr>
-          <a:lstStyle/>
-          <a:p>
-            <a:r>
-              <a:rPr lang="en-US" sz="1000" dirty="0">
-                <a:solidFill>
-                  <a:srgbClr val="7030A0"/>
-                </a:solidFill>
-              </a:rPr>
-              <a:t>ESRI</a:t>
-            </a:r>
-          </a:p>
-        </p:txBody>
-      </p:sp>
-      <p:pic>
-        <p:nvPicPr>
-          <p:cNvPr id="12" name="Picture 11" descr="Image showing collector example">
-            <a:extLst>
-              <a:ext uri="{FF2B5EF4-FFF2-40B4-BE49-F238E27FC236}">
-                <a16:creationId xmlns:a16="http://schemas.microsoft.com/office/drawing/2014/main" id="{08B853CF-B700-4381-A430-C710E0707F84}"/>
-              </a:ext>
-            </a:extLst>
-          </p:cNvPr>
-          <p:cNvPicPr>
-            <a:picLocks noChangeAspect="1"/>
-          </p:cNvPicPr>
-          <p:nvPr/>
-        </p:nvPicPr>
-        <p:blipFill>
-          <a:blip r:embed="rId3"/>
-          <a:stretch>
-            <a:fillRect/>
-          </a:stretch>
-        </p:blipFill>
-        <p:spPr>
-          <a:xfrm>
-            <a:off x="2222777" y="2505410"/>
-            <a:ext cx="2918566" cy="2192350"/>
-          </a:xfrm>
-          <a:prstGeom prst="rect">
-            <a:avLst/>
-          </a:prstGeom>
-        </p:spPr>
-      </p:pic>
-      <p:sp>
-        <p:nvSpPr>
-          <p:cNvPr id="8" name="Slide Number Placeholder 7">
-            <a:extLst>
-              <a:ext uri="{FF2B5EF4-FFF2-40B4-BE49-F238E27FC236}">
-                <a16:creationId xmlns:a16="http://schemas.microsoft.com/office/drawing/2014/main" id="{A9C6CA34-D7C5-4837-B2AF-3B4FE3AC5EF1}"/>
+                <a16:creationId xmlns:a16="http://schemas.microsoft.com/office/drawing/2014/main" id="{2162681C-347F-8BBA-D682-40643FBD8CE9}"/>
               </a:ext>
             </a:extLst>
           </p:cNvPr>
@@ -22162,7 +18111,7 @@
     </p:spTree>
     <p:extLst>
       <p:ext uri="{BB962C8B-B14F-4D97-AF65-F5344CB8AC3E}">
-        <p14:creationId xmlns:p14="http://schemas.microsoft.com/office/powerpoint/2010/main" val="2213132687"/>
+        <p14:creationId xmlns:p14="http://schemas.microsoft.com/office/powerpoint/2010/main" val="3871060277"/>
       </p:ext>
     </p:extLst>
   </p:cSld>
@@ -22189,401 +18138,62 @@
           <a:chExt cx="0" cy="0"/>
         </a:xfrm>
       </p:grpSpPr>
-      <p:cxnSp>
-        <p:nvCxnSpPr>
-          <p:cNvPr id="6" name="Straight Connector 5">
+      <p:sp>
+        <p:nvSpPr>
+          <p:cNvPr id="2" name="Title 1">
             <a:extLst>
               <a:ext uri="{FF2B5EF4-FFF2-40B4-BE49-F238E27FC236}">
-                <a16:creationId xmlns:a16="http://schemas.microsoft.com/office/drawing/2014/main" id="{72C807DF-E68B-4FDB-AF8B-FD65014E3363}"/>
+                <a16:creationId xmlns:a16="http://schemas.microsoft.com/office/drawing/2014/main" id="{71B202B5-DFE8-3533-5280-B8112DB2DF5F}"/>
               </a:ext>
             </a:extLst>
           </p:cNvPr>
-          <p:cNvCxnSpPr/>
-          <p:nvPr/>
-        </p:nvCxnSpPr>
-        <p:spPr>
-          <a:xfrm>
-            <a:off x="152400" y="922910"/>
-            <a:ext cx="8001000" cy="0"/>
-          </a:xfrm>
-          <a:prstGeom prst="line">
-            <a:avLst/>
-          </a:prstGeom>
-          <a:ln>
-            <a:solidFill>
-              <a:schemeClr val="tx1"/>
-            </a:solidFill>
-          </a:ln>
-          <a:effectLst/>
-        </p:spPr>
-        <p:style>
-          <a:lnRef idx="2">
-            <a:schemeClr val="accent1"/>
-          </a:lnRef>
-          <a:fillRef idx="0">
-            <a:schemeClr val="accent1"/>
-          </a:fillRef>
-          <a:effectRef idx="1">
-            <a:schemeClr val="accent1"/>
-          </a:effectRef>
-          <a:fontRef idx="minor">
-            <a:schemeClr val="tx1"/>
-          </a:fontRef>
-        </p:style>
-      </p:cxnSp>
-      <p:sp>
-        <p:nvSpPr>
-          <p:cNvPr id="7" name="Title 1">
+          <p:cNvSpPr>
+            <a:spLocks noGrp="1"/>
+          </p:cNvSpPr>
+          <p:nvPr>
+            <p:ph type="title"/>
+          </p:nvPr>
+        </p:nvSpPr>
+        <p:spPr/>
+        <p:txBody>
+          <a:bodyPr/>
+          <a:lstStyle/>
+          <a:p>
+            <a:endParaRPr lang="en-US"/>
+          </a:p>
+        </p:txBody>
+      </p:sp>
+      <p:sp>
+        <p:nvSpPr>
+          <p:cNvPr id="3" name="Content Placeholder 2">
             <a:extLst>
               <a:ext uri="{FF2B5EF4-FFF2-40B4-BE49-F238E27FC236}">
-                <a16:creationId xmlns:a16="http://schemas.microsoft.com/office/drawing/2014/main" id="{81ABCB3B-7396-4070-8FA3-31111AB30A9C}"/>
+                <a16:creationId xmlns:a16="http://schemas.microsoft.com/office/drawing/2014/main" id="{EB1D1B74-A882-5C13-B71F-8299AAFAB67E}"/>
               </a:ext>
             </a:extLst>
           </p:cNvPr>
-          <p:cNvSpPr txBox="1">
-            <a:spLocks/>
-          </p:cNvSpPr>
-          <p:nvPr/>
-        </p:nvSpPr>
-        <p:spPr>
-          <a:xfrm>
-            <a:off x="118533" y="43082"/>
-            <a:ext cx="8077200" cy="857250"/>
-          </a:xfrm>
-          <a:prstGeom prst="rect">
-            <a:avLst/>
-          </a:prstGeom>
-        </p:spPr>
-        <p:txBody>
-          <a:bodyPr vert="horz" lIns="91440" tIns="45720" rIns="91440" bIns="45720" rtlCol="0" anchor="ctr">
-            <a:normAutofit/>
-          </a:bodyPr>
-          <a:lstStyle>
-            <a:lvl1pPr algn="ctr" defTabSz="411480" rtl="0" eaLnBrk="1" latinLnBrk="0" hangingPunct="1">
-              <a:spcBef>
-                <a:spcPct val="0"/>
-              </a:spcBef>
-              <a:buNone/>
-              <a:defRPr sz="3960" kern="1200">
-                <a:solidFill>
-                  <a:schemeClr val="tx1"/>
-                </a:solidFill>
-                <a:latin typeface="+mj-lt"/>
-                <a:ea typeface="+mj-ea"/>
-                <a:cs typeface="+mj-cs"/>
-              </a:defRPr>
-            </a:lvl1pPr>
-          </a:lstStyle>
-          <a:p>
-            <a:pPr algn="l"/>
-            <a:r>
-              <a:rPr lang="en-US" sz="2600" dirty="0">
-                <a:solidFill>
-                  <a:srgbClr val="7030A0"/>
-                </a:solidFill>
-              </a:rPr>
-              <a:t>Workflow</a:t>
-            </a:r>
-          </a:p>
-        </p:txBody>
-      </p:sp>
-      <p:sp>
-        <p:nvSpPr>
-          <p:cNvPr id="2" name="Rectangle 1027">
+          <p:cNvSpPr>
+            <a:spLocks noGrp="1"/>
+          </p:cNvSpPr>
+          <p:nvPr>
+            <p:ph idx="1"/>
+          </p:nvPr>
+        </p:nvSpPr>
+        <p:spPr/>
+        <p:txBody>
+          <a:bodyPr/>
+          <a:lstStyle/>
+          <a:p>
+            <a:endParaRPr lang="en-US"/>
+          </a:p>
+        </p:txBody>
+      </p:sp>
+      <p:sp>
+        <p:nvSpPr>
+          <p:cNvPr id="4" name="Slide Number Placeholder 3">
             <a:extLst>
               <a:ext uri="{FF2B5EF4-FFF2-40B4-BE49-F238E27FC236}">
-                <a16:creationId xmlns:a16="http://schemas.microsoft.com/office/drawing/2014/main" id="{6AD63676-E604-4050-BF0E-A7B8DD754C47}"/>
-              </a:ext>
-            </a:extLst>
-          </p:cNvPr>
-          <p:cNvSpPr txBox="1">
-            <a:spLocks noChangeArrowheads="1"/>
-          </p:cNvSpPr>
-          <p:nvPr/>
-        </p:nvSpPr>
-        <p:spPr>
-          <a:xfrm>
-            <a:off x="247135" y="922910"/>
-            <a:ext cx="7679724" cy="3886200"/>
-          </a:xfrm>
-          <a:prstGeom prst="rect">
-            <a:avLst/>
-          </a:prstGeom>
-        </p:spPr>
-        <p:txBody>
-          <a:bodyPr vert="horz" lIns="91440" tIns="45720" rIns="91440" bIns="45720" rtlCol="0">
-            <a:normAutofit/>
-          </a:bodyPr>
-          <a:lstStyle>
-            <a:lvl1pPr marL="308610" indent="-308610" algn="l" defTabSz="411480" rtl="0" eaLnBrk="1" latinLnBrk="0" hangingPunct="1">
-              <a:spcBef>
-                <a:spcPct val="20000"/>
-              </a:spcBef>
-              <a:buFont typeface="Arial"/>
-              <a:buChar char="•"/>
-              <a:defRPr sz="2880" kern="1200">
-                <a:solidFill>
-                  <a:schemeClr val="tx1"/>
-                </a:solidFill>
-                <a:latin typeface="+mn-lt"/>
-                <a:ea typeface="+mn-ea"/>
-                <a:cs typeface="+mn-cs"/>
-              </a:defRPr>
-            </a:lvl1pPr>
-            <a:lvl2pPr marL="668655" indent="-257175" algn="l" defTabSz="411480" rtl="0" eaLnBrk="1" latinLnBrk="0" hangingPunct="1">
-              <a:spcBef>
-                <a:spcPct val="20000"/>
-              </a:spcBef>
-              <a:buFont typeface="Arial"/>
-              <a:buChar char="–"/>
-              <a:defRPr sz="2520" kern="1200">
-                <a:solidFill>
-                  <a:schemeClr val="tx1"/>
-                </a:solidFill>
-                <a:latin typeface="+mn-lt"/>
-                <a:ea typeface="+mn-ea"/>
-                <a:cs typeface="+mn-cs"/>
-              </a:defRPr>
-            </a:lvl2pPr>
-            <a:lvl3pPr marL="1028700" indent="-205740" algn="l" defTabSz="411480" rtl="0" eaLnBrk="1" latinLnBrk="0" hangingPunct="1">
-              <a:spcBef>
-                <a:spcPct val="20000"/>
-              </a:spcBef>
-              <a:buFont typeface="Arial"/>
-              <a:buChar char="•"/>
-              <a:defRPr sz="2160" kern="1200">
-                <a:solidFill>
-                  <a:schemeClr val="tx1"/>
-                </a:solidFill>
-                <a:latin typeface="+mn-lt"/>
-                <a:ea typeface="+mn-ea"/>
-                <a:cs typeface="+mn-cs"/>
-              </a:defRPr>
-            </a:lvl3pPr>
-            <a:lvl4pPr marL="1440180" indent="-205740" algn="l" defTabSz="411480" rtl="0" eaLnBrk="1" latinLnBrk="0" hangingPunct="1">
-              <a:spcBef>
-                <a:spcPct val="20000"/>
-              </a:spcBef>
-              <a:buFont typeface="Arial"/>
-              <a:buChar char="–"/>
-              <a:defRPr sz="1800" kern="1200">
-                <a:solidFill>
-                  <a:schemeClr val="tx1"/>
-                </a:solidFill>
-                <a:latin typeface="+mn-lt"/>
-                <a:ea typeface="+mn-ea"/>
-                <a:cs typeface="+mn-cs"/>
-              </a:defRPr>
-            </a:lvl4pPr>
-            <a:lvl5pPr marL="1851660" indent="-205740" algn="l" defTabSz="411480" rtl="0" eaLnBrk="1" latinLnBrk="0" hangingPunct="1">
-              <a:spcBef>
-                <a:spcPct val="20000"/>
-              </a:spcBef>
-              <a:buFont typeface="Arial"/>
-              <a:buChar char="»"/>
-              <a:defRPr sz="1800" kern="1200">
-                <a:solidFill>
-                  <a:schemeClr val="tx1"/>
-                </a:solidFill>
-                <a:latin typeface="+mn-lt"/>
-                <a:ea typeface="+mn-ea"/>
-                <a:cs typeface="+mn-cs"/>
-              </a:defRPr>
-            </a:lvl5pPr>
-            <a:lvl6pPr marL="2263140" indent="-205740" algn="l" defTabSz="411480" rtl="0" eaLnBrk="1" latinLnBrk="0" hangingPunct="1">
-              <a:spcBef>
-                <a:spcPct val="20000"/>
-              </a:spcBef>
-              <a:buFont typeface="Arial"/>
-              <a:buChar char="•"/>
-              <a:defRPr sz="1800" kern="1200">
-                <a:solidFill>
-                  <a:schemeClr val="tx1"/>
-                </a:solidFill>
-                <a:latin typeface="+mn-lt"/>
-                <a:ea typeface="+mn-ea"/>
-                <a:cs typeface="+mn-cs"/>
-              </a:defRPr>
-            </a:lvl6pPr>
-            <a:lvl7pPr marL="2674620" indent="-205740" algn="l" defTabSz="411480" rtl="0" eaLnBrk="1" latinLnBrk="0" hangingPunct="1">
-              <a:spcBef>
-                <a:spcPct val="20000"/>
-              </a:spcBef>
-              <a:buFont typeface="Arial"/>
-              <a:buChar char="•"/>
-              <a:defRPr sz="1800" kern="1200">
-                <a:solidFill>
-                  <a:schemeClr val="tx1"/>
-                </a:solidFill>
-                <a:latin typeface="+mn-lt"/>
-                <a:ea typeface="+mn-ea"/>
-                <a:cs typeface="+mn-cs"/>
-              </a:defRPr>
-            </a:lvl7pPr>
-            <a:lvl8pPr marL="3086100" indent="-205740" algn="l" defTabSz="411480" rtl="0" eaLnBrk="1" latinLnBrk="0" hangingPunct="1">
-              <a:spcBef>
-                <a:spcPct val="20000"/>
-              </a:spcBef>
-              <a:buFont typeface="Arial"/>
-              <a:buChar char="•"/>
-              <a:defRPr sz="1800" kern="1200">
-                <a:solidFill>
-                  <a:schemeClr val="tx1"/>
-                </a:solidFill>
-                <a:latin typeface="+mn-lt"/>
-                <a:ea typeface="+mn-ea"/>
-                <a:cs typeface="+mn-cs"/>
-              </a:defRPr>
-            </a:lvl8pPr>
-            <a:lvl9pPr marL="3497580" indent="-205740" algn="l" defTabSz="411480" rtl="0" eaLnBrk="1" latinLnBrk="0" hangingPunct="1">
-              <a:spcBef>
-                <a:spcPct val="20000"/>
-              </a:spcBef>
-              <a:buFont typeface="Arial"/>
-              <a:buChar char="•"/>
-              <a:defRPr sz="1800" kern="1200">
-                <a:solidFill>
-                  <a:schemeClr val="tx1"/>
-                </a:solidFill>
-                <a:latin typeface="+mn-lt"/>
-                <a:ea typeface="+mn-ea"/>
-                <a:cs typeface="+mn-cs"/>
-              </a:defRPr>
-            </a:lvl9pPr>
-          </a:lstStyle>
-          <a:p>
-            <a:pPr>
-              <a:buFont typeface="Courier New" panose="02070309020205020404" pitchFamily="49" charset="0"/>
-              <a:buChar char="o"/>
-            </a:pPr>
-            <a:r>
-              <a:rPr lang="en-US" altLang="en-US" dirty="0"/>
-              <a:t>Create feature layers to collect data</a:t>
-            </a:r>
-          </a:p>
-          <a:p>
-            <a:pPr lvl="1">
-              <a:buFont typeface="Wingdings" panose="05000000000000000000" pitchFamily="2" charset="2"/>
-              <a:buChar char="ü"/>
-            </a:pPr>
-            <a:r>
-              <a:rPr lang="en-US" altLang="en-US" dirty="0"/>
-              <a:t>ArcGIS Online or ArcGIS Enterprise</a:t>
-            </a:r>
-          </a:p>
-          <a:p>
-            <a:pPr>
-              <a:buFont typeface="Courier New" panose="02070309020205020404" pitchFamily="49" charset="0"/>
-              <a:buChar char="o"/>
-            </a:pPr>
-            <a:r>
-              <a:rPr lang="en-US" altLang="en-US" dirty="0"/>
-              <a:t>Add to a web map</a:t>
-            </a:r>
-          </a:p>
-          <a:p>
-            <a:pPr lvl="1">
-              <a:buFont typeface="Wingdings" panose="05000000000000000000" pitchFamily="2" charset="2"/>
-              <a:buChar char="ü"/>
-            </a:pPr>
-            <a:r>
-              <a:rPr lang="en-US" altLang="en-US" dirty="0"/>
-              <a:t>Share the map and layers to a group</a:t>
-            </a:r>
-          </a:p>
-          <a:p>
-            <a:pPr>
-              <a:buFont typeface="Courier New" panose="02070309020205020404" pitchFamily="49" charset="0"/>
-              <a:buChar char="o"/>
-            </a:pPr>
-            <a:r>
-              <a:rPr lang="en-US" altLang="en-US" dirty="0"/>
-              <a:t>Use the map in Collector</a:t>
-            </a:r>
-          </a:p>
-          <a:p>
-            <a:pPr marL="411480" lvl="1" indent="0">
-              <a:buNone/>
-            </a:pPr>
-            <a:endParaRPr lang="en-US" altLang="en-US" dirty="0"/>
-          </a:p>
-        </p:txBody>
-      </p:sp>
-      <p:sp>
-        <p:nvSpPr>
-          <p:cNvPr id="3" name="TextBox 2">
-            <a:extLst>
-              <a:ext uri="{FF2B5EF4-FFF2-40B4-BE49-F238E27FC236}">
-                <a16:creationId xmlns:a16="http://schemas.microsoft.com/office/drawing/2014/main" id="{77AC95F2-D596-4A45-A200-10A8AE08F398}"/>
-              </a:ext>
-            </a:extLst>
-          </p:cNvPr>
-          <p:cNvSpPr txBox="1"/>
-          <p:nvPr/>
-        </p:nvSpPr>
-        <p:spPr>
-          <a:xfrm>
-            <a:off x="247135" y="4697393"/>
-            <a:ext cx="701771" cy="246221"/>
-          </a:xfrm>
-          <a:prstGeom prst="rect">
-            <a:avLst/>
-          </a:prstGeom>
-          <a:noFill/>
-        </p:spPr>
-        <p:txBody>
-          <a:bodyPr wrap="square">
-            <a:spAutoFit/>
-          </a:bodyPr>
-          <a:lstStyle/>
-          <a:p>
-            <a:r>
-              <a:rPr lang="en-US" sz="1000" dirty="0">
-                <a:solidFill>
-                  <a:srgbClr val="7030A0"/>
-                </a:solidFill>
-              </a:rPr>
-              <a:t>ESRI</a:t>
-            </a:r>
-          </a:p>
-        </p:txBody>
-      </p:sp>
-      <p:pic>
-        <p:nvPicPr>
-          <p:cNvPr id="8" name="Picture 7" descr="Image showing the steps of Collector data collection">
-            <a:extLst>
-              <a:ext uri="{FF2B5EF4-FFF2-40B4-BE49-F238E27FC236}">
-                <a16:creationId xmlns:a16="http://schemas.microsoft.com/office/drawing/2014/main" id="{538A2C2D-F602-4592-AF19-F7E1D6F9177A}"/>
-              </a:ext>
-            </a:extLst>
-          </p:cNvPr>
-          <p:cNvPicPr>
-            <a:picLocks noChangeAspect="1"/>
-          </p:cNvPicPr>
-          <p:nvPr/>
-        </p:nvPicPr>
-        <p:blipFill>
-          <a:blip r:embed="rId3"/>
-          <a:stretch>
-            <a:fillRect/>
-          </a:stretch>
-        </p:blipFill>
-        <p:spPr>
-          <a:xfrm>
-            <a:off x="1628505" y="3454687"/>
-            <a:ext cx="5048790" cy="1296311"/>
-          </a:xfrm>
-          <a:prstGeom prst="rect">
-            <a:avLst/>
-          </a:prstGeom>
-        </p:spPr>
-      </p:pic>
-      <p:sp>
-        <p:nvSpPr>
-          <p:cNvPr id="5" name="Slide Number Placeholder 4">
-            <a:extLst>
-              <a:ext uri="{FF2B5EF4-FFF2-40B4-BE49-F238E27FC236}">
-                <a16:creationId xmlns:a16="http://schemas.microsoft.com/office/drawing/2014/main" id="{0309BA0C-58B2-48D2-9FAE-ADBA922D5438}"/>
+                <a16:creationId xmlns:a16="http://schemas.microsoft.com/office/drawing/2014/main" id="{A7678992-81B0-DF6E-D8E8-CA741AD6D11E}"/>
               </a:ext>
             </a:extLst>
           </p:cNvPr>
@@ -22611,7 +18221,7 @@
     </p:spTree>
     <p:extLst>
       <p:ext uri="{BB962C8B-B14F-4D97-AF65-F5344CB8AC3E}">
-        <p14:creationId xmlns:p14="http://schemas.microsoft.com/office/powerpoint/2010/main" val="2746217532"/>
+        <p14:creationId xmlns:p14="http://schemas.microsoft.com/office/powerpoint/2010/main" val="753209424"/>
       </p:ext>
     </p:extLst>
   </p:cSld>
@@ -22638,12 +18248,232 @@
           <a:chExt cx="0" cy="0"/>
         </a:xfrm>
       </p:grpSpPr>
+      <p:sp>
+        <p:nvSpPr>
+          <p:cNvPr id="2" name="Title 1">
+            <a:extLst>
+              <a:ext uri="{FF2B5EF4-FFF2-40B4-BE49-F238E27FC236}">
+                <a16:creationId xmlns:a16="http://schemas.microsoft.com/office/drawing/2014/main" id="{3C130564-6E8E-022D-5B79-70631F881EB4}"/>
+              </a:ext>
+            </a:extLst>
+          </p:cNvPr>
+          <p:cNvSpPr>
+            <a:spLocks noGrp="1"/>
+          </p:cNvSpPr>
+          <p:nvPr>
+            <p:ph type="title"/>
+          </p:nvPr>
+        </p:nvSpPr>
+        <p:spPr/>
+        <p:txBody>
+          <a:bodyPr/>
+          <a:lstStyle/>
+          <a:p>
+            <a:endParaRPr lang="en-US"/>
+          </a:p>
+        </p:txBody>
+      </p:sp>
+      <p:sp>
+        <p:nvSpPr>
+          <p:cNvPr id="3" name="Content Placeholder 2">
+            <a:extLst>
+              <a:ext uri="{FF2B5EF4-FFF2-40B4-BE49-F238E27FC236}">
+                <a16:creationId xmlns:a16="http://schemas.microsoft.com/office/drawing/2014/main" id="{0A80812D-AF26-9365-80F7-06462BF9F41D}"/>
+              </a:ext>
+            </a:extLst>
+          </p:cNvPr>
+          <p:cNvSpPr>
+            <a:spLocks noGrp="1"/>
+          </p:cNvSpPr>
+          <p:nvPr>
+            <p:ph idx="1"/>
+          </p:nvPr>
+        </p:nvSpPr>
+        <p:spPr/>
+        <p:txBody>
+          <a:bodyPr/>
+          <a:lstStyle/>
+          <a:p>
+            <a:endParaRPr lang="en-US"/>
+          </a:p>
+        </p:txBody>
+      </p:sp>
+      <p:sp>
+        <p:nvSpPr>
+          <p:cNvPr id="4" name="Slide Number Placeholder 3">
+            <a:extLst>
+              <a:ext uri="{FF2B5EF4-FFF2-40B4-BE49-F238E27FC236}">
+                <a16:creationId xmlns:a16="http://schemas.microsoft.com/office/drawing/2014/main" id="{E485B480-4387-EB66-8B17-85B63E889993}"/>
+              </a:ext>
+            </a:extLst>
+          </p:cNvPr>
+          <p:cNvSpPr>
+            <a:spLocks noGrp="1"/>
+          </p:cNvSpPr>
+          <p:nvPr>
+            <p:ph type="sldNum" sz="quarter" idx="12"/>
+          </p:nvPr>
+        </p:nvSpPr>
+        <p:spPr/>
+        <p:txBody>
+          <a:bodyPr/>
+          <a:lstStyle/>
+          <a:p>
+            <a:fld id="{127DDC20-79C9-9647-820E-6D40A3D210C3}" type="slidenum">
+              <a:rPr lang="en-US" smtClean="0"/>
+              <a:pPr/>
+              <a:t>8</a:t>
+            </a:fld>
+            <a:endParaRPr lang="en-US"/>
+          </a:p>
+        </p:txBody>
+      </p:sp>
+    </p:spTree>
+    <p:extLst>
+      <p:ext uri="{BB962C8B-B14F-4D97-AF65-F5344CB8AC3E}">
+        <p14:creationId xmlns:p14="http://schemas.microsoft.com/office/powerpoint/2010/main" val="1345871685"/>
+      </p:ext>
+    </p:extLst>
+  </p:cSld>
+  <p:clrMapOvr>
+    <a:masterClrMapping/>
+  </p:clrMapOvr>
+</p:sld>
+</file>
+
+<file path=ppt/slides/slide9.xml><?xml version="1.0" encoding="utf-8"?>
+<p:sld xmlns:a="http://schemas.openxmlformats.org/drawingml/2006/main" xmlns:r="http://schemas.openxmlformats.org/officeDocument/2006/relationships" xmlns:p="http://schemas.openxmlformats.org/presentationml/2006/main">
+  <p:cSld>
+    <p:spTree>
+      <p:nvGrpSpPr>
+        <p:cNvPr id="1" name="">
+          <a:extLst>
+            <a:ext uri="{FF2B5EF4-FFF2-40B4-BE49-F238E27FC236}">
+              <a16:creationId xmlns:a16="http://schemas.microsoft.com/office/drawing/2014/main" id="{AB799FA9-FD96-3049-26FA-D4806529C6FA}"/>
+            </a:ext>
+          </a:extLst>
+        </p:cNvPr>
+        <p:cNvGrpSpPr/>
+        <p:nvPr/>
+      </p:nvGrpSpPr>
+      <p:grpSpPr>
+        <a:xfrm>
+          <a:off x="0" y="0"/>
+          <a:ext cx="0" cy="0"/>
+          <a:chOff x="0" y="0"/>
+          <a:chExt cx="0" cy="0"/>
+        </a:xfrm>
+      </p:grpSpPr>
+      <p:sp>
+        <p:nvSpPr>
+          <p:cNvPr id="56323" name="Rectangle 1027">
+            <a:extLst>
+              <a:ext uri="{FF2B5EF4-FFF2-40B4-BE49-F238E27FC236}">
+                <a16:creationId xmlns:a16="http://schemas.microsoft.com/office/drawing/2014/main" id="{AFAE66CB-D868-EABA-CF7F-AA1A6E3F215D}"/>
+              </a:ext>
+            </a:extLst>
+          </p:cNvPr>
+          <p:cNvSpPr>
+            <a:spLocks noGrp="1" noChangeArrowheads="1"/>
+          </p:cNvSpPr>
+          <p:nvPr>
+            <p:ph idx="1"/>
+          </p:nvPr>
+        </p:nvSpPr>
+        <p:spPr>
+          <a:xfrm>
+            <a:off x="302741" y="1197227"/>
+            <a:ext cx="7679724" cy="3886200"/>
+          </a:xfrm>
+        </p:spPr>
+        <p:txBody>
+          <a:bodyPr>
+            <a:normAutofit/>
+          </a:bodyPr>
+          <a:lstStyle/>
+          <a:p>
+            <a:pPr>
+              <a:buFont typeface="Courier New" panose="02070309020205020404" pitchFamily="49" charset="0"/>
+              <a:buChar char="o"/>
+            </a:pPr>
+            <a:r>
+              <a:rPr lang="en-US" altLang="en-US" dirty="0"/>
+              <a:t>A</a:t>
+            </a:r>
+            <a:r>
+              <a:rPr lang="en-US" altLang="zh-CN" dirty="0"/>
+              <a:t>rcGIS Collector</a:t>
+            </a:r>
+          </a:p>
+          <a:p>
+            <a:pPr lvl="1">
+              <a:buFont typeface="Wingdings" panose="05000000000000000000" pitchFamily="2" charset="2"/>
+              <a:buChar char="ü"/>
+            </a:pPr>
+            <a:r>
+              <a:rPr lang="en-US" altLang="en-US" dirty="0"/>
+              <a:t>Capture assets and observations</a:t>
+            </a:r>
+          </a:p>
+          <a:p>
+            <a:pPr lvl="1">
+              <a:buFont typeface="Wingdings" panose="05000000000000000000" pitchFamily="2" charset="2"/>
+              <a:buChar char="ü"/>
+            </a:pPr>
+            <a:r>
+              <a:rPr lang="en-US" altLang="en-US" dirty="0"/>
+              <a:t>Perform inspections</a:t>
+            </a:r>
+          </a:p>
+          <a:p>
+            <a:pPr>
+              <a:buFont typeface="Courier New" panose="02070309020205020404" pitchFamily="49" charset="0"/>
+              <a:buChar char="o"/>
+            </a:pPr>
+            <a:r>
+              <a:rPr lang="en-US" altLang="en-US" dirty="0"/>
+              <a:t>Workflow</a:t>
+            </a:r>
+            <a:endParaRPr lang="en-US" altLang="en-US" sz="2520" dirty="0"/>
+          </a:p>
+        </p:txBody>
+      </p:sp>
+      <p:sp>
+        <p:nvSpPr>
+          <p:cNvPr id="2" name="Slide Number Placeholder 1">
+            <a:extLst>
+              <a:ext uri="{FF2B5EF4-FFF2-40B4-BE49-F238E27FC236}">
+                <a16:creationId xmlns:a16="http://schemas.microsoft.com/office/drawing/2014/main" id="{EF994069-D0B0-13EE-5456-F5E81C82E260}"/>
+              </a:ext>
+            </a:extLst>
+          </p:cNvPr>
+          <p:cNvSpPr>
+            <a:spLocks noGrp="1"/>
+          </p:cNvSpPr>
+          <p:nvPr>
+            <p:ph type="sldNum" sz="quarter" idx="12"/>
+          </p:nvPr>
+        </p:nvSpPr>
+        <p:spPr/>
+        <p:txBody>
+          <a:bodyPr/>
+          <a:lstStyle/>
+          <a:p>
+            <a:fld id="{127DDC20-79C9-9647-820E-6D40A3D210C3}" type="slidenum">
+              <a:rPr lang="en-US" smtClean="0"/>
+              <a:pPr/>
+              <a:t>9</a:t>
+            </a:fld>
+            <a:endParaRPr lang="en-US"/>
+          </a:p>
+        </p:txBody>
+      </p:sp>
       <p:cxnSp>
         <p:nvCxnSpPr>
-          <p:cNvPr id="6" name="Straight Connector 5">
+          <p:cNvPr id="4" name="Straight Connector 3">
             <a:extLst>
               <a:ext uri="{FF2B5EF4-FFF2-40B4-BE49-F238E27FC236}">
-                <a16:creationId xmlns:a16="http://schemas.microsoft.com/office/drawing/2014/main" id="{72C807DF-E68B-4FDB-AF8B-FD65014E3363}"/>
+                <a16:creationId xmlns:a16="http://schemas.microsoft.com/office/drawing/2014/main" id="{6F556A6A-63CD-862A-E6BB-5BF5EB85C34F}"/>
               </a:ext>
             </a:extLst>
           </p:cNvPr>
@@ -22682,10 +18512,10 @@
       </p:cxnSp>
       <p:sp>
         <p:nvSpPr>
-          <p:cNvPr id="7" name="Title 1">
+          <p:cNvPr id="5" name="Title 1">
             <a:extLst>
               <a:ext uri="{FF2B5EF4-FFF2-40B4-BE49-F238E27FC236}">
-                <a16:creationId xmlns:a16="http://schemas.microsoft.com/office/drawing/2014/main" id="{81ABCB3B-7396-4070-8FA3-31111AB30A9C}"/>
+                <a16:creationId xmlns:a16="http://schemas.microsoft.com/office/drawing/2014/main" id="{8DB0C76B-BD87-ED30-B7DA-6BBB0A468889}"/>
               </a:ext>
             </a:extLst>
           </p:cNvPr>
@@ -22696,8 +18526,8 @@
         </p:nvSpPr>
         <p:spPr>
           <a:xfrm>
-            <a:off x="118533" y="43082"/>
-            <a:ext cx="8077200" cy="857250"/>
+            <a:off x="237640" y="202819"/>
+            <a:ext cx="2087105" cy="857250"/>
           </a:xfrm>
           <a:prstGeom prst="rect">
             <a:avLst/>
@@ -22726,435 +18556,27 @@
           <a:p>
             <a:pPr algn="l"/>
             <a:r>
-              <a:rPr lang="en-US" sz="2600" dirty="0">
+              <a:rPr lang="en-US" sz="3200" dirty="0">
                 <a:solidFill>
                   <a:srgbClr val="7030A0"/>
                 </a:solidFill>
               </a:rPr>
-              <a:t>Workflow</a:t>
-            </a:r>
-          </a:p>
-        </p:txBody>
-      </p:sp>
-      <p:sp>
-        <p:nvSpPr>
-          <p:cNvPr id="2" name="Rectangle 1027">
+              <a:t>Overview</a:t>
+            </a:r>
+            <a:endParaRPr lang="en-US" sz="2600" i="1" dirty="0">
+              <a:solidFill>
+                <a:srgbClr val="7030A0"/>
+              </a:solidFill>
+            </a:endParaRPr>
+          </a:p>
+        </p:txBody>
+      </p:sp>
+      <p:sp>
+        <p:nvSpPr>
+          <p:cNvPr id="3" name="Title 1">
             <a:extLst>
               <a:ext uri="{FF2B5EF4-FFF2-40B4-BE49-F238E27FC236}">
-                <a16:creationId xmlns:a16="http://schemas.microsoft.com/office/drawing/2014/main" id="{6AD63676-E604-4050-BF0E-A7B8DD754C47}"/>
-              </a:ext>
-            </a:extLst>
-          </p:cNvPr>
-          <p:cNvSpPr txBox="1">
-            <a:spLocks noChangeArrowheads="1"/>
-          </p:cNvSpPr>
-          <p:nvPr/>
-        </p:nvSpPr>
-        <p:spPr>
-          <a:xfrm>
-            <a:off x="247135" y="922910"/>
-            <a:ext cx="7679724" cy="3886200"/>
-          </a:xfrm>
-          <a:prstGeom prst="rect">
-            <a:avLst/>
-          </a:prstGeom>
-        </p:spPr>
-        <p:txBody>
-          <a:bodyPr vert="horz" lIns="91440" tIns="45720" rIns="91440" bIns="45720" rtlCol="0">
-            <a:normAutofit fontScale="92500" lnSpcReduction="20000"/>
-          </a:bodyPr>
-          <a:lstStyle>
-            <a:lvl1pPr marL="308610" indent="-308610" algn="l" defTabSz="411480" rtl="0" eaLnBrk="1" latinLnBrk="0" hangingPunct="1">
-              <a:spcBef>
-                <a:spcPct val="20000"/>
-              </a:spcBef>
-              <a:buFont typeface="Arial"/>
-              <a:buChar char="•"/>
-              <a:defRPr sz="2880" kern="1200">
-                <a:solidFill>
-                  <a:schemeClr val="tx1"/>
-                </a:solidFill>
-                <a:latin typeface="+mn-lt"/>
-                <a:ea typeface="+mn-ea"/>
-                <a:cs typeface="+mn-cs"/>
-              </a:defRPr>
-            </a:lvl1pPr>
-            <a:lvl2pPr marL="668655" indent="-257175" algn="l" defTabSz="411480" rtl="0" eaLnBrk="1" latinLnBrk="0" hangingPunct="1">
-              <a:spcBef>
-                <a:spcPct val="20000"/>
-              </a:spcBef>
-              <a:buFont typeface="Arial"/>
-              <a:buChar char="–"/>
-              <a:defRPr sz="2520" kern="1200">
-                <a:solidFill>
-                  <a:schemeClr val="tx1"/>
-                </a:solidFill>
-                <a:latin typeface="+mn-lt"/>
-                <a:ea typeface="+mn-ea"/>
-                <a:cs typeface="+mn-cs"/>
-              </a:defRPr>
-            </a:lvl2pPr>
-            <a:lvl3pPr marL="1028700" indent="-205740" algn="l" defTabSz="411480" rtl="0" eaLnBrk="1" latinLnBrk="0" hangingPunct="1">
-              <a:spcBef>
-                <a:spcPct val="20000"/>
-              </a:spcBef>
-              <a:buFont typeface="Arial"/>
-              <a:buChar char="•"/>
-              <a:defRPr sz="2160" kern="1200">
-                <a:solidFill>
-                  <a:schemeClr val="tx1"/>
-                </a:solidFill>
-                <a:latin typeface="+mn-lt"/>
-                <a:ea typeface="+mn-ea"/>
-                <a:cs typeface="+mn-cs"/>
-              </a:defRPr>
-            </a:lvl3pPr>
-            <a:lvl4pPr marL="1440180" indent="-205740" algn="l" defTabSz="411480" rtl="0" eaLnBrk="1" latinLnBrk="0" hangingPunct="1">
-              <a:spcBef>
-                <a:spcPct val="20000"/>
-              </a:spcBef>
-              <a:buFont typeface="Arial"/>
-              <a:buChar char="–"/>
-              <a:defRPr sz="1800" kern="1200">
-                <a:solidFill>
-                  <a:schemeClr val="tx1"/>
-                </a:solidFill>
-                <a:latin typeface="+mn-lt"/>
-                <a:ea typeface="+mn-ea"/>
-                <a:cs typeface="+mn-cs"/>
-              </a:defRPr>
-            </a:lvl4pPr>
-            <a:lvl5pPr marL="1851660" indent="-205740" algn="l" defTabSz="411480" rtl="0" eaLnBrk="1" latinLnBrk="0" hangingPunct="1">
-              <a:spcBef>
-                <a:spcPct val="20000"/>
-              </a:spcBef>
-              <a:buFont typeface="Arial"/>
-              <a:buChar char="»"/>
-              <a:defRPr sz="1800" kern="1200">
-                <a:solidFill>
-                  <a:schemeClr val="tx1"/>
-                </a:solidFill>
-                <a:latin typeface="+mn-lt"/>
-                <a:ea typeface="+mn-ea"/>
-                <a:cs typeface="+mn-cs"/>
-              </a:defRPr>
-            </a:lvl5pPr>
-            <a:lvl6pPr marL="2263140" indent="-205740" algn="l" defTabSz="411480" rtl="0" eaLnBrk="1" latinLnBrk="0" hangingPunct="1">
-              <a:spcBef>
-                <a:spcPct val="20000"/>
-              </a:spcBef>
-              <a:buFont typeface="Arial"/>
-              <a:buChar char="•"/>
-              <a:defRPr sz="1800" kern="1200">
-                <a:solidFill>
-                  <a:schemeClr val="tx1"/>
-                </a:solidFill>
-                <a:latin typeface="+mn-lt"/>
-                <a:ea typeface="+mn-ea"/>
-                <a:cs typeface="+mn-cs"/>
-              </a:defRPr>
-            </a:lvl6pPr>
-            <a:lvl7pPr marL="2674620" indent="-205740" algn="l" defTabSz="411480" rtl="0" eaLnBrk="1" latinLnBrk="0" hangingPunct="1">
-              <a:spcBef>
-                <a:spcPct val="20000"/>
-              </a:spcBef>
-              <a:buFont typeface="Arial"/>
-              <a:buChar char="•"/>
-              <a:defRPr sz="1800" kern="1200">
-                <a:solidFill>
-                  <a:schemeClr val="tx1"/>
-                </a:solidFill>
-                <a:latin typeface="+mn-lt"/>
-                <a:ea typeface="+mn-ea"/>
-                <a:cs typeface="+mn-cs"/>
-              </a:defRPr>
-            </a:lvl7pPr>
-            <a:lvl8pPr marL="3086100" indent="-205740" algn="l" defTabSz="411480" rtl="0" eaLnBrk="1" latinLnBrk="0" hangingPunct="1">
-              <a:spcBef>
-                <a:spcPct val="20000"/>
-              </a:spcBef>
-              <a:buFont typeface="Arial"/>
-              <a:buChar char="•"/>
-              <a:defRPr sz="1800" kern="1200">
-                <a:solidFill>
-                  <a:schemeClr val="tx1"/>
-                </a:solidFill>
-                <a:latin typeface="+mn-lt"/>
-                <a:ea typeface="+mn-ea"/>
-                <a:cs typeface="+mn-cs"/>
-              </a:defRPr>
-            </a:lvl8pPr>
-            <a:lvl9pPr marL="3497580" indent="-205740" algn="l" defTabSz="411480" rtl="0" eaLnBrk="1" latinLnBrk="0" hangingPunct="1">
-              <a:spcBef>
-                <a:spcPct val="20000"/>
-              </a:spcBef>
-              <a:buFont typeface="Arial"/>
-              <a:buChar char="•"/>
-              <a:defRPr sz="1800" kern="1200">
-                <a:solidFill>
-                  <a:schemeClr val="tx1"/>
-                </a:solidFill>
-                <a:latin typeface="+mn-lt"/>
-                <a:ea typeface="+mn-ea"/>
-                <a:cs typeface="+mn-cs"/>
-              </a:defRPr>
-            </a:lvl9pPr>
-          </a:lstStyle>
-          <a:p>
-            <a:pPr>
-              <a:buFont typeface="Courier New" panose="02070309020205020404" pitchFamily="49" charset="0"/>
-              <a:buChar char="o"/>
-            </a:pPr>
-            <a:r>
-              <a:rPr lang="en-US" altLang="en-US" dirty="0"/>
-              <a:t>Create feature layers to collect data</a:t>
-            </a:r>
-          </a:p>
-          <a:p>
-            <a:pPr lvl="1">
-              <a:buFont typeface="Wingdings" panose="05000000000000000000" pitchFamily="2" charset="2"/>
-              <a:buChar char="ü"/>
-            </a:pPr>
-            <a:r>
-              <a:rPr lang="en-US" altLang="en-US" dirty="0"/>
-              <a:t>Data sources</a:t>
-            </a:r>
-          </a:p>
-          <a:p>
-            <a:pPr lvl="2">
-              <a:buFont typeface="Arial" panose="020B0604020202020204" pitchFamily="34" charset="0"/>
-              <a:buChar char="•"/>
-            </a:pPr>
-            <a:r>
-              <a:rPr lang="en-US" altLang="en-US" dirty="0"/>
-              <a:t>ArcGIS online hosted feature layer</a:t>
-            </a:r>
-          </a:p>
-          <a:p>
-            <a:pPr lvl="2">
-              <a:buFont typeface="Arial" panose="020B0604020202020204" pitchFamily="34" charset="0"/>
-              <a:buChar char="•"/>
-            </a:pPr>
-            <a:r>
-              <a:rPr lang="en-US" altLang="en-US" dirty="0"/>
-              <a:t>ArcGIS Enterprise hosted feature layer</a:t>
-            </a:r>
-          </a:p>
-          <a:p>
-            <a:pPr lvl="2">
-              <a:buFont typeface="Arial" panose="020B0604020202020204" pitchFamily="34" charset="0"/>
-              <a:buChar char="•"/>
-            </a:pPr>
-            <a:r>
-              <a:rPr lang="en-US" altLang="en-US" dirty="0"/>
-              <a:t>ArcGIS Server feature service (Enterprise geodatabase)</a:t>
-            </a:r>
-          </a:p>
-          <a:p>
-            <a:pPr lvl="1">
-              <a:buFont typeface="Wingdings" panose="05000000000000000000" pitchFamily="2" charset="2"/>
-              <a:buChar char="ü"/>
-            </a:pPr>
-            <a:r>
-              <a:rPr lang="en-US" altLang="en-US" dirty="0"/>
-              <a:t>Create in ArcGIS Pro</a:t>
-            </a:r>
-          </a:p>
-          <a:p>
-            <a:pPr lvl="2">
-              <a:buFont typeface="Arial" panose="020B0604020202020204" pitchFamily="34" charset="0"/>
-              <a:buChar char="•"/>
-            </a:pPr>
-            <a:r>
-              <a:rPr lang="en-US" altLang="en-US" dirty="0"/>
-              <a:t>Create new feature class and share as a feature layer</a:t>
-            </a:r>
-          </a:p>
-          <a:p>
-            <a:pPr lvl="1">
-              <a:buFont typeface="Wingdings" panose="05000000000000000000" pitchFamily="2" charset="2"/>
-              <a:buChar char="ü"/>
-            </a:pPr>
-            <a:r>
-              <a:rPr lang="en-US" altLang="en-US" dirty="0"/>
-              <a:t>Create in ArcGIS Online or ArcGIS Enterprise with feature layer templates</a:t>
-            </a:r>
-          </a:p>
-          <a:p>
-            <a:pPr lvl="2">
-              <a:buFont typeface="Arial" panose="020B0604020202020204" pitchFamily="34" charset="0"/>
-              <a:buChar char="•"/>
-            </a:pPr>
-            <a:r>
-              <a:rPr lang="en-US" altLang="en-US" dirty="0"/>
-              <a:t>Industry focused or Build your own layer</a:t>
-            </a:r>
-          </a:p>
-          <a:p>
-            <a:pPr lvl="2">
-              <a:buFont typeface="Arial" panose="020B0604020202020204" pitchFamily="34" charset="0"/>
-              <a:buChar char="•"/>
-            </a:pPr>
-            <a:r>
-              <a:rPr lang="en-US" altLang="en-US" dirty="0"/>
-              <a:t>Completely customizable</a:t>
-            </a:r>
-          </a:p>
-          <a:p>
-            <a:pPr marL="411480" lvl="1" indent="0">
-              <a:buNone/>
-            </a:pPr>
-            <a:endParaRPr lang="en-US" altLang="en-US" dirty="0"/>
-          </a:p>
-        </p:txBody>
-      </p:sp>
-      <p:sp>
-        <p:nvSpPr>
-          <p:cNvPr id="3" name="TextBox 2">
-            <a:extLst>
-              <a:ext uri="{FF2B5EF4-FFF2-40B4-BE49-F238E27FC236}">
-                <a16:creationId xmlns:a16="http://schemas.microsoft.com/office/drawing/2014/main" id="{77AC95F2-D596-4A45-A200-10A8AE08F398}"/>
-              </a:ext>
-            </a:extLst>
-          </p:cNvPr>
-          <p:cNvSpPr txBox="1"/>
-          <p:nvPr/>
-        </p:nvSpPr>
-        <p:spPr>
-          <a:xfrm>
-            <a:off x="247135" y="4697393"/>
-            <a:ext cx="701771" cy="246221"/>
-          </a:xfrm>
-          <a:prstGeom prst="rect">
-            <a:avLst/>
-          </a:prstGeom>
-          <a:noFill/>
-        </p:spPr>
-        <p:txBody>
-          <a:bodyPr wrap="square">
-            <a:spAutoFit/>
-          </a:bodyPr>
-          <a:lstStyle/>
-          <a:p>
-            <a:r>
-              <a:rPr lang="en-US" sz="1000" dirty="0">
-                <a:solidFill>
-                  <a:srgbClr val="7030A0"/>
-                </a:solidFill>
-              </a:rPr>
-              <a:t>ESRI</a:t>
-            </a:r>
-          </a:p>
-        </p:txBody>
-      </p:sp>
-      <p:sp>
-        <p:nvSpPr>
-          <p:cNvPr id="5" name="Slide Number Placeholder 4">
-            <a:extLst>
-              <a:ext uri="{FF2B5EF4-FFF2-40B4-BE49-F238E27FC236}">
-                <a16:creationId xmlns:a16="http://schemas.microsoft.com/office/drawing/2014/main" id="{8B52DAB4-4D09-4A27-9E9F-75EF157EE800}"/>
-              </a:ext>
-            </a:extLst>
-          </p:cNvPr>
-          <p:cNvSpPr>
-            <a:spLocks noGrp="1"/>
-          </p:cNvSpPr>
-          <p:nvPr>
-            <p:ph type="sldNum" sz="quarter" idx="12"/>
-          </p:nvPr>
-        </p:nvSpPr>
-        <p:spPr/>
-        <p:txBody>
-          <a:bodyPr/>
-          <a:lstStyle/>
-          <a:p>
-            <a:fld id="{127DDC20-79C9-9647-820E-6D40A3D210C3}" type="slidenum">
-              <a:rPr lang="en-US" smtClean="0"/>
-              <a:pPr/>
-              <a:t>8</a:t>
-            </a:fld>
-            <a:endParaRPr lang="en-US"/>
-          </a:p>
-        </p:txBody>
-      </p:sp>
-    </p:spTree>
-    <p:extLst>
-      <p:ext uri="{BB962C8B-B14F-4D97-AF65-F5344CB8AC3E}">
-        <p14:creationId xmlns:p14="http://schemas.microsoft.com/office/powerpoint/2010/main" val="3576658912"/>
-      </p:ext>
-    </p:extLst>
-  </p:cSld>
-  <p:clrMapOvr>
-    <a:masterClrMapping/>
-  </p:clrMapOvr>
-</p:sld>
-</file>
-
-<file path=ppt/slides/slide9.xml><?xml version="1.0" encoding="utf-8"?>
-<p:sld xmlns:a="http://schemas.openxmlformats.org/drawingml/2006/main" xmlns:r="http://schemas.openxmlformats.org/officeDocument/2006/relationships" xmlns:p="http://schemas.openxmlformats.org/presentationml/2006/main">
-  <p:cSld>
-    <p:spTree>
-      <p:nvGrpSpPr>
-        <p:cNvPr id="1" name=""/>
-        <p:cNvGrpSpPr/>
-        <p:nvPr/>
-      </p:nvGrpSpPr>
-      <p:grpSpPr>
-        <a:xfrm>
-          <a:off x="0" y="0"/>
-          <a:ext cx="0" cy="0"/>
-          <a:chOff x="0" y="0"/>
-          <a:chExt cx="0" cy="0"/>
-        </a:xfrm>
-      </p:grpSpPr>
-      <p:cxnSp>
-        <p:nvCxnSpPr>
-          <p:cNvPr id="6" name="Straight Connector 5">
-            <a:extLst>
-              <a:ext uri="{FF2B5EF4-FFF2-40B4-BE49-F238E27FC236}">
-                <a16:creationId xmlns:a16="http://schemas.microsoft.com/office/drawing/2014/main" id="{72C807DF-E68B-4FDB-AF8B-FD65014E3363}"/>
-              </a:ext>
-            </a:extLst>
-          </p:cNvPr>
-          <p:cNvCxnSpPr/>
-          <p:nvPr/>
-        </p:nvCxnSpPr>
-        <p:spPr>
-          <a:xfrm>
-            <a:off x="152400" y="922910"/>
-            <a:ext cx="8001000" cy="0"/>
-          </a:xfrm>
-          <a:prstGeom prst="line">
-            <a:avLst/>
-          </a:prstGeom>
-          <a:ln>
-            <a:solidFill>
-              <a:schemeClr val="tx1"/>
-            </a:solidFill>
-          </a:ln>
-          <a:effectLst/>
-        </p:spPr>
-        <p:style>
-          <a:lnRef idx="2">
-            <a:schemeClr val="accent1"/>
-          </a:lnRef>
-          <a:fillRef idx="0">
-            <a:schemeClr val="accent1"/>
-          </a:fillRef>
-          <a:effectRef idx="1">
-            <a:schemeClr val="accent1"/>
-          </a:effectRef>
-          <a:fontRef idx="minor">
-            <a:schemeClr val="tx1"/>
-          </a:fontRef>
-        </p:style>
-      </p:cxnSp>
-      <p:sp>
-        <p:nvSpPr>
-          <p:cNvPr id="7" name="Title 1">
-            <a:extLst>
-              <a:ext uri="{FF2B5EF4-FFF2-40B4-BE49-F238E27FC236}">
-                <a16:creationId xmlns:a16="http://schemas.microsoft.com/office/drawing/2014/main" id="{81ABCB3B-7396-4070-8FA3-31111AB30A9C}"/>
+                <a16:creationId xmlns:a16="http://schemas.microsoft.com/office/drawing/2014/main" id="{19238EA3-DF83-E38B-BF35-250F1F1975D1}"/>
               </a:ext>
             </a:extLst>
           </p:cNvPr>
@@ -23165,8 +18587,8 @@
         </p:nvSpPr>
         <p:spPr>
           <a:xfrm>
-            <a:off x="118533" y="43082"/>
-            <a:ext cx="8077200" cy="857250"/>
+            <a:off x="390040" y="355219"/>
+            <a:ext cx="2087105" cy="857250"/>
           </a:xfrm>
           <a:prstGeom prst="rect">
             <a:avLst/>
@@ -23195,294 +18617,27 @@
           <a:p>
             <a:pPr algn="l"/>
             <a:r>
-              <a:rPr lang="en-US" sz="2600" dirty="0">
+              <a:rPr lang="en-US" sz="3200" dirty="0">
                 <a:solidFill>
                   <a:srgbClr val="7030A0"/>
                 </a:solidFill>
               </a:rPr>
-              <a:t>Workflow</a:t>
-            </a:r>
-          </a:p>
-        </p:txBody>
-      </p:sp>
-      <p:sp>
-        <p:nvSpPr>
-          <p:cNvPr id="2" name="Rectangle 1027">
+              <a:t>Overview</a:t>
+            </a:r>
+            <a:endParaRPr lang="en-US" sz="2600" i="1" dirty="0">
+              <a:solidFill>
+                <a:srgbClr val="7030A0"/>
+              </a:solidFill>
+            </a:endParaRPr>
+          </a:p>
+        </p:txBody>
+      </p:sp>
+      <p:sp>
+        <p:nvSpPr>
+          <p:cNvPr id="7" name="TextBox 6">
             <a:extLst>
               <a:ext uri="{FF2B5EF4-FFF2-40B4-BE49-F238E27FC236}">
-                <a16:creationId xmlns:a16="http://schemas.microsoft.com/office/drawing/2014/main" id="{6AD63676-E604-4050-BF0E-A7B8DD754C47}"/>
-              </a:ext>
-            </a:extLst>
-          </p:cNvPr>
-          <p:cNvSpPr txBox="1">
-            <a:spLocks noChangeArrowheads="1"/>
-          </p:cNvSpPr>
-          <p:nvPr/>
-        </p:nvSpPr>
-        <p:spPr>
-          <a:xfrm>
-            <a:off x="247135" y="922910"/>
-            <a:ext cx="7679724" cy="3886200"/>
-          </a:xfrm>
-          <a:prstGeom prst="rect">
-            <a:avLst/>
-          </a:prstGeom>
-        </p:spPr>
-        <p:txBody>
-          <a:bodyPr vert="horz" lIns="91440" tIns="45720" rIns="91440" bIns="45720" rtlCol="0">
-            <a:normAutofit fontScale="92500" lnSpcReduction="10000"/>
-          </a:bodyPr>
-          <a:lstStyle>
-            <a:lvl1pPr marL="308610" indent="-308610" algn="l" defTabSz="411480" rtl="0" eaLnBrk="1" latinLnBrk="0" hangingPunct="1">
-              <a:spcBef>
-                <a:spcPct val="20000"/>
-              </a:spcBef>
-              <a:buFont typeface="Arial"/>
-              <a:buChar char="•"/>
-              <a:defRPr sz="2880" kern="1200">
-                <a:solidFill>
-                  <a:schemeClr val="tx1"/>
-                </a:solidFill>
-                <a:latin typeface="+mn-lt"/>
-                <a:ea typeface="+mn-ea"/>
-                <a:cs typeface="+mn-cs"/>
-              </a:defRPr>
-            </a:lvl1pPr>
-            <a:lvl2pPr marL="668655" indent="-257175" algn="l" defTabSz="411480" rtl="0" eaLnBrk="1" latinLnBrk="0" hangingPunct="1">
-              <a:spcBef>
-                <a:spcPct val="20000"/>
-              </a:spcBef>
-              <a:buFont typeface="Arial"/>
-              <a:buChar char="–"/>
-              <a:defRPr sz="2520" kern="1200">
-                <a:solidFill>
-                  <a:schemeClr val="tx1"/>
-                </a:solidFill>
-                <a:latin typeface="+mn-lt"/>
-                <a:ea typeface="+mn-ea"/>
-                <a:cs typeface="+mn-cs"/>
-              </a:defRPr>
-            </a:lvl2pPr>
-            <a:lvl3pPr marL="1028700" indent="-205740" algn="l" defTabSz="411480" rtl="0" eaLnBrk="1" latinLnBrk="0" hangingPunct="1">
-              <a:spcBef>
-                <a:spcPct val="20000"/>
-              </a:spcBef>
-              <a:buFont typeface="Arial"/>
-              <a:buChar char="•"/>
-              <a:defRPr sz="2160" kern="1200">
-                <a:solidFill>
-                  <a:schemeClr val="tx1"/>
-                </a:solidFill>
-                <a:latin typeface="+mn-lt"/>
-                <a:ea typeface="+mn-ea"/>
-                <a:cs typeface="+mn-cs"/>
-              </a:defRPr>
-            </a:lvl3pPr>
-            <a:lvl4pPr marL="1440180" indent="-205740" algn="l" defTabSz="411480" rtl="0" eaLnBrk="1" latinLnBrk="0" hangingPunct="1">
-              <a:spcBef>
-                <a:spcPct val="20000"/>
-              </a:spcBef>
-              <a:buFont typeface="Arial"/>
-              <a:buChar char="–"/>
-              <a:defRPr sz="1800" kern="1200">
-                <a:solidFill>
-                  <a:schemeClr val="tx1"/>
-                </a:solidFill>
-                <a:latin typeface="+mn-lt"/>
-                <a:ea typeface="+mn-ea"/>
-                <a:cs typeface="+mn-cs"/>
-              </a:defRPr>
-            </a:lvl4pPr>
-            <a:lvl5pPr marL="1851660" indent="-205740" algn="l" defTabSz="411480" rtl="0" eaLnBrk="1" latinLnBrk="0" hangingPunct="1">
-              <a:spcBef>
-                <a:spcPct val="20000"/>
-              </a:spcBef>
-              <a:buFont typeface="Arial"/>
-              <a:buChar char="»"/>
-              <a:defRPr sz="1800" kern="1200">
-                <a:solidFill>
-                  <a:schemeClr val="tx1"/>
-                </a:solidFill>
-                <a:latin typeface="+mn-lt"/>
-                <a:ea typeface="+mn-ea"/>
-                <a:cs typeface="+mn-cs"/>
-              </a:defRPr>
-            </a:lvl5pPr>
-            <a:lvl6pPr marL="2263140" indent="-205740" algn="l" defTabSz="411480" rtl="0" eaLnBrk="1" latinLnBrk="0" hangingPunct="1">
-              <a:spcBef>
-                <a:spcPct val="20000"/>
-              </a:spcBef>
-              <a:buFont typeface="Arial"/>
-              <a:buChar char="•"/>
-              <a:defRPr sz="1800" kern="1200">
-                <a:solidFill>
-                  <a:schemeClr val="tx1"/>
-                </a:solidFill>
-                <a:latin typeface="+mn-lt"/>
-                <a:ea typeface="+mn-ea"/>
-                <a:cs typeface="+mn-cs"/>
-              </a:defRPr>
-            </a:lvl6pPr>
-            <a:lvl7pPr marL="2674620" indent="-205740" algn="l" defTabSz="411480" rtl="0" eaLnBrk="1" latinLnBrk="0" hangingPunct="1">
-              <a:spcBef>
-                <a:spcPct val="20000"/>
-              </a:spcBef>
-              <a:buFont typeface="Arial"/>
-              <a:buChar char="•"/>
-              <a:defRPr sz="1800" kern="1200">
-                <a:solidFill>
-                  <a:schemeClr val="tx1"/>
-                </a:solidFill>
-                <a:latin typeface="+mn-lt"/>
-                <a:ea typeface="+mn-ea"/>
-                <a:cs typeface="+mn-cs"/>
-              </a:defRPr>
-            </a:lvl7pPr>
-            <a:lvl8pPr marL="3086100" indent="-205740" algn="l" defTabSz="411480" rtl="0" eaLnBrk="1" latinLnBrk="0" hangingPunct="1">
-              <a:spcBef>
-                <a:spcPct val="20000"/>
-              </a:spcBef>
-              <a:buFont typeface="Arial"/>
-              <a:buChar char="•"/>
-              <a:defRPr sz="1800" kern="1200">
-                <a:solidFill>
-                  <a:schemeClr val="tx1"/>
-                </a:solidFill>
-                <a:latin typeface="+mn-lt"/>
-                <a:ea typeface="+mn-ea"/>
-                <a:cs typeface="+mn-cs"/>
-              </a:defRPr>
-            </a:lvl8pPr>
-            <a:lvl9pPr marL="3497580" indent="-205740" algn="l" defTabSz="411480" rtl="0" eaLnBrk="1" latinLnBrk="0" hangingPunct="1">
-              <a:spcBef>
-                <a:spcPct val="20000"/>
-              </a:spcBef>
-              <a:buFont typeface="Arial"/>
-              <a:buChar char="•"/>
-              <a:defRPr sz="1800" kern="1200">
-                <a:solidFill>
-                  <a:schemeClr val="tx1"/>
-                </a:solidFill>
-                <a:latin typeface="+mn-lt"/>
-                <a:ea typeface="+mn-ea"/>
-                <a:cs typeface="+mn-cs"/>
-              </a:defRPr>
-            </a:lvl9pPr>
-          </a:lstStyle>
-          <a:p>
-            <a:pPr>
-              <a:buFont typeface="Courier New" panose="02070309020205020404" pitchFamily="49" charset="0"/>
-              <a:buChar char="o"/>
-            </a:pPr>
-            <a:r>
-              <a:rPr lang="en-US" altLang="en-US" dirty="0"/>
-              <a:t>Feature Layer Properties</a:t>
-            </a:r>
-          </a:p>
-          <a:p>
-            <a:pPr lvl="1">
-              <a:buFont typeface="Wingdings" panose="05000000000000000000" pitchFamily="2" charset="2"/>
-              <a:buChar char="ü"/>
-            </a:pPr>
-            <a:r>
-              <a:rPr lang="en-US" altLang="en-US" dirty="0"/>
-              <a:t>Configure editing capabilities</a:t>
-            </a:r>
-          </a:p>
-          <a:p>
-            <a:pPr lvl="2">
-              <a:buFont typeface="Arial" panose="020B0604020202020204" pitchFamily="34" charset="0"/>
-              <a:buChar char="•"/>
-            </a:pPr>
-            <a:r>
-              <a:rPr lang="en-US" altLang="en-US" dirty="0"/>
-              <a:t>Add, update, and delete (default)</a:t>
-            </a:r>
-          </a:p>
-          <a:p>
-            <a:pPr lvl="2">
-              <a:buFont typeface="Arial" panose="020B0604020202020204" pitchFamily="34" charset="0"/>
-              <a:buChar char="•"/>
-            </a:pPr>
-            <a:r>
-              <a:rPr lang="en-US" altLang="en-US" dirty="0"/>
-              <a:t>Update attributes and geometry (default)</a:t>
-            </a:r>
-          </a:p>
-          <a:p>
-            <a:pPr lvl="1">
-              <a:buFont typeface="Wingdings" panose="05000000000000000000" pitchFamily="2" charset="2"/>
-              <a:buChar char="ü"/>
-            </a:pPr>
-            <a:r>
-              <a:rPr lang="en-US" altLang="en-US" dirty="0"/>
-              <a:t>Operations</a:t>
-            </a:r>
-          </a:p>
-          <a:p>
-            <a:pPr lvl="2">
-              <a:buFont typeface="Arial" panose="020B0604020202020204" pitchFamily="34" charset="0"/>
-              <a:buChar char="•"/>
-            </a:pPr>
-            <a:r>
-              <a:rPr lang="en-US" altLang="en-US" dirty="0"/>
-              <a:t>Editor tracking</a:t>
-            </a:r>
-          </a:p>
-          <a:p>
-            <a:pPr lvl="2">
-              <a:buFont typeface="Arial" panose="020B0604020202020204" pitchFamily="34" charset="0"/>
-              <a:buChar char="•"/>
-            </a:pPr>
-            <a:r>
-              <a:rPr lang="en-US" altLang="en-US" dirty="0"/>
-              <a:t>Synchronization (for offline workflows) (default)</a:t>
-            </a:r>
-          </a:p>
-          <a:p>
-            <a:pPr lvl="1">
-              <a:buFont typeface="Wingdings" panose="05000000000000000000" pitchFamily="2" charset="2"/>
-              <a:buChar char="ü"/>
-            </a:pPr>
-            <a:r>
-              <a:rPr lang="en-US" altLang="en-US" dirty="0"/>
-              <a:t>Display</a:t>
-            </a:r>
-          </a:p>
-          <a:p>
-            <a:pPr lvl="2">
-              <a:buFont typeface="Arial" panose="020B0604020202020204" pitchFamily="34" charset="0"/>
-              <a:buChar char="•"/>
-            </a:pPr>
-            <a:r>
-              <a:rPr lang="en-US" altLang="en-US" dirty="0"/>
-              <a:t>Define style and rendering (Visualization tab)</a:t>
-            </a:r>
-          </a:p>
-          <a:p>
-            <a:pPr lvl="2">
-              <a:buFont typeface="Arial" panose="020B0604020202020204" pitchFamily="34" charset="0"/>
-              <a:buChar char="•"/>
-            </a:pPr>
-            <a:r>
-              <a:rPr lang="en-US" altLang="en-US" dirty="0"/>
-              <a:t>Define form (Data tab)</a:t>
-            </a:r>
-          </a:p>
-          <a:p>
-            <a:pPr marL="411480" lvl="1" indent="0">
-              <a:buNone/>
-            </a:pPr>
-            <a:endParaRPr lang="en-US" altLang="en-US" dirty="0"/>
-          </a:p>
-        </p:txBody>
-      </p:sp>
-      <p:sp>
-        <p:nvSpPr>
-          <p:cNvPr id="3" name="TextBox 2">
-            <a:extLst>
-              <a:ext uri="{FF2B5EF4-FFF2-40B4-BE49-F238E27FC236}">
-                <a16:creationId xmlns:a16="http://schemas.microsoft.com/office/drawing/2014/main" id="{77AC95F2-D596-4A45-A200-10A8AE08F398}"/>
+                <a16:creationId xmlns:a16="http://schemas.microsoft.com/office/drawing/2014/main" id="{275372F9-89A1-FB42-2925-58F2498F97C2}"/>
               </a:ext>
             </a:extLst>
           </p:cNvPr>
@@ -23491,8 +18646,8 @@
         </p:nvSpPr>
         <p:spPr>
           <a:xfrm>
-            <a:off x="247135" y="4697393"/>
-            <a:ext cx="701771" cy="246221"/>
+            <a:off x="2057400" y="2388052"/>
+            <a:ext cx="4114800" cy="369332"/>
           </a:xfrm>
           <a:prstGeom prst="rect">
             <a:avLst/>
@@ -23506,50 +18661,21 @@
           <a:lstStyle/>
           <a:p>
             <a:r>
-              <a:rPr lang="en-US" sz="1000" dirty="0">
+              <a:rPr lang="en-US" sz="1800" dirty="0">
                 <a:solidFill>
                   <a:srgbClr val="7030A0"/>
                 </a:solidFill>
               </a:rPr>
-              <a:t>ESRI</a:t>
-            </a:r>
-          </a:p>
-        </p:txBody>
-      </p:sp>
-      <p:sp>
-        <p:nvSpPr>
-          <p:cNvPr id="5" name="Slide Number Placeholder 4">
-            <a:extLst>
-              <a:ext uri="{FF2B5EF4-FFF2-40B4-BE49-F238E27FC236}">
-                <a16:creationId xmlns:a16="http://schemas.microsoft.com/office/drawing/2014/main" id="{48A6EA3B-6789-4200-BEA4-6F5E1D47A657}"/>
-              </a:ext>
-            </a:extLst>
-          </p:cNvPr>
-          <p:cNvSpPr>
-            <a:spLocks noGrp="1"/>
-          </p:cNvSpPr>
-          <p:nvPr>
-            <p:ph type="sldNum" sz="quarter" idx="12"/>
-          </p:nvPr>
-        </p:nvSpPr>
-        <p:spPr/>
-        <p:txBody>
-          <a:bodyPr/>
-          <a:lstStyle/>
-          <a:p>
-            <a:fld id="{127DDC20-79C9-9647-820E-6D40A3D210C3}" type="slidenum">
-              <a:rPr lang="en-US" smtClean="0"/>
-              <a:pPr/>
-              <a:t>9</a:t>
-            </a:fld>
-            <a:endParaRPr lang="en-US"/>
+              <a:t>Overview</a:t>
+            </a:r>
+            <a:endParaRPr lang="en-US" dirty="0"/>
           </a:p>
         </p:txBody>
       </p:sp>
     </p:spTree>
     <p:extLst>
       <p:ext uri="{BB962C8B-B14F-4D97-AF65-F5344CB8AC3E}">
-        <p14:creationId xmlns:p14="http://schemas.microsoft.com/office/powerpoint/2010/main" val="1681274105"/>
+        <p14:creationId xmlns:p14="http://schemas.microsoft.com/office/powerpoint/2010/main" val="603722346"/>
       </p:ext>
     </p:extLst>
   </p:cSld>
